--- a/Minor_Project_Second_Defense.pptx
+++ b/Minor_Project_Second_Defense.pptx
@@ -15,6 +15,8 @@
     <p:sldId id="263" r:id="rId14"/>
     <p:sldId id="264" r:id="rId15"/>
     <p:sldId id="265" r:id="rId16"/>
+    <p:sldId id="266" r:id="rId17"/>
+    <p:sldId id="267" r:id="rId18"/>
   </p:sldIdLst>
   <p:sldSz cx="12191695" cy="6858000" type="screen4x3"/>
   <p:notesSz cx="6858000" cy="9144000"/>
@@ -3643,7 +3645,7 @@
         <p:spPr>
           <a:xfrm>
             <a:off x="566928" y="658368"/>
-            <a:ext cx="11064240" cy="685800"/>
+            <a:ext cx="10058400" cy="274320"/>
           </a:xfrm>
           <a:prstGeom prst="rect">
             <a:avLst/>
@@ -3665,13 +3667,13 @@
               </a:spcAft>
             </a:pPr>
             <a:r>
-              <a:rPr sz="3000" b="1" i="0">
-                <a:solidFill>
-                  <a:srgbClr val="1B335F"/>
-                </a:solidFill>
-                <a:latin typeface="Calibri"/>
-              </a:rPr>
-              <a:t>References</a:t>
+              <a:rPr sz="1200" b="1" i="0">
+                <a:solidFill>
+                  <a:srgbClr val="0F7773"/>
+                </a:solidFill>
+                <a:latin typeface="Calibri"/>
+              </a:rPr>
+              <a:t>RESULTS II: SCALE</a:t>
             </a:r>
           </a:p>
         </p:txBody>
@@ -3684,8 +3686,8 @@
         </p:nvSpPr>
         <p:spPr>
           <a:xfrm>
-            <a:off x="11064240" y="6263640"/>
-            <a:ext cx="594360" cy="274320"/>
+            <a:off x="566928" y="987552"/>
+            <a:ext cx="11064240" cy="685800"/>
           </a:xfrm>
           <a:prstGeom prst="rect">
             <a:avLst/>
@@ -3698,6 +3700,48 @@
           </a:bodyPr>
           <a:lstStyle/>
           <a:p>
+            <a:pPr algn="l">
+              <a:lnSpc>
+                <a:spcPct val="115000"/>
+              </a:lnSpc>
+              <a:spcAft>
+                <a:spcPts val="0"/>
+              </a:spcAft>
+            </a:pPr>
+            <a:r>
+              <a:rPr sz="3000" b="1" i="0">
+                <a:solidFill>
+                  <a:srgbClr val="1B335F"/>
+                </a:solidFill>
+                <a:latin typeface="Calibri"/>
+              </a:rPr>
+              <a:t>The same boundary, found from a completely different direction</a:t>
+            </a:r>
+          </a:p>
+        </p:txBody>
+      </p:sp>
+      <p:sp>
+        <p:nvSpPr>
+          <p:cNvPr id="5" name="TextBox 4"/>
+          <p:cNvSpPr txBox="1"/>
+          <p:nvPr/>
+        </p:nvSpPr>
+        <p:spPr>
+          <a:xfrm>
+            <a:off x="11064240" y="6263640"/>
+            <a:ext cx="594360" cy="274320"/>
+          </a:xfrm>
+          <a:prstGeom prst="rect">
+            <a:avLst/>
+          </a:prstGeom>
+          <a:noFill/>
+        </p:spPr>
+        <p:txBody>
+          <a:bodyPr wrap="square" lIns="0" rIns="0" tIns="0" bIns="0">
+            <a:spAutoFit/>
+          </a:bodyPr>
+          <a:lstStyle/>
+          <a:p>
             <a:pPr algn="r">
               <a:lnSpc>
                 <a:spcPct val="115000"/>
@@ -3714,6 +3758,1267 @@
                 <a:latin typeface="Calibri"/>
               </a:rPr>
               <a:t>10</a:t>
+            </a:r>
+          </a:p>
+        </p:txBody>
+      </p:sp>
+      <p:sp>
+        <p:nvSpPr>
+          <p:cNvPr id="6" name="TextBox 5"/>
+          <p:cNvSpPr txBox="1"/>
+          <p:nvPr/>
+        </p:nvSpPr>
+        <p:spPr>
+          <a:xfrm>
+            <a:off x="566928" y="1737360"/>
+            <a:ext cx="5285232" cy="1737360"/>
+          </a:xfrm>
+          <a:prstGeom prst="rect">
+            <a:avLst/>
+          </a:prstGeom>
+          <a:noFill/>
+        </p:spPr>
+        <p:txBody>
+          <a:bodyPr wrap="square" lIns="0" rIns="0" tIns="0" bIns="0">
+            <a:spAutoFit/>
+          </a:bodyPr>
+          <a:lstStyle/>
+          <a:p>
+            <a:pPr>
+              <a:lnSpc>
+                <a:spcPct val="118000"/>
+              </a:lnSpc>
+              <a:spcAft>
+                <a:spcPts val="900"/>
+              </a:spcAft>
+            </a:pPr>
+            <a:r>
+              <a:rPr sz="1400">
+                <a:solidFill>
+                  <a:srgbClr val="0F7773"/>
+                </a:solidFill>
+                <a:latin typeface="Calibri"/>
+              </a:rPr>
+              <a:t>▪  </a:t>
+            </a:r>
+            <a:r>
+              <a:rPr sz="1400" b="1">
+                <a:solidFill>
+                  <a:srgbClr val="1B335F"/>
+                </a:solidFill>
+                <a:latin typeface="Calibri"/>
+              </a:rPr>
+              <a:t>1,350 more runs. </a:t>
+            </a:r>
+            <a:r>
+              <a:rPr sz="1400">
+                <a:solidFill>
+                  <a:srgbClr val="2B2B2B"/>
+                </a:solidFill>
+                <a:latin typeface="Calibri"/>
+              </a:rPr>
+              <a:t>Three node counts by three field areas, 15 paired runs per cell, with the learned policies frozen at their 100-node weights.</a:t>
+            </a:r>
+          </a:p>
+          <a:p>
+            <a:pPr>
+              <a:lnSpc>
+                <a:spcPct val="118000"/>
+              </a:lnSpc>
+              <a:spcAft>
+                <a:spcPts val="900"/>
+              </a:spcAft>
+            </a:pPr>
+            <a:r>
+              <a:rPr sz="1400">
+                <a:solidFill>
+                  <a:srgbClr val="0F7773"/>
+                </a:solidFill>
+                <a:latin typeface="Calibri"/>
+              </a:rPr>
+              <a:t>▪  </a:t>
+            </a:r>
+            <a:r>
+              <a:rPr sz="1400" b="1">
+                <a:solidFill>
+                  <a:srgbClr val="1B335F"/>
+                </a:solidFill>
+                <a:latin typeface="Calibri"/>
+              </a:rPr>
+              <a:t>Area beats node count about five to one. </a:t>
+            </a:r>
+            <a:r>
+              <a:rPr sz="1400">
+                <a:solidFill>
+                  <a:srgbClr val="2B2B2B"/>
+                </a:solidFill>
+                <a:latin typeface="Calibri"/>
+              </a:rPr>
+              <a:t>Tripling the nodes moves first death by 0.88 to 1.26 times. Tripling the field side moves it by 5 to 7.</a:t>
+            </a:r>
+          </a:p>
+        </p:txBody>
+      </p:sp>
+      <p:sp>
+        <p:nvSpPr>
+          <p:cNvPr id="7" name="TextBox 6"/>
+          <p:cNvSpPr txBox="1"/>
+          <p:nvPr/>
+        </p:nvSpPr>
+        <p:spPr>
+          <a:xfrm>
+            <a:off x="6355080" y="1737360"/>
+            <a:ext cx="5285232" cy="1737360"/>
+          </a:xfrm>
+          <a:prstGeom prst="rect">
+            <a:avLst/>
+          </a:prstGeom>
+          <a:noFill/>
+        </p:spPr>
+        <p:txBody>
+          <a:bodyPr wrap="square" lIns="0" rIns="0" tIns="0" bIns="0">
+            <a:spAutoFit/>
+          </a:bodyPr>
+          <a:lstStyle/>
+          <a:p>
+            <a:pPr>
+              <a:lnSpc>
+                <a:spcPct val="118000"/>
+              </a:lnSpc>
+              <a:spcAft>
+                <a:spcPts val="900"/>
+              </a:spcAft>
+            </a:pPr>
+            <a:r>
+              <a:rPr sz="1400">
+                <a:solidFill>
+                  <a:srgbClr val="0F7773"/>
+                </a:solidFill>
+                <a:latin typeface="Calibri"/>
+              </a:rPr>
+              <a:t>▪  </a:t>
+            </a:r>
+            <a:r>
+              <a:rPr sz="1400" b="1">
+                <a:solidFill>
+                  <a:srgbClr val="1B335F"/>
+                </a:solidFill>
+                <a:latin typeface="Calibri"/>
+              </a:rPr>
+              <a:t>Distance to the sink is the variable, not density. </a:t>
+            </a:r>
+            <a:r>
+              <a:rPr sz="1400">
+                <a:solidFill>
+                  <a:srgbClr val="2B2B2B"/>
+                </a:solidFill>
+                <a:latin typeface="Calibri"/>
+              </a:rPr>
+              <a:t>Density spans a factor of 27 and explains almost none of it.</a:t>
+            </a:r>
+          </a:p>
+          <a:p>
+            <a:pPr>
+              <a:lnSpc>
+                <a:spcPct val="118000"/>
+              </a:lnSpc>
+              <a:spcAft>
+                <a:spcPts val="900"/>
+              </a:spcAft>
+            </a:pPr>
+            <a:r>
+              <a:rPr sz="1400">
+                <a:solidFill>
+                  <a:srgbClr val="0F7773"/>
+                </a:solidFill>
+                <a:latin typeface="Calibri"/>
+              </a:rPr>
+              <a:t>▪  </a:t>
+            </a:r>
+            <a:r>
+              <a:rPr sz="1400" b="1">
+                <a:solidFill>
+                  <a:srgbClr val="1B335F"/>
+                </a:solidFill>
+                <a:latin typeface="Calibri"/>
+              </a:rPr>
+              <a:t>Clustering is harmful when the sink is close. </a:t>
+            </a:r>
+            <a:r>
+              <a:rPr sz="1400">
+                <a:solidFill>
+                  <a:srgbClr val="2B2B2B"/>
+                </a:solidFill>
+                <a:latin typeface="Calibri"/>
+              </a:rPr>
+              <a:t>At 50 x 50 m the no-clustering baseline outlives LEACH in all three cells, so the retraction reproduces without touching the channel.</a:t>
+            </a:r>
+          </a:p>
+        </p:txBody>
+      </p:sp>
+      <p:pic>
+        <p:nvPicPr>
+          <p:cNvPr id="8" name="Picture 7" descr="figD_scale_fnd.png"/>
+          <p:cNvPicPr>
+            <a:picLocks noChangeAspect="1"/>
+          </p:cNvPicPr>
+          <p:nvPr/>
+        </p:nvPicPr>
+        <p:blipFill>
+          <a:blip r:embed="rId2"/>
+          <a:stretch>
+            <a:fillRect/>
+          </a:stretch>
+        </p:blipFill>
+        <p:spPr>
+          <a:xfrm>
+            <a:off x="2156335" y="3401568"/>
+            <a:ext cx="7848849" cy="3017520"/>
+          </a:xfrm>
+          <a:prstGeom prst="rect">
+            <a:avLst/>
+          </a:prstGeom>
+        </p:spPr>
+      </p:pic>
+      <p:sp>
+        <p:nvSpPr>
+          <p:cNvPr id="9" name="TextBox 8"/>
+          <p:cNvSpPr txBox="1"/>
+          <p:nvPr/>
+        </p:nvSpPr>
+        <p:spPr>
+          <a:xfrm>
+            <a:off x="2148840" y="6382512"/>
+            <a:ext cx="7863840" cy="457200"/>
+          </a:xfrm>
+          <a:prstGeom prst="rect">
+            <a:avLst/>
+          </a:prstGeom>
+          <a:noFill/>
+        </p:spPr>
+        <p:txBody>
+          <a:bodyPr wrap="square" lIns="0" rIns="0" tIns="0" bIns="0">
+            <a:spAutoFit/>
+          </a:bodyPr>
+          <a:lstStyle/>
+          <a:p>
+            <a:pPr algn="ctr">
+              <a:lnSpc>
+                <a:spcPct val="115000"/>
+              </a:lnSpc>
+              <a:spcAft>
+                <a:spcPts val="0"/>
+              </a:spcAft>
+            </a:pPr>
+            <a:r>
+              <a:rPr sz="1100" b="0" i="1">
+                <a:solidFill>
+                  <a:srgbClr val="666B73"/>
+                </a:solidFill>
+                <a:latin typeface="Calibri"/>
+              </a:rPr>
+              <a:t>First node death across the nine cells, log scale, colour by generation. Field size shifts everything by an order of magnitude; node count barely moves it. Two of our five pre-registered expectations were wrong, and we report both.</a:t>
+            </a:r>
+          </a:p>
+        </p:txBody>
+      </p:sp>
+    </p:spTree>
+  </p:cSld>
+  <p:clrMapOvr>
+    <a:masterClrMapping/>
+  </p:clrMapOvr>
+</p:sld>
+</file>
+
+<file path=ppt/slides/slide11.xml><?xml version="1.0" encoding="utf-8"?>
+<p:sld xmlns:a="http://schemas.openxmlformats.org/drawingml/2006/main" xmlns:p="http://schemas.openxmlformats.org/presentationml/2006/main" xmlns:r="http://schemas.openxmlformats.org/officeDocument/2006/relationships">
+  <p:cSld>
+    <p:spTree>
+      <p:nvGrpSpPr>
+        <p:cNvPr id="1" name=""/>
+        <p:cNvGrpSpPr/>
+        <p:nvPr/>
+      </p:nvGrpSpPr>
+      <p:grpSpPr/>
+      <p:sp>
+        <p:nvSpPr>
+          <p:cNvPr id="2" name="Rectangle 1"/>
+          <p:cNvSpPr/>
+          <p:nvPr/>
+        </p:nvSpPr>
+        <p:spPr>
+          <a:xfrm>
+            <a:off x="566928" y="475488"/>
+            <a:ext cx="1051560" cy="50292"/>
+          </a:xfrm>
+          <a:prstGeom prst="rect">
+            <a:avLst/>
+          </a:prstGeom>
+          <a:solidFill>
+            <a:srgbClr val="0F7773"/>
+          </a:solidFill>
+          <a:ln>
+            <a:noFill/>
+          </a:ln>
+          <a:effectLst/>
+        </p:spPr>
+        <p:style>
+          <a:lnRef idx="1">
+            <a:schemeClr val="accent1"/>
+          </a:lnRef>
+          <a:fillRef idx="3">
+            <a:schemeClr val="accent1"/>
+          </a:fillRef>
+          <a:effectRef idx="2">
+            <a:schemeClr val="accent1"/>
+          </a:effectRef>
+          <a:fontRef idx="minor">
+            <a:schemeClr val="lt1"/>
+          </a:fontRef>
+        </p:style>
+        <p:txBody>
+          <a:bodyPr rtlCol="0" anchor="ctr"/>
+          <a:lstStyle/>
+          <a:p>
+            <a:pPr algn="ctr"/>
+          </a:p>
+        </p:txBody>
+      </p:sp>
+      <p:sp>
+        <p:nvSpPr>
+          <p:cNvPr id="3" name="TextBox 2"/>
+          <p:cNvSpPr txBox="1"/>
+          <p:nvPr/>
+        </p:nvSpPr>
+        <p:spPr>
+          <a:xfrm>
+            <a:off x="566928" y="658368"/>
+            <a:ext cx="10058400" cy="274320"/>
+          </a:xfrm>
+          <a:prstGeom prst="rect">
+            <a:avLst/>
+          </a:prstGeom>
+          <a:noFill/>
+        </p:spPr>
+        <p:txBody>
+          <a:bodyPr wrap="square" lIns="0" rIns="0" tIns="0" bIns="0">
+            <a:spAutoFit/>
+          </a:bodyPr>
+          <a:lstStyle/>
+          <a:p>
+            <a:pPr algn="l">
+              <a:lnSpc>
+                <a:spcPct val="115000"/>
+              </a:lnSpc>
+              <a:spcAft>
+                <a:spcPts val="0"/>
+              </a:spcAft>
+            </a:pPr>
+            <a:r>
+              <a:rPr sz="1200" b="1" i="0">
+                <a:solidFill>
+                  <a:srgbClr val="0F7773"/>
+                </a:solidFill>
+                <a:latin typeface="Calibri"/>
+              </a:rPr>
+              <a:t>CONCLUSION AND REMAINING WORK</a:t>
+            </a:r>
+          </a:p>
+        </p:txBody>
+      </p:sp>
+      <p:sp>
+        <p:nvSpPr>
+          <p:cNvPr id="4" name="TextBox 3"/>
+          <p:cNvSpPr txBox="1"/>
+          <p:nvPr/>
+        </p:nvSpPr>
+        <p:spPr>
+          <a:xfrm>
+            <a:off x="566928" y="987552"/>
+            <a:ext cx="11064240" cy="685800"/>
+          </a:xfrm>
+          <a:prstGeom prst="rect">
+            <a:avLst/>
+          </a:prstGeom>
+          <a:noFill/>
+        </p:spPr>
+        <p:txBody>
+          <a:bodyPr wrap="square" lIns="0" rIns="0" tIns="0" bIns="0">
+            <a:spAutoFit/>
+          </a:bodyPr>
+          <a:lstStyle/>
+          <a:p>
+            <a:pPr algn="l">
+              <a:lnSpc>
+                <a:spcPct val="115000"/>
+              </a:lnSpc>
+              <a:spcAft>
+                <a:spcPts val="0"/>
+              </a:spcAft>
+            </a:pPr>
+            <a:r>
+              <a:rPr sz="3000" b="1" i="0">
+                <a:solidFill>
+                  <a:srgbClr val="1B335F"/>
+                </a:solidFill>
+                <a:latin typeface="Calibri"/>
+              </a:rPr>
+              <a:t>What holds, what we are not claiming, and what is left</a:t>
+            </a:r>
+          </a:p>
+        </p:txBody>
+      </p:sp>
+      <p:sp>
+        <p:nvSpPr>
+          <p:cNvPr id="5" name="TextBox 4"/>
+          <p:cNvSpPr txBox="1"/>
+          <p:nvPr/>
+        </p:nvSpPr>
+        <p:spPr>
+          <a:xfrm>
+            <a:off x="11064240" y="6263640"/>
+            <a:ext cx="594360" cy="274320"/>
+          </a:xfrm>
+          <a:prstGeom prst="rect">
+            <a:avLst/>
+          </a:prstGeom>
+          <a:noFill/>
+        </p:spPr>
+        <p:txBody>
+          <a:bodyPr wrap="square" lIns="0" rIns="0" tIns="0" bIns="0">
+            <a:spAutoFit/>
+          </a:bodyPr>
+          <a:lstStyle/>
+          <a:p>
+            <a:pPr algn="r">
+              <a:lnSpc>
+                <a:spcPct val="115000"/>
+              </a:lnSpc>
+              <a:spcAft>
+                <a:spcPts val="0"/>
+              </a:spcAft>
+            </a:pPr>
+            <a:r>
+              <a:rPr sz="1100" b="0" i="0">
+                <a:solidFill>
+                  <a:srgbClr val="666B73"/>
+                </a:solidFill>
+                <a:latin typeface="Calibri"/>
+              </a:rPr>
+              <a:t>11</a:t>
+            </a:r>
+          </a:p>
+        </p:txBody>
+      </p:sp>
+      <p:sp>
+        <p:nvSpPr>
+          <p:cNvPr id="6" name="Rectangle 5"/>
+          <p:cNvSpPr/>
+          <p:nvPr/>
+        </p:nvSpPr>
+        <p:spPr>
+          <a:xfrm>
+            <a:off x="566928" y="1783080"/>
+            <a:ext cx="3529584" cy="45720"/>
+          </a:xfrm>
+          <a:prstGeom prst="rect">
+            <a:avLst/>
+          </a:prstGeom>
+          <a:solidFill>
+            <a:srgbClr val="0F7773"/>
+          </a:solidFill>
+          <a:ln>
+            <a:noFill/>
+          </a:ln>
+          <a:effectLst/>
+        </p:spPr>
+        <p:style>
+          <a:lnRef idx="1">
+            <a:schemeClr val="accent1"/>
+          </a:lnRef>
+          <a:fillRef idx="3">
+            <a:schemeClr val="accent1"/>
+          </a:fillRef>
+          <a:effectRef idx="2">
+            <a:schemeClr val="accent1"/>
+          </a:effectRef>
+          <a:fontRef idx="minor">
+            <a:schemeClr val="lt1"/>
+          </a:fontRef>
+        </p:style>
+        <p:txBody>
+          <a:bodyPr rtlCol="0" anchor="ctr"/>
+          <a:lstStyle/>
+          <a:p>
+            <a:pPr algn="ctr"/>
+          </a:p>
+        </p:txBody>
+      </p:sp>
+      <p:sp>
+        <p:nvSpPr>
+          <p:cNvPr id="7" name="TextBox 6"/>
+          <p:cNvSpPr txBox="1"/>
+          <p:nvPr/>
+        </p:nvSpPr>
+        <p:spPr>
+          <a:xfrm>
+            <a:off x="566928" y="2011680"/>
+            <a:ext cx="3529584" cy="320040"/>
+          </a:xfrm>
+          <a:prstGeom prst="rect">
+            <a:avLst/>
+          </a:prstGeom>
+          <a:noFill/>
+        </p:spPr>
+        <p:txBody>
+          <a:bodyPr wrap="square" lIns="0" rIns="0" tIns="0" bIns="0">
+            <a:spAutoFit/>
+          </a:bodyPr>
+          <a:lstStyle/>
+          <a:p>
+            <a:pPr algn="l">
+              <a:lnSpc>
+                <a:spcPct val="115000"/>
+              </a:lnSpc>
+              <a:spcAft>
+                <a:spcPts val="0"/>
+              </a:spcAft>
+            </a:pPr>
+            <a:r>
+              <a:rPr sz="1300" b="1" i="0">
+                <a:solidFill>
+                  <a:srgbClr val="0F7773"/>
+                </a:solidFill>
+                <a:latin typeface="Calibri"/>
+              </a:rPr>
+              <a:t>WHAT HOLDS</a:t>
+            </a:r>
+          </a:p>
+        </p:txBody>
+      </p:sp>
+      <p:sp>
+        <p:nvSpPr>
+          <p:cNvPr id="8" name="TextBox 7"/>
+          <p:cNvSpPr txBox="1"/>
+          <p:nvPr/>
+        </p:nvSpPr>
+        <p:spPr>
+          <a:xfrm>
+            <a:off x="566928" y="2514600"/>
+            <a:ext cx="3529584" cy="3200400"/>
+          </a:xfrm>
+          <a:prstGeom prst="rect">
+            <a:avLst/>
+          </a:prstGeom>
+          <a:noFill/>
+        </p:spPr>
+        <p:txBody>
+          <a:bodyPr wrap="square" lIns="0" rIns="0" tIns="0" bIns="0">
+            <a:spAutoFit/>
+          </a:bodyPr>
+          <a:lstStyle/>
+          <a:p>
+            <a:pPr>
+              <a:lnSpc>
+                <a:spcPct val="118000"/>
+              </a:lnSpc>
+              <a:spcAft>
+                <a:spcPts val="1100"/>
+              </a:spcAft>
+            </a:pPr>
+            <a:r>
+              <a:rPr sz="1400">
+                <a:solidFill>
+                  <a:srgbClr val="0F7773"/>
+                </a:solidFill>
+                <a:latin typeface="Calibri"/>
+              </a:rPr>
+              <a:t>▪  </a:t>
+            </a:r>
+            <a:r>
+              <a:rPr sz="1400">
+                <a:solidFill>
+                  <a:srgbClr val="2B2B2B"/>
+                </a:solidFill>
+                <a:latin typeface="Calibri"/>
+              </a:rPr>
+              <a:t>Fairness is structural: the engine owns energy, the protocol returns only a cluster structure</a:t>
+            </a:r>
+          </a:p>
+          <a:p>
+            <a:pPr>
+              <a:lnSpc>
+                <a:spcPct val="118000"/>
+              </a:lnSpc>
+              <a:spcAft>
+                <a:spcPts val="1100"/>
+              </a:spcAft>
+            </a:pPr>
+            <a:r>
+              <a:rPr sz="1400">
+                <a:solidFill>
+                  <a:srgbClr val="0F7773"/>
+                </a:solidFill>
+                <a:latin typeface="Calibri"/>
+              </a:rPr>
+              <a:t>▪  </a:t>
+            </a:r>
+            <a:r>
+              <a:rPr sz="1400">
+                <a:solidFill>
+                  <a:srgbClr val="2B2B2B"/>
+                </a:solidFill>
+                <a:latin typeface="Calibri"/>
+              </a:rPr>
+              <a:t>Every conclusion is tested paired, corrected across the family</a:t>
+            </a:r>
+          </a:p>
+          <a:p>
+            <a:pPr>
+              <a:lnSpc>
+                <a:spcPct val="118000"/>
+              </a:lnSpc>
+              <a:spcAft>
+                <a:spcPts val="1100"/>
+              </a:spcAft>
+            </a:pPr>
+            <a:r>
+              <a:rPr sz="1400">
+                <a:solidFill>
+                  <a:srgbClr val="0F7773"/>
+                </a:solidFill>
+                <a:latin typeface="Calibri"/>
+              </a:rPr>
+              <a:t>▪  </a:t>
+            </a:r>
+            <a:r>
+              <a:rPr sz="1400">
+                <a:solidFill>
+                  <a:srgbClr val="2B2B2B"/>
+                </a:solidFill>
+                <a:latin typeface="Calibri"/>
+              </a:rPr>
+              <a:t>The channel retraction and the DQN/GCN contrast are both within-class, so the accounting subsidy does not touch them</a:t>
+            </a:r>
+          </a:p>
+        </p:txBody>
+      </p:sp>
+      <p:sp>
+        <p:nvSpPr>
+          <p:cNvPr id="9" name="Rectangle 8"/>
+          <p:cNvSpPr/>
+          <p:nvPr/>
+        </p:nvSpPr>
+        <p:spPr>
+          <a:xfrm>
+            <a:off x="4343400" y="1783080"/>
+            <a:ext cx="3529584" cy="45720"/>
+          </a:xfrm>
+          <a:prstGeom prst="rect">
+            <a:avLst/>
+          </a:prstGeom>
+          <a:solidFill>
+            <a:srgbClr val="A83A1E"/>
+          </a:solidFill>
+          <a:ln>
+            <a:noFill/>
+          </a:ln>
+          <a:effectLst/>
+        </p:spPr>
+        <p:style>
+          <a:lnRef idx="1">
+            <a:schemeClr val="accent1"/>
+          </a:lnRef>
+          <a:fillRef idx="3">
+            <a:schemeClr val="accent1"/>
+          </a:fillRef>
+          <a:effectRef idx="2">
+            <a:schemeClr val="accent1"/>
+          </a:effectRef>
+          <a:fontRef idx="minor">
+            <a:schemeClr val="lt1"/>
+          </a:fontRef>
+        </p:style>
+        <p:txBody>
+          <a:bodyPr rtlCol="0" anchor="ctr"/>
+          <a:lstStyle/>
+          <a:p>
+            <a:pPr algn="ctr"/>
+          </a:p>
+        </p:txBody>
+      </p:sp>
+      <p:sp>
+        <p:nvSpPr>
+          <p:cNvPr id="10" name="TextBox 9"/>
+          <p:cNvSpPr txBox="1"/>
+          <p:nvPr/>
+        </p:nvSpPr>
+        <p:spPr>
+          <a:xfrm>
+            <a:off x="4343400" y="2011680"/>
+            <a:ext cx="3529584" cy="320040"/>
+          </a:xfrm>
+          <a:prstGeom prst="rect">
+            <a:avLst/>
+          </a:prstGeom>
+          <a:noFill/>
+        </p:spPr>
+        <p:txBody>
+          <a:bodyPr wrap="square" lIns="0" rIns="0" tIns="0" bIns="0">
+            <a:spAutoFit/>
+          </a:bodyPr>
+          <a:lstStyle/>
+          <a:p>
+            <a:pPr algn="l">
+              <a:lnSpc>
+                <a:spcPct val="115000"/>
+              </a:lnSpc>
+              <a:spcAft>
+                <a:spcPts val="0"/>
+              </a:spcAft>
+            </a:pPr>
+            <a:r>
+              <a:rPr sz="1300" b="1" i="0">
+                <a:solidFill>
+                  <a:srgbClr val="A83A1E"/>
+                </a:solidFill>
+                <a:latin typeface="Calibri"/>
+              </a:rPr>
+              <a:t>WHAT WE ARE NOT CLAIMING</a:t>
+            </a:r>
+          </a:p>
+        </p:txBody>
+      </p:sp>
+      <p:sp>
+        <p:nvSpPr>
+          <p:cNvPr id="11" name="TextBox 10"/>
+          <p:cNvSpPr txBox="1"/>
+          <p:nvPr/>
+        </p:nvSpPr>
+        <p:spPr>
+          <a:xfrm>
+            <a:off x="4343400" y="2514600"/>
+            <a:ext cx="3529584" cy="3200400"/>
+          </a:xfrm>
+          <a:prstGeom prst="rect">
+            <a:avLst/>
+          </a:prstGeom>
+          <a:noFill/>
+        </p:spPr>
+        <p:txBody>
+          <a:bodyPr wrap="square" lIns="0" rIns="0" tIns="0" bIns="0">
+            <a:spAutoFit/>
+          </a:bodyPr>
+          <a:lstStyle/>
+          <a:p>
+            <a:pPr>
+              <a:lnSpc>
+                <a:spcPct val="118000"/>
+              </a:lnSpc>
+              <a:spcAft>
+                <a:spcPts val="1100"/>
+              </a:spcAft>
+            </a:pPr>
+            <a:r>
+              <a:rPr sz="1400">
+                <a:solidFill>
+                  <a:srgbClr val="A83A1E"/>
+                </a:solidFill>
+                <a:latin typeface="Calibri"/>
+              </a:rPr>
+              <a:t>▪  </a:t>
+            </a:r>
+            <a:r>
+              <a:rPr sz="1400">
+                <a:solidFill>
+                  <a:srgbClr val="2B2B2B"/>
+                </a:solidFill>
+                <a:latin typeface="Calibri"/>
+              </a:rPr>
+              <a:t>Centralized protocols are not charged for their uplink. That is worth 9 to 10 points of the energy budget</a:t>
+            </a:r>
+          </a:p>
+          <a:p>
+            <a:pPr>
+              <a:lnSpc>
+                <a:spcPct val="118000"/>
+              </a:lnSpc>
+              <a:spcAft>
+                <a:spcPts val="1100"/>
+              </a:spcAft>
+            </a:pPr>
+            <a:r>
+              <a:rPr sz="1400">
+                <a:solidFill>
+                  <a:srgbClr val="A83A1E"/>
+                </a:solidFill>
+                <a:latin typeface="Calibri"/>
+              </a:rPr>
+              <a:t>▪  </a:t>
+            </a:r>
+            <a:r>
+              <a:rPr sz="1400">
+                <a:solidFill>
+                  <a:srgbClr val="2B2B2B"/>
+                </a:solidFill>
+                <a:latin typeface="Calibri"/>
+              </a:rPr>
+              <a:t>Transmit power is bracketed at two endpoints, not swept</a:t>
+            </a:r>
+          </a:p>
+          <a:p>
+            <a:pPr>
+              <a:lnSpc>
+                <a:spcPct val="118000"/>
+              </a:lnSpc>
+              <a:spcAft>
+                <a:spcPts val="1100"/>
+              </a:spcAft>
+            </a:pPr>
+            <a:r>
+              <a:rPr sz="1400">
+                <a:solidFill>
+                  <a:srgbClr val="A83A1E"/>
+                </a:solidFill>
+                <a:latin typeface="Calibri"/>
+              </a:rPr>
+              <a:t>▪  </a:t>
+            </a:r>
+            <a:r>
+              <a:rPr sz="1400">
+                <a:solidFill>
+                  <a:srgbClr val="2B2B2B"/>
+                </a:solidFill>
+                <a:latin typeface="Calibri"/>
+              </a:rPr>
+              <a:t>No MAC layer, no idle listening, no mobility, no hardware testbed</a:t>
+            </a:r>
+          </a:p>
+        </p:txBody>
+      </p:sp>
+      <p:sp>
+        <p:nvSpPr>
+          <p:cNvPr id="12" name="Rectangle 11"/>
+          <p:cNvSpPr/>
+          <p:nvPr/>
+        </p:nvSpPr>
+        <p:spPr>
+          <a:xfrm>
+            <a:off x="8119871" y="1783080"/>
+            <a:ext cx="3529584" cy="45720"/>
+          </a:xfrm>
+          <a:prstGeom prst="rect">
+            <a:avLst/>
+          </a:prstGeom>
+          <a:solidFill>
+            <a:srgbClr val="1B335F"/>
+          </a:solidFill>
+          <a:ln>
+            <a:noFill/>
+          </a:ln>
+          <a:effectLst/>
+        </p:spPr>
+        <p:style>
+          <a:lnRef idx="1">
+            <a:schemeClr val="accent1"/>
+          </a:lnRef>
+          <a:fillRef idx="3">
+            <a:schemeClr val="accent1"/>
+          </a:fillRef>
+          <a:effectRef idx="2">
+            <a:schemeClr val="accent1"/>
+          </a:effectRef>
+          <a:fontRef idx="minor">
+            <a:schemeClr val="lt1"/>
+          </a:fontRef>
+        </p:style>
+        <p:txBody>
+          <a:bodyPr rtlCol="0" anchor="ctr"/>
+          <a:lstStyle/>
+          <a:p>
+            <a:pPr algn="ctr"/>
+          </a:p>
+        </p:txBody>
+      </p:sp>
+      <p:sp>
+        <p:nvSpPr>
+          <p:cNvPr id="13" name="TextBox 12"/>
+          <p:cNvSpPr txBox="1"/>
+          <p:nvPr/>
+        </p:nvSpPr>
+        <p:spPr>
+          <a:xfrm>
+            <a:off x="8119871" y="2011680"/>
+            <a:ext cx="3529584" cy="320040"/>
+          </a:xfrm>
+          <a:prstGeom prst="rect">
+            <a:avLst/>
+          </a:prstGeom>
+          <a:noFill/>
+        </p:spPr>
+        <p:txBody>
+          <a:bodyPr wrap="square" lIns="0" rIns="0" tIns="0" bIns="0">
+            <a:spAutoFit/>
+          </a:bodyPr>
+          <a:lstStyle/>
+          <a:p>
+            <a:pPr algn="l">
+              <a:lnSpc>
+                <a:spcPct val="115000"/>
+              </a:lnSpc>
+              <a:spcAft>
+                <a:spcPts val="0"/>
+              </a:spcAft>
+            </a:pPr>
+            <a:r>
+              <a:rPr sz="1300" b="1" i="0">
+                <a:solidFill>
+                  <a:srgbClr val="1B335F"/>
+                </a:solidFill>
+                <a:latin typeface="Calibri"/>
+              </a:rPr>
+              <a:t>WHAT REMAINS</a:t>
+            </a:r>
+          </a:p>
+        </p:txBody>
+      </p:sp>
+      <p:sp>
+        <p:nvSpPr>
+          <p:cNvPr id="14" name="TextBox 13"/>
+          <p:cNvSpPr txBox="1"/>
+          <p:nvPr/>
+        </p:nvSpPr>
+        <p:spPr>
+          <a:xfrm>
+            <a:off x="8119871" y="2514600"/>
+            <a:ext cx="3529584" cy="3200400"/>
+          </a:xfrm>
+          <a:prstGeom prst="rect">
+            <a:avLst/>
+          </a:prstGeom>
+          <a:noFill/>
+        </p:spPr>
+        <p:txBody>
+          <a:bodyPr wrap="square" lIns="0" rIns="0" tIns="0" bIns="0">
+            <a:spAutoFit/>
+          </a:bodyPr>
+          <a:lstStyle/>
+          <a:p>
+            <a:pPr>
+              <a:lnSpc>
+                <a:spcPct val="118000"/>
+              </a:lnSpc>
+              <a:spcAft>
+                <a:spcPts val="1100"/>
+              </a:spcAft>
+            </a:pPr>
+            <a:r>
+              <a:rPr sz="1400">
+                <a:solidFill>
+                  <a:srgbClr val="1B335F"/>
+                </a:solidFill>
+                <a:latin typeface="Calibri"/>
+              </a:rPr>
+              <a:t>▪  </a:t>
+            </a:r>
+            <a:r>
+              <a:rPr sz="1400">
+                <a:solidFill>
+                  <a:srgbClr val="2B2B2B"/>
+                </a:solidFill>
+                <a:latin typeface="Calibri"/>
+              </a:rPr>
+              <a:t>The control-traffic ablation, which converts our largest confound into a measurement</a:t>
+            </a:r>
+          </a:p>
+          <a:p>
+            <a:pPr>
+              <a:lnSpc>
+                <a:spcPct val="118000"/>
+              </a:lnSpc>
+              <a:spcAft>
+                <a:spcPts val="1100"/>
+              </a:spcAft>
+            </a:pPr>
+            <a:r>
+              <a:rPr sz="1400">
+                <a:solidFill>
+                  <a:srgbClr val="1B335F"/>
+                </a:solidFill>
+                <a:latin typeface="Calibri"/>
+              </a:rPr>
+              <a:t>▪  </a:t>
+            </a:r>
+            <a:r>
+              <a:rPr sz="1400">
+                <a:solidFill>
+                  <a:srgbClr val="2B2B2B"/>
+                </a:solidFill>
+                <a:latin typeface="Calibri"/>
+              </a:rPr>
+              <a:t>A three-point or four-point transmit-power sweep</a:t>
+            </a:r>
+          </a:p>
+          <a:p>
+            <a:pPr>
+              <a:lnSpc>
+                <a:spcPct val="118000"/>
+              </a:lnSpc>
+              <a:spcAft>
+                <a:spcPts val="1100"/>
+              </a:spcAft>
+            </a:pPr>
+            <a:r>
+              <a:rPr sz="1400">
+                <a:solidFill>
+                  <a:srgbClr val="1B335F"/>
+                </a:solidFill>
+                <a:latin typeface="Calibri"/>
+              </a:rPr>
+              <a:t>▪  </a:t>
+            </a:r>
+            <a:r>
+              <a:rPr sz="1400">
+                <a:solidFill>
+                  <a:srgbClr val="2B2B2B"/>
+                </a:solidFill>
+                <a:latin typeface="Calibri"/>
+              </a:rPr>
+              <a:t>Paper submission: draft complete at 13 pages, figures and tables generated from the data</a:t>
+            </a:r>
+          </a:p>
+        </p:txBody>
+      </p:sp>
+      <p:sp>
+        <p:nvSpPr>
+          <p:cNvPr id="15" name="Rectangle 14"/>
+          <p:cNvSpPr/>
+          <p:nvPr/>
+        </p:nvSpPr>
+        <p:spPr>
+          <a:xfrm>
+            <a:off x="566928" y="5577840"/>
+            <a:ext cx="11064240" cy="685800"/>
+          </a:xfrm>
+          <a:prstGeom prst="rect">
+            <a:avLst/>
+          </a:prstGeom>
+          <a:solidFill>
+            <a:srgbClr val="F4F6F8"/>
+          </a:solidFill>
+          <a:ln w="9525">
+            <a:solidFill>
+              <a:srgbClr val="D8DDE3"/>
+            </a:solidFill>
+          </a:ln>
+          <a:effectLst/>
+        </p:spPr>
+        <p:style>
+          <a:lnRef idx="1">
+            <a:schemeClr val="accent1"/>
+          </a:lnRef>
+          <a:fillRef idx="3">
+            <a:schemeClr val="accent1"/>
+          </a:fillRef>
+          <a:effectRef idx="2">
+            <a:schemeClr val="accent1"/>
+          </a:effectRef>
+          <a:fontRef idx="minor">
+            <a:schemeClr val="lt1"/>
+          </a:fontRef>
+        </p:style>
+        <p:txBody>
+          <a:bodyPr rtlCol="0" anchor="ctr"/>
+          <a:lstStyle/>
+          <a:p>
+            <a:pPr algn="ctr"/>
+          </a:p>
+        </p:txBody>
+      </p:sp>
+      <p:sp>
+        <p:nvSpPr>
+          <p:cNvPr id="16" name="TextBox 15"/>
+          <p:cNvSpPr txBox="1"/>
+          <p:nvPr/>
+        </p:nvSpPr>
+        <p:spPr>
+          <a:xfrm>
+            <a:off x="868680" y="5760720"/>
+            <a:ext cx="10515600" cy="457200"/>
+          </a:xfrm>
+          <a:prstGeom prst="rect">
+            <a:avLst/>
+          </a:prstGeom>
+          <a:noFill/>
+        </p:spPr>
+        <p:txBody>
+          <a:bodyPr wrap="square" lIns="0" rIns="0" tIns="0" bIns="0">
+            <a:spAutoFit/>
+          </a:bodyPr>
+          <a:lstStyle/>
+          <a:p>
+            <a:pPr algn="l">
+              <a:lnSpc>
+                <a:spcPct val="115000"/>
+              </a:lnSpc>
+              <a:spcAft>
+                <a:spcPts val="0"/>
+              </a:spcAft>
+            </a:pPr>
+            <a:r>
+              <a:rPr sz="1400" b="1" i="0">
+                <a:solidFill>
+                  <a:srgbClr val="1B335F"/>
+                </a:solidFill>
+                <a:latin typeface="Calibri"/>
+              </a:rPr>
+              <a:t>The methodological point generalizes: running a study at both endpoints of an unspecified parameter, and committing in advance to report only what survives both, retracted a comparison that either endpoint alone would have supported.</a:t>
+            </a:r>
+          </a:p>
+        </p:txBody>
+      </p:sp>
+    </p:spTree>
+  </p:cSld>
+  <p:clrMapOvr>
+    <a:masterClrMapping/>
+  </p:clrMapOvr>
+</p:sld>
+</file>
+
+<file path=ppt/slides/slide12.xml><?xml version="1.0" encoding="utf-8"?>
+<p:sld xmlns:a="http://schemas.openxmlformats.org/drawingml/2006/main" xmlns:p="http://schemas.openxmlformats.org/presentationml/2006/main" xmlns:r="http://schemas.openxmlformats.org/officeDocument/2006/relationships">
+  <p:cSld>
+    <p:spTree>
+      <p:nvGrpSpPr>
+        <p:cNvPr id="1" name=""/>
+        <p:cNvGrpSpPr/>
+        <p:nvPr/>
+      </p:nvGrpSpPr>
+      <p:grpSpPr/>
+      <p:sp>
+        <p:nvSpPr>
+          <p:cNvPr id="2" name="Rectangle 1"/>
+          <p:cNvSpPr/>
+          <p:nvPr/>
+        </p:nvSpPr>
+        <p:spPr>
+          <a:xfrm>
+            <a:off x="566928" y="475488"/>
+            <a:ext cx="1051560" cy="50292"/>
+          </a:xfrm>
+          <a:prstGeom prst="rect">
+            <a:avLst/>
+          </a:prstGeom>
+          <a:solidFill>
+            <a:srgbClr val="0F7773"/>
+          </a:solidFill>
+          <a:ln>
+            <a:noFill/>
+          </a:ln>
+          <a:effectLst/>
+        </p:spPr>
+        <p:style>
+          <a:lnRef idx="1">
+            <a:schemeClr val="accent1"/>
+          </a:lnRef>
+          <a:fillRef idx="3">
+            <a:schemeClr val="accent1"/>
+          </a:fillRef>
+          <a:effectRef idx="2">
+            <a:schemeClr val="accent1"/>
+          </a:effectRef>
+          <a:fontRef idx="minor">
+            <a:schemeClr val="lt1"/>
+          </a:fontRef>
+        </p:style>
+        <p:txBody>
+          <a:bodyPr rtlCol="0" anchor="ctr"/>
+          <a:lstStyle/>
+          <a:p>
+            <a:pPr algn="ctr"/>
+          </a:p>
+        </p:txBody>
+      </p:sp>
+      <p:sp>
+        <p:nvSpPr>
+          <p:cNvPr id="3" name="TextBox 2"/>
+          <p:cNvSpPr txBox="1"/>
+          <p:nvPr/>
+        </p:nvSpPr>
+        <p:spPr>
+          <a:xfrm>
+            <a:off x="566928" y="658368"/>
+            <a:ext cx="11064240" cy="685800"/>
+          </a:xfrm>
+          <a:prstGeom prst="rect">
+            <a:avLst/>
+          </a:prstGeom>
+          <a:noFill/>
+        </p:spPr>
+        <p:txBody>
+          <a:bodyPr wrap="square" lIns="0" rIns="0" tIns="0" bIns="0">
+            <a:spAutoFit/>
+          </a:bodyPr>
+          <a:lstStyle/>
+          <a:p>
+            <a:pPr algn="l">
+              <a:lnSpc>
+                <a:spcPct val="115000"/>
+              </a:lnSpc>
+              <a:spcAft>
+                <a:spcPts val="0"/>
+              </a:spcAft>
+            </a:pPr>
+            <a:r>
+              <a:rPr sz="3000" b="1" i="0">
+                <a:solidFill>
+                  <a:srgbClr val="1B335F"/>
+                </a:solidFill>
+                <a:latin typeface="Calibri"/>
+              </a:rPr>
+              <a:t>References</a:t>
+            </a:r>
+          </a:p>
+        </p:txBody>
+      </p:sp>
+      <p:sp>
+        <p:nvSpPr>
+          <p:cNvPr id="4" name="TextBox 3"/>
+          <p:cNvSpPr txBox="1"/>
+          <p:nvPr/>
+        </p:nvSpPr>
+        <p:spPr>
+          <a:xfrm>
+            <a:off x="11064240" y="6263640"/>
+            <a:ext cx="594360" cy="274320"/>
+          </a:xfrm>
+          <a:prstGeom prst="rect">
+            <a:avLst/>
+          </a:prstGeom>
+          <a:noFill/>
+        </p:spPr>
+        <p:txBody>
+          <a:bodyPr wrap="square" lIns="0" rIns="0" tIns="0" bIns="0">
+            <a:spAutoFit/>
+          </a:bodyPr>
+          <a:lstStyle/>
+          <a:p>
+            <a:pPr algn="r">
+              <a:lnSpc>
+                <a:spcPct val="115000"/>
+              </a:lnSpc>
+              <a:spcAft>
+                <a:spcPts val="0"/>
+              </a:spcAft>
+            </a:pPr>
+            <a:r>
+              <a:rPr sz="1100" b="0" i="0">
+                <a:solidFill>
+                  <a:srgbClr val="666B73"/>
+                </a:solidFill>
+                <a:latin typeface="Calibri"/>
+              </a:rPr>
+              <a:t>12</a:t>
             </a:r>
           </a:p>
         </p:txBody>
@@ -9538,7 +10843,7 @@
                 </a:solidFill>
                 <a:latin typeface="Calibri"/>
               </a:rPr>
-              <a:t>RESULTS SO FAR</a:t>
+              <a:t>RESULTS I: LIFETIME AND THE CHANNEL</a:t>
             </a:r>
           </a:p>
         </p:txBody>
@@ -9580,7 +10885,7 @@
                 </a:solidFill>
                 <a:latin typeface="Calibri"/>
               </a:rPr>
-              <a:t>Four findings, and one of them retracts our own claim</a:t>
+              <a:t>What we found, and the one thing we take back</a:t>
             </a:r>
           </a:p>
         </p:txBody>
@@ -9682,7 +10987,7 @@
                 </a:solidFill>
                 <a:latin typeface="Calibri"/>
               </a:rPr>
-              <a:t>LEACH reaches first node death at 1,046 rounds against the baseline's 114, a factor of 9.2. But its last node dies at 2,191 against the baseline's 3,202.</a:t>
+              <a:t>LEACH reaches first node death at 1,046 rounds against the baseline's 114, a factor of 9.2. But its last node dies at 2,191 against the baseline's 3,202, so the baseline outlasts it by 46%.</a:t>
             </a:r>
           </a:p>
           <a:p>
@@ -9719,7 +11024,7 @@
                 </a:solidFill>
                 <a:latin typeface="Calibri"/>
               </a:rPr>
-              <a:t>The fuzzy system and the deep Q-network beat LEACH by 417 and 426 rounds under packet loss. Remove the loss and the same comparisons give 17 and 22 rounds, no longer significant.</a:t>
+              <a:t>The fuzzy system and the deep Q-network beat LEACH by 417 and 426 rounds under packet loss, at the corrected floor. Remove the loss and the same comparisons give 17 and 22 rounds, no longer significant.</a:t>
             </a:r>
           </a:p>
           <a:p>
@@ -9756,7 +11061,7 @@
                 </a:solidFill>
                 <a:latin typeface="Calibri"/>
               </a:rPr>
-              <a:t>Packet error is near zero below 120 m and every protocol's mean head distance sits below that. LEACH puts 29.9% of its head-rounds beyond 120 m and spends 6.39% of its budget retransmitting; the Q-network puts 5.1% out there and spends 2.31%.</a:t>
+              <a:t>Packet error is near zero below 120 m and every protocol's mean head distance sits below that, so the mean cannot be it. LEACH puts 29.9% of its head-rounds beyond 120 m and spends 6.39% of its budget retransmitting; the Q-network puts 5.1% out there and spends 2.31%.</a:t>
             </a:r>
           </a:p>
           <a:p>
@@ -9784,7 +11089,7 @@
                 </a:solidFill>
                 <a:latin typeface="Calibri"/>
               </a:rPr>
-              <a:t>It is a regime, not a rule. </a:t>
+              <a:t>What survives both channels. </a:t>
             </a:r>
             <a:r>
               <a:rPr sz="1500">
@@ -9793,7 +11098,7 @@
                 </a:solidFill>
                 <a:latin typeface="Calibri"/>
               </a:rPr>
-              <a:t>In a 50 x 50 m field, where no link reaches the error waterfall, the no-clustering baseline outlives LEACH.</a:t>
+              <a:t>Area under the alive-node curve and readings delivered: all 18 comparisons hold at the corrected floor either way.</a:t>
             </a:r>
           </a:p>
         </p:txBody>

--- a/Minor_Project_Second_Defense.pptx
+++ b/Minor_Project_Second_Defense.pptx
@@ -5,20 +5,18 @@
     <p:sldMasterId id="2147483648" r:id="rId1"/>
   </p:sldMasterIdLst>
   <p:sldIdLst>
-    <p:sldId id="256" r:id="rId7"/>
-    <p:sldId id="257" r:id="rId8"/>
-    <p:sldId id="258" r:id="rId9"/>
-    <p:sldId id="259" r:id="rId10"/>
-    <p:sldId id="260" r:id="rId11"/>
-    <p:sldId id="261" r:id="rId12"/>
-    <p:sldId id="262" r:id="rId13"/>
-    <p:sldId id="263" r:id="rId14"/>
-    <p:sldId id="264" r:id="rId15"/>
-    <p:sldId id="265" r:id="rId16"/>
-    <p:sldId id="266" r:id="rId17"/>
-    <p:sldId id="267" r:id="rId18"/>
+    <p:sldId id="256" r:id="rId2"/>
+    <p:sldId id="257" r:id="rId3"/>
+    <p:sldId id="258" r:id="rId4"/>
+    <p:sldId id="259" r:id="rId5"/>
+    <p:sldId id="260" r:id="rId6"/>
+    <p:sldId id="261" r:id="rId7"/>
+    <p:sldId id="262" r:id="rId8"/>
+    <p:sldId id="263" r:id="rId9"/>
+    <p:sldId id="264" r:id="rId10"/>
+    <p:sldId id="265" r:id="rId11"/>
   </p:sldIdLst>
-  <p:sldSz cx="12191695" cy="6858000" type="screen4x3"/>
+  <p:sldSz cx="12192000" cy="6858000"/>
   <p:notesSz cx="6858000" cy="9144000"/>
   <p:defaultTextStyle>
     <a:defPPr>
@@ -115,6 +113,22 @@
       </a:defRPr>
     </a:lvl9pPr>
   </p:defaultTextStyle>
+  <p:extLst>
+    <p:ext uri="{EFAFB233-063F-42B5-8137-9DF3F51BA10A}">
+      <p15:sldGuideLst xmlns:p15="http://schemas.microsoft.com/office/powerpoint/2012/main">
+        <p15:guide id="1" orient="horz" pos="2160">
+          <p15:clr>
+            <a:srgbClr val="A4A3A4"/>
+          </p15:clr>
+        </p15:guide>
+        <p15:guide id="2" pos="2880">
+          <p15:clr>
+            <a:srgbClr val="A4A3A4"/>
+          </p15:clr>
+        </p15:guide>
+      </p15:sldGuideLst>
+    </p:ext>
+  </p:extLst>
 </p:presentation>
 </file>
 
@@ -156,10 +170,9 @@
           <a:lstStyle/>
           <a:p>
             <a:r>
-              <a:rPr lang="en-US" smtClean="0"/>
+              <a:rPr lang="en-US"/>
               <a:t>Click to edit Master title style</a:t>
             </a:r>
-            <a:endParaRPr lang="en-US"/>
           </a:p>
         </p:txBody>
       </p:sp>
@@ -275,10 +288,9 @@
           </a:lstStyle>
           <a:p>
             <a:r>
-              <a:rPr lang="en-US" smtClean="0"/>
+              <a:rPr lang="en-US"/>
               <a:t>Click to edit Master subtitle style</a:t>
             </a:r>
-            <a:endParaRPr lang="en-US"/>
           </a:p>
         </p:txBody>
       </p:sp>
@@ -299,7 +311,7 @@
           <a:p>
             <a:fld id="{5BCAD085-E8A6-8845-BD4E-CB4CCA059FC4}" type="datetimeFigureOut">
               <a:rPr lang="en-US" smtClean="0"/>
-              <a:t>1/27/13</a:t>
+              <a:t>9/9/2026</a:t>
             </a:fld>
             <a:endParaRPr lang="en-US"/>
           </a:p>
@@ -393,10 +405,9 @@
           <a:lstStyle/>
           <a:p>
             <a:r>
-              <a:rPr lang="en-US" smtClean="0"/>
+              <a:rPr lang="en-US"/>
               <a:t>Click to edit Master title style</a:t>
             </a:r>
-            <a:endParaRPr lang="en-US"/>
           </a:p>
         </p:txBody>
       </p:sp>
@@ -417,38 +428,37 @@
           <a:p>
             <a:pPr lvl="0"/>
             <a:r>
-              <a:rPr lang="en-US" smtClean="0"/>
+              <a:rPr lang="en-US"/>
               <a:t>Click to edit Master text styles</a:t>
             </a:r>
           </a:p>
           <a:p>
             <a:pPr lvl="1"/>
             <a:r>
-              <a:rPr lang="en-US" smtClean="0"/>
+              <a:rPr lang="en-US"/>
               <a:t>Second level</a:t>
             </a:r>
           </a:p>
           <a:p>
             <a:pPr lvl="2"/>
             <a:r>
-              <a:rPr lang="en-US" smtClean="0"/>
+              <a:rPr lang="en-US"/>
               <a:t>Third level</a:t>
             </a:r>
           </a:p>
           <a:p>
             <a:pPr lvl="3"/>
             <a:r>
-              <a:rPr lang="en-US" smtClean="0"/>
+              <a:rPr lang="en-US"/>
               <a:t>Fourth level</a:t>
             </a:r>
           </a:p>
           <a:p>
             <a:pPr lvl="4"/>
             <a:r>
-              <a:rPr lang="en-US" smtClean="0"/>
+              <a:rPr lang="en-US"/>
               <a:t>Fifth level</a:t>
             </a:r>
-            <a:endParaRPr lang="en-US"/>
           </a:p>
         </p:txBody>
       </p:sp>
@@ -469,7 +479,7 @@
           <a:p>
             <a:fld id="{5BCAD085-E8A6-8845-BD4E-CB4CCA059FC4}" type="datetimeFigureOut">
               <a:rPr lang="en-US" smtClean="0"/>
-              <a:t>1/27/13</a:t>
+              <a:t>9/9/2026</a:t>
             </a:fld>
             <a:endParaRPr lang="en-US"/>
           </a:p>
@@ -568,10 +578,9 @@
           <a:lstStyle/>
           <a:p>
             <a:r>
-              <a:rPr lang="en-US" smtClean="0"/>
+              <a:rPr lang="en-US"/>
               <a:t>Click to edit Master title style</a:t>
             </a:r>
-            <a:endParaRPr lang="en-US"/>
           </a:p>
         </p:txBody>
       </p:sp>
@@ -597,38 +606,37 @@
           <a:p>
             <a:pPr lvl="0"/>
             <a:r>
-              <a:rPr lang="en-US" smtClean="0"/>
+              <a:rPr lang="en-US"/>
               <a:t>Click to edit Master text styles</a:t>
             </a:r>
           </a:p>
           <a:p>
             <a:pPr lvl="1"/>
             <a:r>
-              <a:rPr lang="en-US" smtClean="0"/>
+              <a:rPr lang="en-US"/>
               <a:t>Second level</a:t>
             </a:r>
           </a:p>
           <a:p>
             <a:pPr lvl="2"/>
             <a:r>
-              <a:rPr lang="en-US" smtClean="0"/>
+              <a:rPr lang="en-US"/>
               <a:t>Third level</a:t>
             </a:r>
           </a:p>
           <a:p>
             <a:pPr lvl="3"/>
             <a:r>
-              <a:rPr lang="en-US" smtClean="0"/>
+              <a:rPr lang="en-US"/>
               <a:t>Fourth level</a:t>
             </a:r>
           </a:p>
           <a:p>
             <a:pPr lvl="4"/>
             <a:r>
-              <a:rPr lang="en-US" smtClean="0"/>
+              <a:rPr lang="en-US"/>
               <a:t>Fifth level</a:t>
             </a:r>
-            <a:endParaRPr lang="en-US"/>
           </a:p>
         </p:txBody>
       </p:sp>
@@ -649,7 +657,7 @@
           <a:p>
             <a:fld id="{5BCAD085-E8A6-8845-BD4E-CB4CCA059FC4}" type="datetimeFigureOut">
               <a:rPr lang="en-US" smtClean="0"/>
-              <a:t>1/27/13</a:t>
+              <a:t>9/9/2026</a:t>
             </a:fld>
             <a:endParaRPr lang="en-US"/>
           </a:p>
@@ -743,10 +751,9 @@
           <a:lstStyle/>
           <a:p>
             <a:r>
-              <a:rPr lang="en-US" smtClean="0"/>
+              <a:rPr lang="en-US"/>
               <a:t>Click to edit Master title style</a:t>
             </a:r>
-            <a:endParaRPr lang="en-US"/>
           </a:p>
         </p:txBody>
       </p:sp>
@@ -767,38 +774,37 @@
           <a:p>
             <a:pPr lvl="0"/>
             <a:r>
-              <a:rPr lang="en-US" smtClean="0"/>
+              <a:rPr lang="en-US"/>
               <a:t>Click to edit Master text styles</a:t>
             </a:r>
           </a:p>
           <a:p>
             <a:pPr lvl="1"/>
             <a:r>
-              <a:rPr lang="en-US" smtClean="0"/>
+              <a:rPr lang="en-US"/>
               <a:t>Second level</a:t>
             </a:r>
           </a:p>
           <a:p>
             <a:pPr lvl="2"/>
             <a:r>
-              <a:rPr lang="en-US" smtClean="0"/>
+              <a:rPr lang="en-US"/>
               <a:t>Third level</a:t>
             </a:r>
           </a:p>
           <a:p>
             <a:pPr lvl="3"/>
             <a:r>
-              <a:rPr lang="en-US" smtClean="0"/>
+              <a:rPr lang="en-US"/>
               <a:t>Fourth level</a:t>
             </a:r>
           </a:p>
           <a:p>
             <a:pPr lvl="4"/>
             <a:r>
-              <a:rPr lang="en-US" smtClean="0"/>
+              <a:rPr lang="en-US"/>
               <a:t>Fifth level</a:t>
             </a:r>
-            <a:endParaRPr lang="en-US"/>
           </a:p>
         </p:txBody>
       </p:sp>
@@ -819,7 +825,7 @@
           <a:p>
             <a:fld id="{5BCAD085-E8A6-8845-BD4E-CB4CCA059FC4}" type="datetimeFigureOut">
               <a:rPr lang="en-US" smtClean="0"/>
-              <a:t>1/27/13</a:t>
+              <a:t>9/9/2026</a:t>
             </a:fld>
             <a:endParaRPr lang="en-US"/>
           </a:p>
@@ -922,10 +928,9 @@
           </a:lstStyle>
           <a:p>
             <a:r>
-              <a:rPr lang="en-US" smtClean="0"/>
+              <a:rPr lang="en-US"/>
               <a:t>Click to edit Master title style</a:t>
             </a:r>
-            <a:endParaRPr lang="en-US"/>
           </a:p>
         </p:txBody>
       </p:sp>
@@ -1042,7 +1047,7 @@
           <a:p>
             <a:pPr lvl="0"/>
             <a:r>
-              <a:rPr lang="en-US" smtClean="0"/>
+              <a:rPr lang="en-US"/>
               <a:t>Click to edit Master text styles</a:t>
             </a:r>
           </a:p>
@@ -1065,7 +1070,7 @@
           <a:p>
             <a:fld id="{5BCAD085-E8A6-8845-BD4E-CB4CCA059FC4}" type="datetimeFigureOut">
               <a:rPr lang="en-US" smtClean="0"/>
-              <a:t>1/27/13</a:t>
+              <a:t>9/9/2026</a:t>
             </a:fld>
             <a:endParaRPr lang="en-US"/>
           </a:p>
@@ -1159,10 +1164,9 @@
           <a:lstStyle/>
           <a:p>
             <a:r>
-              <a:rPr lang="en-US" smtClean="0"/>
+              <a:rPr lang="en-US"/>
               <a:t>Click to edit Master title style</a:t>
             </a:r>
-            <a:endParaRPr lang="en-US"/>
           </a:p>
         </p:txBody>
       </p:sp>
@@ -1216,38 +1220,37 @@
           <a:p>
             <a:pPr lvl="0"/>
             <a:r>
-              <a:rPr lang="en-US" smtClean="0"/>
+              <a:rPr lang="en-US"/>
               <a:t>Click to edit Master text styles</a:t>
             </a:r>
           </a:p>
           <a:p>
             <a:pPr lvl="1"/>
             <a:r>
-              <a:rPr lang="en-US" smtClean="0"/>
+              <a:rPr lang="en-US"/>
               <a:t>Second level</a:t>
             </a:r>
           </a:p>
           <a:p>
             <a:pPr lvl="2"/>
             <a:r>
-              <a:rPr lang="en-US" smtClean="0"/>
+              <a:rPr lang="en-US"/>
               <a:t>Third level</a:t>
             </a:r>
           </a:p>
           <a:p>
             <a:pPr lvl="3"/>
             <a:r>
-              <a:rPr lang="en-US" smtClean="0"/>
+              <a:rPr lang="en-US"/>
               <a:t>Fourth level</a:t>
             </a:r>
           </a:p>
           <a:p>
             <a:pPr lvl="4"/>
             <a:r>
-              <a:rPr lang="en-US" smtClean="0"/>
+              <a:rPr lang="en-US"/>
               <a:t>Fifth level</a:t>
             </a:r>
-            <a:endParaRPr lang="en-US"/>
           </a:p>
         </p:txBody>
       </p:sp>
@@ -1301,38 +1304,37 @@
           <a:p>
             <a:pPr lvl="0"/>
             <a:r>
-              <a:rPr lang="en-US" smtClean="0"/>
+              <a:rPr lang="en-US"/>
               <a:t>Click to edit Master text styles</a:t>
             </a:r>
           </a:p>
           <a:p>
             <a:pPr lvl="1"/>
             <a:r>
-              <a:rPr lang="en-US" smtClean="0"/>
+              <a:rPr lang="en-US"/>
               <a:t>Second level</a:t>
             </a:r>
           </a:p>
           <a:p>
             <a:pPr lvl="2"/>
             <a:r>
-              <a:rPr lang="en-US" smtClean="0"/>
+              <a:rPr lang="en-US"/>
               <a:t>Third level</a:t>
             </a:r>
           </a:p>
           <a:p>
             <a:pPr lvl="3"/>
             <a:r>
-              <a:rPr lang="en-US" smtClean="0"/>
+              <a:rPr lang="en-US"/>
               <a:t>Fourth level</a:t>
             </a:r>
           </a:p>
           <a:p>
             <a:pPr lvl="4"/>
             <a:r>
-              <a:rPr lang="en-US" smtClean="0"/>
+              <a:rPr lang="en-US"/>
               <a:t>Fifth level</a:t>
             </a:r>
-            <a:endParaRPr lang="en-US"/>
           </a:p>
         </p:txBody>
       </p:sp>
@@ -1353,7 +1355,7 @@
           <a:p>
             <a:fld id="{5BCAD085-E8A6-8845-BD4E-CB4CCA059FC4}" type="datetimeFigureOut">
               <a:rPr lang="en-US" smtClean="0"/>
-              <a:t>1/27/13</a:t>
+              <a:t>9/9/2026</a:t>
             </a:fld>
             <a:endParaRPr lang="en-US"/>
           </a:p>
@@ -1451,10 +1453,9 @@
           </a:lstStyle>
           <a:p>
             <a:r>
-              <a:rPr lang="en-US" smtClean="0"/>
+              <a:rPr lang="en-US"/>
               <a:t>Click to edit Master title style</a:t>
             </a:r>
-            <a:endParaRPr lang="en-US"/>
           </a:p>
         </p:txBody>
       </p:sp>
@@ -1517,7 +1518,7 @@
           <a:p>
             <a:pPr lvl="0"/>
             <a:r>
-              <a:rPr lang="en-US" smtClean="0"/>
+              <a:rPr lang="en-US"/>
               <a:t>Click to edit Master text styles</a:t>
             </a:r>
           </a:p>
@@ -1573,38 +1574,37 @@
           <a:p>
             <a:pPr lvl="0"/>
             <a:r>
-              <a:rPr lang="en-US" smtClean="0"/>
+              <a:rPr lang="en-US"/>
               <a:t>Click to edit Master text styles</a:t>
             </a:r>
           </a:p>
           <a:p>
             <a:pPr lvl="1"/>
             <a:r>
-              <a:rPr lang="en-US" smtClean="0"/>
+              <a:rPr lang="en-US"/>
               <a:t>Second level</a:t>
             </a:r>
           </a:p>
           <a:p>
             <a:pPr lvl="2"/>
             <a:r>
-              <a:rPr lang="en-US" smtClean="0"/>
+              <a:rPr lang="en-US"/>
               <a:t>Third level</a:t>
             </a:r>
           </a:p>
           <a:p>
             <a:pPr lvl="3"/>
             <a:r>
-              <a:rPr lang="en-US" smtClean="0"/>
+              <a:rPr lang="en-US"/>
               <a:t>Fourth level</a:t>
             </a:r>
           </a:p>
           <a:p>
             <a:pPr lvl="4"/>
             <a:r>
-              <a:rPr lang="en-US" smtClean="0"/>
+              <a:rPr lang="en-US"/>
               <a:t>Fifth level</a:t>
             </a:r>
-            <a:endParaRPr lang="en-US"/>
           </a:p>
         </p:txBody>
       </p:sp>
@@ -1667,7 +1667,7 @@
           <a:p>
             <a:pPr lvl="0"/>
             <a:r>
-              <a:rPr lang="en-US" smtClean="0"/>
+              <a:rPr lang="en-US"/>
               <a:t>Click to edit Master text styles</a:t>
             </a:r>
           </a:p>
@@ -1723,38 +1723,37 @@
           <a:p>
             <a:pPr lvl="0"/>
             <a:r>
-              <a:rPr lang="en-US" smtClean="0"/>
+              <a:rPr lang="en-US"/>
               <a:t>Click to edit Master text styles</a:t>
             </a:r>
           </a:p>
           <a:p>
             <a:pPr lvl="1"/>
             <a:r>
-              <a:rPr lang="en-US" smtClean="0"/>
+              <a:rPr lang="en-US"/>
               <a:t>Second level</a:t>
             </a:r>
           </a:p>
           <a:p>
             <a:pPr lvl="2"/>
             <a:r>
-              <a:rPr lang="en-US" smtClean="0"/>
+              <a:rPr lang="en-US"/>
               <a:t>Third level</a:t>
             </a:r>
           </a:p>
           <a:p>
             <a:pPr lvl="3"/>
             <a:r>
-              <a:rPr lang="en-US" smtClean="0"/>
+              <a:rPr lang="en-US"/>
               <a:t>Fourth level</a:t>
             </a:r>
           </a:p>
           <a:p>
             <a:pPr lvl="4"/>
             <a:r>
-              <a:rPr lang="en-US" smtClean="0"/>
+              <a:rPr lang="en-US"/>
               <a:t>Fifth level</a:t>
             </a:r>
-            <a:endParaRPr lang="en-US"/>
           </a:p>
         </p:txBody>
       </p:sp>
@@ -1775,7 +1774,7 @@
           <a:p>
             <a:fld id="{5BCAD085-E8A6-8845-BD4E-CB4CCA059FC4}" type="datetimeFigureOut">
               <a:rPr lang="en-US" smtClean="0"/>
-              <a:t>1/27/13</a:t>
+              <a:t>9/9/2026</a:t>
             </a:fld>
             <a:endParaRPr lang="en-US"/>
           </a:p>
@@ -1869,10 +1868,9 @@
           <a:lstStyle/>
           <a:p>
             <a:r>
-              <a:rPr lang="en-US" smtClean="0"/>
+              <a:rPr lang="en-US"/>
               <a:t>Click to edit Master title style</a:t>
             </a:r>
-            <a:endParaRPr lang="en-US"/>
           </a:p>
         </p:txBody>
       </p:sp>
@@ -1893,7 +1891,7 @@
           <a:p>
             <a:fld id="{5BCAD085-E8A6-8845-BD4E-CB4CCA059FC4}" type="datetimeFigureOut">
               <a:rPr lang="en-US" smtClean="0"/>
-              <a:t>1/27/13</a:t>
+              <a:t>9/9/2026</a:t>
             </a:fld>
             <a:endParaRPr lang="en-US"/>
           </a:p>
@@ -1988,7 +1986,7 @@
           <a:p>
             <a:fld id="{5BCAD085-E8A6-8845-BD4E-CB4CCA059FC4}" type="datetimeFigureOut">
               <a:rPr lang="en-US" smtClean="0"/>
-              <a:t>1/27/13</a:t>
+              <a:t>9/9/2026</a:t>
             </a:fld>
             <a:endParaRPr lang="en-US"/>
           </a:p>
@@ -2091,10 +2089,9 @@
           </a:lstStyle>
           <a:p>
             <a:r>
-              <a:rPr lang="en-US" smtClean="0"/>
+              <a:rPr lang="en-US"/>
               <a:t>Click to edit Master title style</a:t>
             </a:r>
-            <a:endParaRPr lang="en-US"/>
           </a:p>
         </p:txBody>
       </p:sp>
@@ -2148,38 +2145,37 @@
           <a:p>
             <a:pPr lvl="0"/>
             <a:r>
-              <a:rPr lang="en-US" smtClean="0"/>
+              <a:rPr lang="en-US"/>
               <a:t>Click to edit Master text styles</a:t>
             </a:r>
           </a:p>
           <a:p>
             <a:pPr lvl="1"/>
             <a:r>
-              <a:rPr lang="en-US" smtClean="0"/>
+              <a:rPr lang="en-US"/>
               <a:t>Second level</a:t>
             </a:r>
           </a:p>
           <a:p>
             <a:pPr lvl="2"/>
             <a:r>
-              <a:rPr lang="en-US" smtClean="0"/>
+              <a:rPr lang="en-US"/>
               <a:t>Third level</a:t>
             </a:r>
           </a:p>
           <a:p>
             <a:pPr lvl="3"/>
             <a:r>
-              <a:rPr lang="en-US" smtClean="0"/>
+              <a:rPr lang="en-US"/>
               <a:t>Fourth level</a:t>
             </a:r>
           </a:p>
           <a:p>
             <a:pPr lvl="4"/>
             <a:r>
-              <a:rPr lang="en-US" smtClean="0"/>
+              <a:rPr lang="en-US"/>
               <a:t>Fifth level</a:t>
             </a:r>
-            <a:endParaRPr lang="en-US"/>
           </a:p>
         </p:txBody>
       </p:sp>
@@ -2242,7 +2238,7 @@
           <a:p>
             <a:pPr lvl="0"/>
             <a:r>
-              <a:rPr lang="en-US" smtClean="0"/>
+              <a:rPr lang="en-US"/>
               <a:t>Click to edit Master text styles</a:t>
             </a:r>
           </a:p>
@@ -2265,7 +2261,7 @@
           <a:p>
             <a:fld id="{5BCAD085-E8A6-8845-BD4E-CB4CCA059FC4}" type="datetimeFigureOut">
               <a:rPr lang="en-US" smtClean="0"/>
-              <a:t>1/27/13</a:t>
+              <a:t>9/9/2026</a:t>
             </a:fld>
             <a:endParaRPr lang="en-US"/>
           </a:p>
@@ -2368,10 +2364,9 @@
           </a:lstStyle>
           <a:p>
             <a:r>
-              <a:rPr lang="en-US" smtClean="0"/>
+              <a:rPr lang="en-US"/>
               <a:t>Click to edit Master title style</a:t>
             </a:r>
-            <a:endParaRPr lang="en-US"/>
           </a:p>
         </p:txBody>
       </p:sp>
@@ -2495,7 +2490,7 @@
           <a:p>
             <a:pPr lvl="0"/>
             <a:r>
-              <a:rPr lang="en-US" smtClean="0"/>
+              <a:rPr lang="en-US"/>
               <a:t>Click to edit Master text styles</a:t>
             </a:r>
           </a:p>
@@ -2518,7 +2513,7 @@
           <a:p>
             <a:fld id="{5BCAD085-E8A6-8845-BD4E-CB4CCA059FC4}" type="datetimeFigureOut">
               <a:rPr lang="en-US" smtClean="0"/>
-              <a:t>1/27/13</a:t>
+              <a:t>9/9/2026</a:t>
             </a:fld>
             <a:endParaRPr lang="en-US"/>
           </a:p>
@@ -2627,10 +2622,9 @@
           <a:lstStyle/>
           <a:p>
             <a:r>
-              <a:rPr lang="en-US" smtClean="0"/>
+              <a:rPr lang="en-US"/>
               <a:t>Click to edit Master title style</a:t>
             </a:r>
-            <a:endParaRPr lang="en-US"/>
           </a:p>
         </p:txBody>
       </p:sp>
@@ -2661,38 +2655,37 @@
           <a:p>
             <a:pPr lvl="0"/>
             <a:r>
-              <a:rPr lang="en-US" smtClean="0"/>
+              <a:rPr lang="en-US"/>
               <a:t>Click to edit Master text styles</a:t>
             </a:r>
           </a:p>
           <a:p>
             <a:pPr lvl="1"/>
             <a:r>
-              <a:rPr lang="en-US" smtClean="0"/>
+              <a:rPr lang="en-US"/>
               <a:t>Second level</a:t>
             </a:r>
           </a:p>
           <a:p>
             <a:pPr lvl="2"/>
             <a:r>
-              <a:rPr lang="en-US" smtClean="0"/>
+              <a:rPr lang="en-US"/>
               <a:t>Third level</a:t>
             </a:r>
           </a:p>
           <a:p>
             <a:pPr lvl="3"/>
             <a:r>
-              <a:rPr lang="en-US" smtClean="0"/>
+              <a:rPr lang="en-US"/>
               <a:t>Fourth level</a:t>
             </a:r>
           </a:p>
           <a:p>
             <a:pPr lvl="4"/>
             <a:r>
-              <a:rPr lang="en-US" smtClean="0"/>
+              <a:rPr lang="en-US"/>
               <a:t>Fifth level</a:t>
             </a:r>
-            <a:endParaRPr lang="en-US"/>
           </a:p>
         </p:txBody>
       </p:sp>
@@ -2731,7 +2724,7 @@
           <a:p>
             <a:fld id="{5BCAD085-E8A6-8845-BD4E-CB4CCA059FC4}" type="datetimeFigureOut">
               <a:rPr lang="en-US" smtClean="0"/>
-              <a:t>1/27/13</a:t>
+              <a:t>9/9/2026</a:t>
             </a:fld>
             <a:endParaRPr lang="en-US"/>
           </a:p>
@@ -3090,7 +3083,7 @@
 </file>
 
 <file path=ppt/slides/slide1.xml><?xml version="1.0" encoding="utf-8"?>
-<p:sld xmlns:a="http://schemas.openxmlformats.org/drawingml/2006/main" xmlns:p="http://schemas.openxmlformats.org/presentationml/2006/main" xmlns:r="http://schemas.openxmlformats.org/officeDocument/2006/relationships">
+<p:sld xmlns:a="http://schemas.openxmlformats.org/drawingml/2006/main" xmlns:r="http://schemas.openxmlformats.org/officeDocument/2006/relationships" xmlns:p="http://schemas.openxmlformats.org/presentationml/2006/main">
   <p:cSld>
     <p:spTree>
       <p:nvGrpSpPr>
@@ -3098,7 +3091,14 @@
         <p:cNvGrpSpPr/>
         <p:nvPr/>
       </p:nvGrpSpPr>
-      <p:grpSpPr/>
+      <p:grpSpPr>
+        <a:xfrm>
+          <a:off x="0" y="0"/>
+          <a:ext cx="0" cy="0"/>
+          <a:chOff x="0" y="0"/>
+          <a:chExt cx="0" cy="0"/>
+        </a:xfrm>
+      </p:grpSpPr>
       <p:sp>
         <p:nvSpPr>
           <p:cNvPr id="2" name="Rectangle 1"/>
@@ -3140,6 +3140,7 @@
           <a:lstStyle/>
           <a:p>
             <a:pPr algn="ctr"/>
+            <a:endParaRPr/>
           </a:p>
         </p:txBody>
       </p:sp>
@@ -3184,6 +3185,7 @@
           <a:lstStyle/>
           <a:p>
             <a:pPr algn="ctr"/>
+            <a:endParaRPr/>
           </a:p>
         </p:txBody>
       </p:sp>
@@ -3204,7 +3206,7 @@
           <a:noFill/>
         </p:spPr>
         <p:txBody>
-          <a:bodyPr wrap="square" lIns="0" rIns="0" tIns="0" bIns="0">
+          <a:bodyPr wrap="square" lIns="0" tIns="0" rIns="0" bIns="0">
             <a:spAutoFit/>
           </a:bodyPr>
           <a:lstStyle/>
@@ -3265,7 +3267,7 @@
           <a:noFill/>
         </p:spPr>
         <p:txBody>
-          <a:bodyPr wrap="square" lIns="0" rIns="0" tIns="0" bIns="0">
+          <a:bodyPr wrap="square" lIns="0" tIns="0" rIns="0" bIns="0">
             <a:spAutoFit/>
           </a:bodyPr>
           <a:lstStyle/>
@@ -3331,6 +3333,7 @@
           <a:lstStyle/>
           <a:p>
             <a:pPr algn="ctr"/>
+            <a:endParaRPr/>
           </a:p>
         </p:txBody>
       </p:sp>
@@ -3351,7 +3354,7 @@
           <a:noFill/>
         </p:spPr>
         <p:txBody>
-          <a:bodyPr wrap="square" lIns="0" rIns="0" tIns="0" bIns="0">
+          <a:bodyPr wrap="square" lIns="0" tIns="0" rIns="0" bIns="0">
             <a:spAutoFit/>
           </a:bodyPr>
           <a:lstStyle/>
@@ -3450,7 +3453,7 @@
           <a:noFill/>
         </p:spPr>
         <p:txBody>
-          <a:bodyPr wrap="square" lIns="0" rIns="0" tIns="0" bIns="0">
+          <a:bodyPr wrap="square" lIns="0" tIns="0" rIns="0" bIns="0">
             <a:spAutoFit/>
           </a:bodyPr>
           <a:lstStyle/>
@@ -3549,7 +3552,7 @@
           <a:noFill/>
         </p:spPr>
         <p:txBody>
-          <a:bodyPr wrap="square" lIns="0" rIns="0" tIns="0" bIns="0">
+          <a:bodyPr wrap="square" lIns="0" tIns="0" rIns="0" bIns="0">
             <a:spAutoFit/>
           </a:bodyPr>
           <a:lstStyle/>
@@ -3583,7 +3586,7 @@
 </file>
 
 <file path=ppt/slides/slide10.xml><?xml version="1.0" encoding="utf-8"?>
-<p:sld xmlns:a="http://schemas.openxmlformats.org/drawingml/2006/main" xmlns:p="http://schemas.openxmlformats.org/presentationml/2006/main" xmlns:r="http://schemas.openxmlformats.org/officeDocument/2006/relationships">
+<p:sld xmlns:a="http://schemas.openxmlformats.org/drawingml/2006/main" xmlns:r="http://schemas.openxmlformats.org/officeDocument/2006/relationships" xmlns:p="http://schemas.openxmlformats.org/presentationml/2006/main">
   <p:cSld>
     <p:spTree>
       <p:nvGrpSpPr>
@@ -3591,7 +3594,14 @@
         <p:cNvGrpSpPr/>
         <p:nvPr/>
       </p:nvGrpSpPr>
-      <p:grpSpPr/>
+      <p:grpSpPr>
+        <a:xfrm>
+          <a:off x="0" y="0"/>
+          <a:ext cx="0" cy="0"/>
+          <a:chOff x="0" y="0"/>
+          <a:chExt cx="0" cy="0"/>
+        </a:xfrm>
+      </p:grpSpPr>
       <p:sp>
         <p:nvSpPr>
           <p:cNvPr id="2" name="Rectangle 1"/>
@@ -3633,6 +3643,7 @@
           <a:lstStyle/>
           <a:p>
             <a:pPr algn="ctr"/>
+            <a:endParaRPr/>
           </a:p>
         </p:txBody>
       </p:sp>
@@ -3645,7 +3656,7 @@
         <p:spPr>
           <a:xfrm>
             <a:off x="566928" y="658368"/>
-            <a:ext cx="10058400" cy="274320"/>
+            <a:ext cx="11064240" cy="685800"/>
           </a:xfrm>
           <a:prstGeom prst="rect">
             <a:avLst/>
@@ -3653,7 +3664,7 @@
           <a:noFill/>
         </p:spPr>
         <p:txBody>
-          <a:bodyPr wrap="square" lIns="0" rIns="0" tIns="0" bIns="0">
+          <a:bodyPr wrap="square" lIns="0" tIns="0" rIns="0" bIns="0">
             <a:spAutoFit/>
           </a:bodyPr>
           <a:lstStyle/>
@@ -3667,13 +3678,13 @@
               </a:spcAft>
             </a:pPr>
             <a:r>
-              <a:rPr sz="1200" b="1" i="0">
-                <a:solidFill>
-                  <a:srgbClr val="0F7773"/>
-                </a:solidFill>
-                <a:latin typeface="Calibri"/>
-              </a:rPr>
-              <a:t>RESULTS II: SCALE</a:t>
+              <a:rPr sz="3000" b="1" i="0">
+                <a:solidFill>
+                  <a:srgbClr val="1B335F"/>
+                </a:solidFill>
+                <a:latin typeface="Calibri"/>
+              </a:rPr>
+              <a:t>References</a:t>
             </a:r>
           </a:p>
         </p:txBody>
@@ -3686,8 +3697,8 @@
         </p:nvSpPr>
         <p:spPr>
           <a:xfrm>
-            <a:off x="566928" y="987552"/>
-            <a:ext cx="11064240" cy="685800"/>
+            <a:off x="11064240" y="6263640"/>
+            <a:ext cx="594360" cy="274320"/>
           </a:xfrm>
           <a:prstGeom prst="rect">
             <a:avLst/>
@@ -3695,12 +3706,12 @@
           <a:noFill/>
         </p:spPr>
         <p:txBody>
-          <a:bodyPr wrap="square" lIns="0" rIns="0" tIns="0" bIns="0">
+          <a:bodyPr wrap="square" lIns="0" tIns="0" rIns="0" bIns="0">
             <a:spAutoFit/>
           </a:bodyPr>
           <a:lstStyle/>
           <a:p>
-            <a:pPr algn="l">
+            <a:pPr algn="r">
               <a:lnSpc>
                 <a:spcPct val="115000"/>
               </a:lnSpc>
@@ -3709,13 +3720,13 @@
               </a:spcAft>
             </a:pPr>
             <a:r>
-              <a:rPr sz="3000" b="1" i="0">
-                <a:solidFill>
-                  <a:srgbClr val="1B335F"/>
-                </a:solidFill>
-                <a:latin typeface="Calibri"/>
-              </a:rPr>
-              <a:t>The same boundary, found from a completely different direction</a:t>
+              <a:rPr sz="1100" b="0" i="0">
+                <a:solidFill>
+                  <a:srgbClr val="666B73"/>
+                </a:solidFill>
+                <a:latin typeface="Calibri"/>
+              </a:rPr>
+              <a:t>10</a:t>
             </a:r>
           </a:p>
         </p:txBody>
@@ -3728,8 +3739,8 @@
         </p:nvSpPr>
         <p:spPr>
           <a:xfrm>
-            <a:off x="11064240" y="6263640"/>
-            <a:ext cx="594360" cy="274320"/>
+            <a:off x="566928" y="1691640"/>
+            <a:ext cx="5349240" cy="4114800"/>
           </a:xfrm>
           <a:prstGeom prst="rect">
             <a:avLst/>
@@ -3737,27 +3748,122 @@
           <a:noFill/>
         </p:spPr>
         <p:txBody>
-          <a:bodyPr wrap="square" lIns="0" rIns="0" tIns="0" bIns="0">
+          <a:bodyPr wrap="square" lIns="0" tIns="0" rIns="0" bIns="0">
             <a:spAutoFit/>
           </a:bodyPr>
           <a:lstStyle/>
           <a:p>
-            <a:pPr algn="r">
+            <a:pPr algn="l">
               <a:lnSpc>
                 <a:spcPct val="115000"/>
               </a:lnSpc>
               <a:spcAft>
-                <a:spcPts val="0"/>
-              </a:spcAft>
-            </a:pPr>
-            <a:r>
-              <a:rPr sz="1100" b="0" i="0">
-                <a:solidFill>
-                  <a:srgbClr val="666B73"/>
-                </a:solidFill>
-                <a:latin typeface="Calibri"/>
-              </a:rPr>
-              <a:t>10</a:t>
+                <a:spcPts val="1100"/>
+              </a:spcAft>
+            </a:pPr>
+            <a:r>
+              <a:rPr sz="1200" b="0" i="0">
+                <a:solidFill>
+                  <a:srgbClr val="2B2B2B"/>
+                </a:solidFill>
+                <a:latin typeface="Calibri"/>
+              </a:rPr>
+              <a:t>[1] W. R. Heinzelman, A. Chandrakasan and H. Balakrishnan, “Energy-Efficient Communication Protocol for Wireless Microsensor Networks,” Proc. HICSS, 2000.</a:t>
+            </a:r>
+          </a:p>
+          <a:p>
+            <a:pPr algn="l">
+              <a:lnSpc>
+                <a:spcPct val="115000"/>
+              </a:lnSpc>
+              <a:spcAft>
+                <a:spcPts val="1100"/>
+              </a:spcAft>
+            </a:pPr>
+            <a:r>
+              <a:rPr sz="1200" b="0" i="0">
+                <a:solidFill>
+                  <a:srgbClr val="2B2B2B"/>
+                </a:solidFill>
+                <a:latin typeface="Calibri"/>
+              </a:rPr>
+              <a:t>[2] S. Lindsey and C. S. Raghavendra, “PEGASIS: Power-Efficient Gathering in Sensor Information Systems,” Proc. IEEE Aerospace Conf., 2002.</a:t>
+            </a:r>
+          </a:p>
+          <a:p>
+            <a:pPr algn="l">
+              <a:lnSpc>
+                <a:spcPct val="115000"/>
+              </a:lnSpc>
+              <a:spcAft>
+                <a:spcPts val="1100"/>
+              </a:spcAft>
+            </a:pPr>
+            <a:r>
+              <a:rPr sz="1200" b="0" i="0">
+                <a:solidFill>
+                  <a:srgbClr val="2B2B2B"/>
+                </a:solidFill>
+                <a:latin typeface="Calibri"/>
+              </a:rPr>
+              <a:t>[3] A. Manjeshwar and D. P. Agrawal, “TEEN: A Routing Protocol for Enhanced Efficiency in Wireless Sensor Networks,” Proc. IPDPS Workshops, 2001.</a:t>
+            </a:r>
+          </a:p>
+          <a:p>
+            <a:pPr algn="l">
+              <a:lnSpc>
+                <a:spcPct val="115000"/>
+              </a:lnSpc>
+              <a:spcAft>
+                <a:spcPts val="1100"/>
+              </a:spcAft>
+            </a:pPr>
+            <a:r>
+              <a:rPr sz="1200" b="0" i="0">
+                <a:solidFill>
+                  <a:srgbClr val="2B2B2B"/>
+                </a:solidFill>
+                <a:latin typeface="Calibri"/>
+              </a:rPr>
+              <a:t>[4] K. Deb, A. Pratap, S. Agarwal and T. Meyarivan, “A Fast and Elitist Multiobjective Genetic Algorithm: NSGA-II,” IEEE Trans. Evol. Comput., vol. 6, no. 2, 2002.</a:t>
+            </a:r>
+          </a:p>
+          <a:p>
+            <a:pPr algn="l">
+              <a:lnSpc>
+                <a:spcPct val="115000"/>
+              </a:lnSpc>
+              <a:spcAft>
+                <a:spcPts val="1100"/>
+              </a:spcAft>
+            </a:pPr>
+            <a:r>
+              <a:rPr sz="1200" b="0" i="0">
+                <a:solidFill>
+                  <a:srgbClr val="2B2B2B"/>
+                </a:solidFill>
+                <a:latin typeface="Calibri"/>
+              </a:rPr>
+              <a:t>[5] J. M. Mendel and R. I. B. John, “Type-2 Fuzzy Sets Made Simple,” IEEE Trans. Fuzzy Syst., vol. 10, no. 2, 2002.</a:t>
+            </a:r>
+          </a:p>
+          <a:p>
+            <a:pPr algn="l">
+              <a:lnSpc>
+                <a:spcPct val="115000"/>
+              </a:lnSpc>
+              <a:spcAft>
+                <a:spcPts val="1100"/>
+              </a:spcAft>
+            </a:pPr>
+            <a:r>
+              <a:rPr sz="1200" b="0" i="0">
+                <a:solidFill>
+                  <a:srgbClr val="2B2B2B"/>
+                </a:solidFill>
+                <a:latin typeface="Calibri"/>
+              </a:rPr>
+              <a:t>[6] T. Kohonen, “The Self-Organizing Map,” Proc. IEEE, vol. 78, no. 9, 1990.</a:t>
             </a:r>
           </a:p>
         </p:txBody>
@@ -3770,8 +3876,8 @@
         </p:nvSpPr>
         <p:spPr>
           <a:xfrm>
-            <a:off x="566928" y="1737360"/>
-            <a:ext cx="5285232" cy="1737360"/>
+            <a:off x="6281928" y="1691640"/>
+            <a:ext cx="5349240" cy="4114800"/>
           </a:xfrm>
           <a:prstGeom prst="rect">
             <a:avLst/>
@@ -3779,286 +3885,147 @@
           <a:noFill/>
         </p:spPr>
         <p:txBody>
-          <a:bodyPr wrap="square" lIns="0" rIns="0" tIns="0" bIns="0">
+          <a:bodyPr wrap="square" lIns="0" tIns="0" rIns="0" bIns="0">
             <a:spAutoFit/>
           </a:bodyPr>
           <a:lstStyle/>
           <a:p>
-            <a:pPr>
-              <a:lnSpc>
-                <a:spcPct val="118000"/>
-              </a:lnSpc>
-              <a:spcAft>
-                <a:spcPts val="900"/>
-              </a:spcAft>
-            </a:pPr>
-            <a:r>
-              <a:rPr sz="1400">
-                <a:solidFill>
-                  <a:srgbClr val="0F7773"/>
-                </a:solidFill>
-                <a:latin typeface="Calibri"/>
-              </a:rPr>
-              <a:t>▪  </a:t>
-            </a:r>
-            <a:r>
-              <a:rPr sz="1400" b="1">
-                <a:solidFill>
-                  <a:srgbClr val="1B335F"/>
-                </a:solidFill>
-                <a:latin typeface="Calibri"/>
-              </a:rPr>
-              <a:t>1,350 more runs. </a:t>
-            </a:r>
-            <a:r>
-              <a:rPr sz="1400">
+            <a:pPr algn="l">
+              <a:lnSpc>
+                <a:spcPct val="115000"/>
+              </a:lnSpc>
+              <a:spcAft>
+                <a:spcPts val="1100"/>
+              </a:spcAft>
+            </a:pPr>
+            <a:r>
+              <a:rPr sz="1200" b="0" i="0">
                 <a:solidFill>
                   <a:srgbClr val="2B2B2B"/>
                 </a:solidFill>
                 <a:latin typeface="Calibri"/>
               </a:rPr>
-              <a:t>Three node counts by three field areas, 15 paired runs per cell, with the learned policies frozen at their 100-node weights.</a:t>
-            </a:r>
-          </a:p>
-          <a:p>
-            <a:pPr>
-              <a:lnSpc>
-                <a:spcPct val="118000"/>
-              </a:lnSpc>
-              <a:spcAft>
-                <a:spcPts val="900"/>
-              </a:spcAft>
-            </a:pPr>
-            <a:r>
-              <a:rPr sz="1400">
-                <a:solidFill>
-                  <a:srgbClr val="0F7773"/>
-                </a:solidFill>
-                <a:latin typeface="Calibri"/>
-              </a:rPr>
-              <a:t>▪  </a:t>
-            </a:r>
-            <a:r>
-              <a:rPr sz="1400" b="1">
-                <a:solidFill>
-                  <a:srgbClr val="1B335F"/>
-                </a:solidFill>
-                <a:latin typeface="Calibri"/>
-              </a:rPr>
-              <a:t>Area beats node count about five to one. </a:t>
-            </a:r>
-            <a:r>
-              <a:rPr sz="1400">
+              <a:t>[7] V. Mnih et al., “Human-Level Control Through Deep Reinforcement Learning,” Nature, vol. 518, 2015.</a:t>
+            </a:r>
+          </a:p>
+          <a:p>
+            <a:pPr algn="l">
+              <a:lnSpc>
+                <a:spcPct val="115000"/>
+              </a:lnSpc>
+              <a:spcAft>
+                <a:spcPts val="1100"/>
+              </a:spcAft>
+            </a:pPr>
+            <a:r>
+              <a:rPr sz="1200" b="0" i="0">
                 <a:solidFill>
                   <a:srgbClr val="2B2B2B"/>
                 </a:solidFill>
                 <a:latin typeface="Calibri"/>
               </a:rPr>
-              <a:t>Tripling the nodes moves first death by 0.88 to 1.26 times. Tripling the field side moves it by 5 to 7.</a:t>
-            </a:r>
-          </a:p>
-        </p:txBody>
-      </p:sp>
-      <p:sp>
-        <p:nvSpPr>
-          <p:cNvPr id="7" name="TextBox 6"/>
-          <p:cNvSpPr txBox="1"/>
-          <p:nvPr/>
-        </p:nvSpPr>
-        <p:spPr>
-          <a:xfrm>
-            <a:off x="6355080" y="1737360"/>
-            <a:ext cx="5285232" cy="1737360"/>
-          </a:xfrm>
-          <a:prstGeom prst="rect">
-            <a:avLst/>
-          </a:prstGeom>
-          <a:noFill/>
-        </p:spPr>
-        <p:txBody>
-          <a:bodyPr wrap="square" lIns="0" rIns="0" tIns="0" bIns="0">
-            <a:spAutoFit/>
-          </a:bodyPr>
-          <a:lstStyle/>
-          <a:p>
-            <a:pPr>
-              <a:lnSpc>
-                <a:spcPct val="118000"/>
-              </a:lnSpc>
-              <a:spcAft>
-                <a:spcPts val="900"/>
-              </a:spcAft>
-            </a:pPr>
-            <a:r>
-              <a:rPr sz="1400">
-                <a:solidFill>
-                  <a:srgbClr val="0F7773"/>
-                </a:solidFill>
-                <a:latin typeface="Calibri"/>
-              </a:rPr>
-              <a:t>▪  </a:t>
-            </a:r>
-            <a:r>
-              <a:rPr sz="1400" b="1">
-                <a:solidFill>
-                  <a:srgbClr val="1B335F"/>
-                </a:solidFill>
-                <a:latin typeface="Calibri"/>
-              </a:rPr>
-              <a:t>Distance to the sink is the variable, not density. </a:t>
-            </a:r>
-            <a:r>
-              <a:rPr sz="1400">
+              <a:t>[8] T. N. Kipf and M. Welling, “Semi-Supervised Classification with Graph Convolutional Networks,” Proc. ICLR, 2017.</a:t>
+            </a:r>
+          </a:p>
+          <a:p>
+            <a:pPr algn="l">
+              <a:lnSpc>
+                <a:spcPct val="115000"/>
+              </a:lnSpc>
+              <a:spcAft>
+                <a:spcPts val="1100"/>
+              </a:spcAft>
+            </a:pPr>
+            <a:r>
+              <a:rPr sz="1200" b="0" i="0">
                 <a:solidFill>
                   <a:srgbClr val="2B2B2B"/>
                 </a:solidFill>
                 <a:latin typeface="Calibri"/>
               </a:rPr>
-              <a:t>Density spans a factor of 27 and explains almost none of it.</a:t>
-            </a:r>
-          </a:p>
-          <a:p>
-            <a:pPr>
-              <a:lnSpc>
-                <a:spcPct val="118000"/>
-              </a:lnSpc>
-              <a:spcAft>
-                <a:spcPts val="900"/>
-              </a:spcAft>
-            </a:pPr>
-            <a:r>
-              <a:rPr sz="1400">
-                <a:solidFill>
-                  <a:srgbClr val="0F7773"/>
-                </a:solidFill>
-                <a:latin typeface="Calibri"/>
-              </a:rPr>
-              <a:t>▪  </a:t>
-            </a:r>
-            <a:r>
-              <a:rPr sz="1400" b="1">
-                <a:solidFill>
-                  <a:srgbClr val="1B335F"/>
-                </a:solidFill>
-                <a:latin typeface="Calibri"/>
-              </a:rPr>
-              <a:t>Clustering is harmful when the sink is close. </a:t>
-            </a:r>
-            <a:r>
-              <a:rPr sz="1400">
+              <a:t>[9] S. Kurkowski, T. Camp and M. Colagrosso, “MANET Simulation Studies: The Incredibles,” ACM SIGMOBILE MC2R, vol. 9, no. 4, 2005.</a:t>
+            </a:r>
+          </a:p>
+          <a:p>
+            <a:pPr algn="l">
+              <a:lnSpc>
+                <a:spcPct val="115000"/>
+              </a:lnSpc>
+              <a:spcAft>
+                <a:spcPts val="1100"/>
+              </a:spcAft>
+            </a:pPr>
+            <a:r>
+              <a:rPr sz="1200" b="0" i="0">
                 <a:solidFill>
                   <a:srgbClr val="2B2B2B"/>
                 </a:solidFill>
                 <a:latin typeface="Calibri"/>
               </a:rPr>
-              <a:t>At 50 x 50 m the no-clustering baseline outlives LEACH in all three cells, so the retraction reproduces without touching the channel.</a:t>
-            </a:r>
-          </a:p>
-        </p:txBody>
-      </p:sp>
-      <p:pic>
-        <p:nvPicPr>
-          <p:cNvPr id="8" name="Picture 7" descr="figD_scale_fnd.png"/>
-          <p:cNvPicPr>
-            <a:picLocks noChangeAspect="1"/>
-          </p:cNvPicPr>
-          <p:nvPr/>
-        </p:nvPicPr>
-        <p:blipFill>
-          <a:blip r:embed="rId2"/>
-          <a:stretch>
-            <a:fillRect/>
-          </a:stretch>
-        </p:blipFill>
-        <p:spPr>
-          <a:xfrm>
-            <a:off x="2156335" y="3401568"/>
-            <a:ext cx="7848849" cy="3017520"/>
-          </a:xfrm>
-          <a:prstGeom prst="rect">
-            <a:avLst/>
-          </a:prstGeom>
-        </p:spPr>
-      </p:pic>
-      <p:sp>
-        <p:nvSpPr>
-          <p:cNvPr id="9" name="TextBox 8"/>
-          <p:cNvSpPr txBox="1"/>
-          <p:nvPr/>
-        </p:nvSpPr>
-        <p:spPr>
-          <a:xfrm>
-            <a:off x="2148840" y="6382512"/>
-            <a:ext cx="7863840" cy="457200"/>
-          </a:xfrm>
-          <a:prstGeom prst="rect">
-            <a:avLst/>
-          </a:prstGeom>
-          <a:noFill/>
-        </p:spPr>
-        <p:txBody>
-          <a:bodyPr wrap="square" lIns="0" rIns="0" tIns="0" bIns="0">
-            <a:spAutoFit/>
-          </a:bodyPr>
-          <a:lstStyle/>
-          <a:p>
-            <a:pPr algn="ctr">
+              <a:t>[10] K. Pawlikowski, H.-D. J. Jeong and J.-S. R. Lee, “On Credibility of Simulation Studies of Telecommunication Networks,” IEEE Commun. Mag., vol. 40, no. 1, 2002.</a:t>
+            </a:r>
+          </a:p>
+          <a:p>
+            <a:pPr algn="l">
               <a:lnSpc>
                 <a:spcPct val="115000"/>
               </a:lnSpc>
               <a:spcAft>
-                <a:spcPts val="0"/>
-              </a:spcAft>
-            </a:pPr>
-            <a:r>
-              <a:rPr sz="1100" b="0" i="1">
-                <a:solidFill>
-                  <a:srgbClr val="666B73"/>
-                </a:solidFill>
-                <a:latin typeface="Calibri"/>
-              </a:rPr>
-              <a:t>First node death across the nine cells, log scale, colour by generation. Field size shifts everything by an order of magnitude; node count barely moves it. Two of our five pre-registered expectations were wrong, and we report both.</a:t>
-            </a:r>
-          </a:p>
-        </p:txBody>
-      </p:sp>
-    </p:spTree>
-  </p:cSld>
-  <p:clrMapOvr>
-    <a:masterClrMapping/>
-  </p:clrMapOvr>
-</p:sld>
-</file>
-
-<file path=ppt/slides/slide11.xml><?xml version="1.0" encoding="utf-8"?>
-<p:sld xmlns:a="http://schemas.openxmlformats.org/drawingml/2006/main" xmlns:p="http://schemas.openxmlformats.org/presentationml/2006/main" xmlns:r="http://schemas.openxmlformats.org/officeDocument/2006/relationships">
-  <p:cSld>
-    <p:spTree>
-      <p:nvGrpSpPr>
-        <p:cNvPr id="1" name=""/>
-        <p:cNvGrpSpPr/>
-        <p:nvPr/>
-      </p:nvGrpSpPr>
-      <p:grpSpPr/>
-      <p:sp>
-        <p:nvSpPr>
-          <p:cNvPr id="2" name="Rectangle 1"/>
+                <a:spcPts val="1100"/>
+              </a:spcAft>
+            </a:pPr>
+            <a:r>
+              <a:rPr sz="1200" b="0" i="0">
+                <a:solidFill>
+                  <a:srgbClr val="2B2B2B"/>
+                </a:solidFill>
+                <a:latin typeface="Calibri"/>
+              </a:rPr>
+              <a:t>[11] T. S. Rappaport, Wireless Communications: Principles and Practice, 2nd ed. Prentice Hall, 2002.</a:t>
+            </a:r>
+          </a:p>
+          <a:p>
+            <a:pPr algn="l">
+              <a:lnSpc>
+                <a:spcPct val="115000"/>
+              </a:lnSpc>
+              <a:spcAft>
+                <a:spcPts val="1100"/>
+              </a:spcAft>
+            </a:pPr>
+            <a:r>
+              <a:rPr sz="1200" b="0" i="0">
+                <a:solidFill>
+                  <a:srgbClr val="2B2B2B"/>
+                </a:solidFill>
+                <a:latin typeface="Calibri"/>
+              </a:rPr>
+              <a:t>[12] S. Holm, “A Simple Sequentially Rejective Multiple Test Procedure,” Scand. J. Statist., vol. 6, no. 2, 1979.</a:t>
+            </a:r>
+          </a:p>
+        </p:txBody>
+      </p:sp>
+      <p:sp>
+        <p:nvSpPr>
+          <p:cNvPr id="7" name="Rectangle 6"/>
           <p:cNvSpPr/>
           <p:nvPr/>
         </p:nvSpPr>
         <p:spPr>
           <a:xfrm>
-            <a:off x="566928" y="475488"/>
-            <a:ext cx="1051560" cy="50292"/>
+            <a:off x="566928" y="5577840"/>
+            <a:ext cx="11064240" cy="548640"/>
           </a:xfrm>
           <a:prstGeom prst="rect">
             <a:avLst/>
           </a:prstGeom>
           <a:solidFill>
-            <a:srgbClr val="0F7773"/>
+            <a:srgbClr val="F4F6F8"/>
           </a:solidFill>
-          <a:ln>
-            <a:noFill/>
+          <a:ln w="9525">
+            <a:solidFill>
+              <a:srgbClr val="D8DDE3"/>
+            </a:solidFill>
           </a:ln>
           <a:effectLst/>
         </p:spPr>
@@ -4081,19 +4048,20 @@
           <a:lstStyle/>
           <a:p>
             <a:pPr algn="ctr"/>
-          </a:p>
-        </p:txBody>
-      </p:sp>
-      <p:sp>
-        <p:nvSpPr>
-          <p:cNvPr id="3" name="TextBox 2"/>
+            <a:endParaRPr/>
+          </a:p>
+        </p:txBody>
+      </p:sp>
+      <p:sp>
+        <p:nvSpPr>
+          <p:cNvPr id="8" name="TextBox 7"/>
           <p:cNvSpPr txBox="1"/>
           <p:nvPr/>
         </p:nvSpPr>
         <p:spPr>
           <a:xfrm>
-            <a:off x="566928" y="658368"/>
-            <a:ext cx="10058400" cy="274320"/>
+            <a:off x="868680" y="5724144"/>
+            <a:ext cx="10424160" cy="365760"/>
           </a:xfrm>
           <a:prstGeom prst="rect">
             <a:avLst/>
@@ -4101,7 +4069,7 @@
           <a:noFill/>
         </p:spPr>
         <p:txBody>
-          <a:bodyPr wrap="square" lIns="0" rIns="0" tIns="0" bIns="0">
+          <a:bodyPr wrap="square" lIns="0" tIns="0" rIns="0" bIns="0">
             <a:spAutoFit/>
           </a:bodyPr>
           <a:lstStyle/>
@@ -4115,111 +4083,52 @@
               </a:spcAft>
             </a:pPr>
             <a:r>
-              <a:rPr sz="1200" b="1" i="0">
-                <a:solidFill>
-                  <a:srgbClr val="0F7773"/>
-                </a:solidFill>
-                <a:latin typeface="Calibri"/>
-              </a:rPr>
-              <a:t>CONCLUSION AND REMAINING WORK</a:t>
-            </a:r>
-          </a:p>
-        </p:txBody>
-      </p:sp>
-      <p:sp>
-        <p:nvSpPr>
-          <p:cNvPr id="4" name="TextBox 3"/>
-          <p:cNvSpPr txBox="1"/>
-          <p:nvPr/>
-        </p:nvSpPr>
-        <p:spPr>
-          <a:xfrm>
-            <a:off x="566928" y="987552"/>
-            <a:ext cx="11064240" cy="685800"/>
-          </a:xfrm>
-          <a:prstGeom prst="rect">
-            <a:avLst/>
-          </a:prstGeom>
-          <a:noFill/>
-        </p:spPr>
-        <p:txBody>
-          <a:bodyPr wrap="square" lIns="0" rIns="0" tIns="0" bIns="0">
-            <a:spAutoFit/>
-          </a:bodyPr>
-          <a:lstStyle/>
-          <a:p>
-            <a:pPr algn="l">
-              <a:lnSpc>
-                <a:spcPct val="115000"/>
-              </a:lnSpc>
-              <a:spcAft>
-                <a:spcPts val="0"/>
-              </a:spcAft>
-            </a:pPr>
-            <a:r>
-              <a:rPr sz="3000" b="1" i="0">
-                <a:solidFill>
-                  <a:srgbClr val="1B335F"/>
-                </a:solidFill>
-                <a:latin typeface="Calibri"/>
-              </a:rPr>
-              <a:t>What holds, what we are not claiming, and what is left</a:t>
-            </a:r>
-          </a:p>
-        </p:txBody>
-      </p:sp>
-      <p:sp>
-        <p:nvSpPr>
-          <p:cNvPr id="5" name="TextBox 4"/>
-          <p:cNvSpPr txBox="1"/>
-          <p:nvPr/>
-        </p:nvSpPr>
-        <p:spPr>
-          <a:xfrm>
-            <a:off x="11064240" y="6263640"/>
-            <a:ext cx="594360" cy="274320"/>
-          </a:xfrm>
-          <a:prstGeom prst="rect">
-            <a:avLst/>
-          </a:prstGeom>
-          <a:noFill/>
-        </p:spPr>
-        <p:txBody>
-          <a:bodyPr wrap="square" lIns="0" rIns="0" tIns="0" bIns="0">
-            <a:spAutoFit/>
-          </a:bodyPr>
-          <a:lstStyle/>
-          <a:p>
-            <a:pPr algn="r">
-              <a:lnSpc>
-                <a:spcPct val="115000"/>
-              </a:lnSpc>
-              <a:spcAft>
-                <a:spcPts val="0"/>
-              </a:spcAft>
-            </a:pPr>
-            <a:r>
-              <a:rPr sz="1100" b="0" i="0">
+              <a:rPr sz="1300" b="0" i="1">
                 <a:solidFill>
                   <a:srgbClr val="666B73"/>
                 </a:solidFill>
                 <a:latin typeface="Calibri"/>
               </a:rPr>
-              <a:t>11</a:t>
-            </a:r>
-          </a:p>
-        </p:txBody>
-      </p:sp>
-      <p:sp>
-        <p:nvSpPr>
-          <p:cNvPr id="6" name="Rectangle 5"/>
+              <a:t>The manuscript cites 47 references in full. Configuration constants, per-round outputs and verification artifacts are released with the code.</a:t>
+            </a:r>
+          </a:p>
+        </p:txBody>
+      </p:sp>
+    </p:spTree>
+  </p:cSld>
+  <p:clrMapOvr>
+    <a:masterClrMapping/>
+  </p:clrMapOvr>
+</p:sld>
+</file>
+
+<file path=ppt/slides/slide2.xml><?xml version="1.0" encoding="utf-8"?>
+<p:sld xmlns:a="http://schemas.openxmlformats.org/drawingml/2006/main" xmlns:r="http://schemas.openxmlformats.org/officeDocument/2006/relationships" xmlns:p="http://schemas.openxmlformats.org/presentationml/2006/main">
+  <p:cSld>
+    <p:spTree>
+      <p:nvGrpSpPr>
+        <p:cNvPr id="1" name=""/>
+        <p:cNvGrpSpPr/>
+        <p:nvPr/>
+      </p:nvGrpSpPr>
+      <p:grpSpPr>
+        <a:xfrm>
+          <a:off x="0" y="0"/>
+          <a:ext cx="0" cy="0"/>
+          <a:chOff x="0" y="0"/>
+          <a:chExt cx="0" cy="0"/>
+        </a:xfrm>
+      </p:grpSpPr>
+      <p:sp>
+        <p:nvSpPr>
+          <p:cNvPr id="2" name="Rectangle 1"/>
           <p:cNvSpPr/>
           <p:nvPr/>
         </p:nvSpPr>
         <p:spPr>
           <a:xfrm>
-            <a:off x="566928" y="1783080"/>
-            <a:ext cx="3529584" cy="45720"/>
+            <a:off x="566928" y="475488"/>
+            <a:ext cx="1051560" cy="50292"/>
           </a:xfrm>
           <a:prstGeom prst="rect">
             <a:avLst/>
@@ -4251,19 +4160,20 @@
           <a:lstStyle/>
           <a:p>
             <a:pPr algn="ctr"/>
-          </a:p>
-        </p:txBody>
-      </p:sp>
-      <p:sp>
-        <p:nvSpPr>
-          <p:cNvPr id="7" name="TextBox 6"/>
+            <a:endParaRPr/>
+          </a:p>
+        </p:txBody>
+      </p:sp>
+      <p:sp>
+        <p:nvSpPr>
+          <p:cNvPr id="3" name="TextBox 2"/>
           <p:cNvSpPr txBox="1"/>
           <p:nvPr/>
         </p:nvSpPr>
         <p:spPr>
           <a:xfrm>
-            <a:off x="566928" y="2011680"/>
-            <a:ext cx="3529584" cy="320040"/>
+            <a:off x="566928" y="658368"/>
+            <a:ext cx="10058400" cy="274320"/>
           </a:xfrm>
           <a:prstGeom prst="rect">
             <a:avLst/>
@@ -4271,7 +4181,7 @@
           <a:noFill/>
         </p:spPr>
         <p:txBody>
-          <a:bodyPr wrap="square" lIns="0" rIns="0" tIns="0" bIns="0">
+          <a:bodyPr wrap="square" lIns="0" tIns="0" rIns="0" bIns="0">
             <a:spAutoFit/>
           </a:bodyPr>
           <a:lstStyle/>
@@ -4285,27 +4195,27 @@
               </a:spcAft>
             </a:pPr>
             <a:r>
-              <a:rPr sz="1300" b="1" i="0">
+              <a:rPr sz="1200" b="1" i="0">
                 <a:solidFill>
                   <a:srgbClr val="0F7773"/>
                 </a:solidFill>
                 <a:latin typeface="Calibri"/>
               </a:rPr>
-              <a:t>WHAT HOLDS</a:t>
-            </a:r>
-          </a:p>
-        </p:txBody>
-      </p:sp>
-      <p:sp>
-        <p:nvSpPr>
-          <p:cNvPr id="8" name="TextBox 7"/>
+              <a:t>PROBLEM STATEMENT</a:t>
+            </a:r>
+          </a:p>
+        </p:txBody>
+      </p:sp>
+      <p:sp>
+        <p:nvSpPr>
+          <p:cNvPr id="4" name="TextBox 3"/>
           <p:cNvSpPr txBox="1"/>
           <p:nvPr/>
         </p:nvSpPr>
         <p:spPr>
           <a:xfrm>
-            <a:off x="566928" y="2514600"/>
-            <a:ext cx="3529584" cy="3200400"/>
+            <a:off x="566928" y="987552"/>
+            <a:ext cx="11064240" cy="685800"/>
           </a:xfrm>
           <a:prstGeom prst="rect">
             <a:avLst/>
@@ -4313,21 +4223,105 @@
           <a:noFill/>
         </p:spPr>
         <p:txBody>
-          <a:bodyPr wrap="square" lIns="0" rIns="0" tIns="0" bIns="0">
+          <a:bodyPr wrap="square" lIns="0" tIns="0" rIns="0" bIns="0">
             <a:spAutoFit/>
           </a:bodyPr>
           <a:lstStyle/>
           <a:p>
+            <a:pPr algn="l">
+              <a:lnSpc>
+                <a:spcPct val="115000"/>
+              </a:lnSpc>
+              <a:spcAft>
+                <a:spcPts val="0"/>
+              </a:spcAft>
+            </a:pPr>
+            <a:r>
+              <a:rPr sz="3000" b="1" i="0">
+                <a:solidFill>
+                  <a:srgbClr val="1B335F"/>
+                </a:solidFill>
+                <a:latin typeface="Calibri"/>
+              </a:rPr>
+              <a:t>The comparison everyone makes does not actually hold</a:t>
+            </a:r>
+          </a:p>
+        </p:txBody>
+      </p:sp>
+      <p:sp>
+        <p:nvSpPr>
+          <p:cNvPr id="5" name="TextBox 4"/>
+          <p:cNvSpPr txBox="1"/>
+          <p:nvPr/>
+        </p:nvSpPr>
+        <p:spPr>
+          <a:xfrm>
+            <a:off x="11064240" y="6263640"/>
+            <a:ext cx="594360" cy="274320"/>
+          </a:xfrm>
+          <a:prstGeom prst="rect">
+            <a:avLst/>
+          </a:prstGeom>
+          <a:noFill/>
+        </p:spPr>
+        <p:txBody>
+          <a:bodyPr wrap="square" lIns="0" tIns="0" rIns="0" bIns="0">
+            <a:spAutoFit/>
+          </a:bodyPr>
+          <a:lstStyle/>
+          <a:p>
+            <a:pPr algn="r">
+              <a:lnSpc>
+                <a:spcPct val="115000"/>
+              </a:lnSpc>
+              <a:spcAft>
+                <a:spcPts val="0"/>
+              </a:spcAft>
+            </a:pPr>
+            <a:r>
+              <a:rPr sz="1100" b="0" i="0">
+                <a:solidFill>
+                  <a:srgbClr val="666B73"/>
+                </a:solidFill>
+                <a:latin typeface="Calibri"/>
+              </a:rPr>
+              <a:t>2</a:t>
+            </a:r>
+          </a:p>
+        </p:txBody>
+      </p:sp>
+      <p:sp>
+        <p:nvSpPr>
+          <p:cNvPr id="6" name="TextBox 5"/>
+          <p:cNvSpPr txBox="1"/>
+          <p:nvPr/>
+        </p:nvSpPr>
+        <p:spPr>
+          <a:xfrm>
+            <a:off x="566928" y="1828800"/>
+            <a:ext cx="6583680" cy="3840480"/>
+          </a:xfrm>
+          <a:prstGeom prst="rect">
+            <a:avLst/>
+          </a:prstGeom>
+          <a:noFill/>
+        </p:spPr>
+        <p:txBody>
+          <a:bodyPr wrap="square" lIns="0" tIns="0" rIns="0" bIns="0">
+            <a:spAutoFit/>
+          </a:bodyPr>
+          <a:lstStyle/>
+          <a:p>
             <a:pPr>
               <a:lnSpc>
                 <a:spcPct val="118000"/>
               </a:lnSpc>
               <a:spcAft>
-                <a:spcPts val="1100"/>
-              </a:spcAft>
-            </a:pPr>
-            <a:r>
-              <a:rPr sz="1400">
+                <a:spcPts val="1300"/>
+              </a:spcAft>
+            </a:pPr>
+            <a:r>
+              <a:rPr sz="1600">
                 <a:solidFill>
                   <a:srgbClr val="0F7773"/>
                 </a:solidFill>
@@ -4336,13 +4330,22 @@
               <a:t>▪  </a:t>
             </a:r>
             <a:r>
-              <a:rPr sz="1400">
+              <a:rPr sz="1600" b="1">
+                <a:solidFill>
+                  <a:srgbClr val="1B335F"/>
+                </a:solidFill>
+                <a:latin typeface="Calibri"/>
+              </a:rPr>
+              <a:t>Twenty-five years of protocols, three generations. </a:t>
+            </a:r>
+            <a:r>
+              <a:rPr sz="1600">
                 <a:solidFill>
                   <a:srgbClr val="2B2B2B"/>
                 </a:solidFill>
                 <a:latin typeface="Calibri"/>
               </a:rPr>
-              <a:t>Fairness is structural: the engine owns energy, the protocol returns only a cluster structure</a:t>
+              <a:t>Heuristics, then explicit optimization, then learned selection.</a:t>
             </a:r>
           </a:p>
           <a:p>
@@ -4351,11 +4354,11 @@
                 <a:spcPct val="118000"/>
               </a:lnSpc>
               <a:spcAft>
-                <a:spcPts val="1100"/>
-              </a:spcAft>
-            </a:pPr>
-            <a:r>
-              <a:rPr sz="1400">
+                <a:spcPts val="1300"/>
+              </a:spcAft>
+            </a:pPr>
+            <a:r>
+              <a:rPr sz="1600">
                 <a:solidFill>
                   <a:srgbClr val="0F7773"/>
                 </a:solidFill>
@@ -4364,13 +4367,22 @@
               <a:t>▪  </a:t>
             </a:r>
             <a:r>
-              <a:rPr sz="1400">
+              <a:rPr sz="1600" b="1">
+                <a:solidFill>
+                  <a:srgbClr val="1B335F"/>
+                </a:solidFill>
+                <a:latin typeface="Calibri"/>
+              </a:rPr>
+              <a:t>Each was measured on its own simulator. </a:t>
+            </a:r>
+            <a:r>
+              <a:rPr sz="1600">
                 <a:solidFill>
                   <a:srgbClr val="2B2B2B"/>
                 </a:solidFill>
                 <a:latin typeface="Calibri"/>
               </a:rPr>
-              <a:t>Every conclusion is tested paired, corrected across the family</a:t>
+              <a:t>Field size, node count, packet length, energy budget and channel all differ between papers.</a:t>
             </a:r>
           </a:p>
           <a:p>
@@ -4379,11 +4391,11 @@
                 <a:spcPct val="118000"/>
               </a:lnSpc>
               <a:spcAft>
-                <a:spcPts val="1100"/>
-              </a:spcAft>
-            </a:pPr>
-            <a:r>
-              <a:rPr sz="1400">
+                <a:spcPts val="1300"/>
+              </a:spcAft>
+            </a:pPr>
+            <a:r>
+              <a:rPr sz="1600">
                 <a:solidFill>
                   <a:srgbClr val="0F7773"/>
                 </a:solidFill>
@@ -4392,36 +4404,121 @@
               <a:t>▪  </a:t>
             </a:r>
             <a:r>
-              <a:rPr sz="1400">
+              <a:rPr sz="1600" b="1">
+                <a:solidFill>
+                  <a:srgbClr val="1B335F"/>
+                </a:solidFill>
+                <a:latin typeface="Calibri"/>
+              </a:rPr>
+              <a:t>Almost always against LEACH alone, </a:t>
+            </a:r>
+            <a:r>
+              <a:rPr sz="1600">
                 <a:solidFill>
                   <a:srgbClr val="2B2B2B"/>
                 </a:solidFill>
                 <a:latin typeface="Calibri"/>
               </a:rPr>
-              <a:t>The channel retraction and the DQN/GCN contrast are both within-class, so the accounting subsidy does not touch them</a:t>
-            </a:r>
-          </a:p>
-        </p:txBody>
-      </p:sp>
-      <p:sp>
-        <p:nvSpPr>
-          <p:cNvPr id="9" name="Rectangle 8"/>
+              <a:t>and almost always on a channel with no packet loss.</a:t>
+            </a:r>
+          </a:p>
+          <a:p>
+            <a:pPr>
+              <a:lnSpc>
+                <a:spcPct val="118000"/>
+              </a:lnSpc>
+              <a:spcAft>
+                <a:spcPts val="1300"/>
+              </a:spcAft>
+            </a:pPr>
+            <a:r>
+              <a:rPr sz="1600">
+                <a:solidFill>
+                  <a:srgbClr val="0F7773"/>
+                </a:solidFill>
+                <a:latin typeface="Calibri"/>
+              </a:rPr>
+              <a:t>▪  </a:t>
+            </a:r>
+            <a:r>
+              <a:rPr sz="1600" b="1">
+                <a:solidFill>
+                  <a:srgbClr val="1B335F"/>
+                </a:solidFill>
+                <a:latin typeface="Calibri"/>
+              </a:rPr>
+              <a:t>The assumptions that decide the winner go unstated. </a:t>
+            </a:r>
+            <a:r>
+              <a:rPr sz="1600">
+                <a:solidFill>
+                  <a:srgbClr val="2B2B2B"/>
+                </a:solidFill>
+                <a:latin typeface="Calibri"/>
+              </a:rPr>
+              <a:t>Whether a centralized protocol pays for its uplink is worth a quarter of the entire energy budget.</a:t>
+            </a:r>
+          </a:p>
+          <a:p>
+            <a:pPr>
+              <a:lnSpc>
+                <a:spcPct val="118000"/>
+              </a:lnSpc>
+              <a:spcAft>
+                <a:spcPts val="1300"/>
+              </a:spcAft>
+            </a:pPr>
+            <a:r>
+              <a:rPr sz="1600">
+                <a:solidFill>
+                  <a:srgbClr val="0F7773"/>
+                </a:solidFill>
+                <a:latin typeface="Calibri"/>
+              </a:rPr>
+              <a:t>▪  </a:t>
+            </a:r>
+            <a:r>
+              <a:rPr sz="1600" b="1">
+                <a:solidFill>
+                  <a:srgbClr val="1B335F"/>
+                </a:solidFill>
+                <a:latin typeface="Calibri"/>
+              </a:rPr>
+              <a:t>Which death point you report can reverse a ranking, </a:t>
+            </a:r>
+            <a:r>
+              <a:rPr sz="1600">
+                <a:solidFill>
+                  <a:srgbClr val="2B2B2B"/>
+                </a:solidFill>
+                <a:latin typeface="Calibri"/>
+              </a:rPr>
+              <a:t>and the author picks which one to publish.</a:t>
+            </a:r>
+          </a:p>
+        </p:txBody>
+      </p:sp>
+      <p:sp>
+        <p:nvSpPr>
+          <p:cNvPr id="7" name="Rectangle 6"/>
           <p:cNvSpPr/>
           <p:nvPr/>
         </p:nvSpPr>
         <p:spPr>
           <a:xfrm>
-            <a:off x="4343400" y="1783080"/>
-            <a:ext cx="3529584" cy="45720"/>
+            <a:off x="7452360" y="1828800"/>
+            <a:ext cx="4160520" cy="2880360"/>
           </a:xfrm>
           <a:prstGeom prst="rect">
             <a:avLst/>
           </a:prstGeom>
           <a:solidFill>
-            <a:srgbClr val="A83A1E"/>
+            <a:srgbClr val="F4F6F8"/>
           </a:solidFill>
-          <a:ln>
-            <a:noFill/>
+          <a:ln w="9525">
+            <a:solidFill>
+              <a:srgbClr val="D8DDE3"/>
+            </a:solidFill>
           </a:ln>
           <a:effectLst/>
         </p:spPr>
@@ -4444,19 +4541,20 @@
           <a:lstStyle/>
           <a:p>
             <a:pPr algn="ctr"/>
-          </a:p>
-        </p:txBody>
-      </p:sp>
-      <p:sp>
-        <p:nvSpPr>
-          <p:cNvPr id="10" name="TextBox 9"/>
+            <a:endParaRPr/>
+          </a:p>
+        </p:txBody>
+      </p:sp>
+      <p:sp>
+        <p:nvSpPr>
+          <p:cNvPr id="8" name="TextBox 7"/>
           <p:cNvSpPr txBox="1"/>
           <p:nvPr/>
         </p:nvSpPr>
         <p:spPr>
           <a:xfrm>
-            <a:off x="4343400" y="2011680"/>
-            <a:ext cx="3529584" cy="320040"/>
+            <a:off x="7726679" y="2103120"/>
+            <a:ext cx="3611880" cy="2377440"/>
           </a:xfrm>
           <a:prstGeom prst="rect">
             <a:avLst/>
@@ -4464,7 +4562,7 @@
           <a:noFill/>
         </p:spPr>
         <p:txBody>
-          <a:bodyPr wrap="square" lIns="0" rIns="0" tIns="0" bIns="0">
+          <a:bodyPr wrap="square" lIns="0" tIns="0" rIns="0" bIns="0">
             <a:spAutoFit/>
           </a:bodyPr>
           <a:lstStyle/>
@@ -4474,31 +4572,69 @@
                 <a:spcPct val="115000"/>
               </a:lnSpc>
               <a:spcAft>
+                <a:spcPts val="1000"/>
+              </a:spcAft>
+            </a:pPr>
+            <a:r>
+              <a:rPr sz="1300" b="1" i="0">
+                <a:solidFill>
+                  <a:srgbClr val="0F7773"/>
+                </a:solidFill>
+                <a:latin typeface="Calibri"/>
+              </a:rPr>
+              <a:t>So the question we ask</a:t>
+            </a:r>
+          </a:p>
+          <a:p>
+            <a:pPr algn="l">
+              <a:lnSpc>
+                <a:spcPct val="120000"/>
+              </a:lnSpc>
+              <a:spcAft>
+                <a:spcPts val="1000"/>
+              </a:spcAft>
+            </a:pPr>
+            <a:r>
+              <a:rPr sz="1600" b="0" i="0">
+                <a:solidFill>
+                  <a:srgbClr val="2B2B2B"/>
+                </a:solidFill>
+                <a:latin typeface="Calibri"/>
+              </a:rPr>
+              <a:t>When a paper reports a margin over LEACH, is that evidence about the algorithm, or evidence about the harness it was measured in?</a:t>
+            </a:r>
+          </a:p>
+          <a:p>
+            <a:pPr algn="l">
+              <a:lnSpc>
+                <a:spcPct val="120000"/>
+              </a:lnSpc>
+              <a:spcAft>
                 <a:spcPts val="0"/>
               </a:spcAft>
             </a:pPr>
             <a:r>
-              <a:rPr sz="1300" b="1" i="0">
+              <a:rPr sz="1600" b="1" i="0">
                 <a:solidFill>
                   <a:srgbClr val="A83A1E"/>
                 </a:solidFill>
                 <a:latin typeface="Calibri"/>
               </a:rPr>
-              <a:t>WHAT WE ARE NOT CLAIMING</a:t>
-            </a:r>
-          </a:p>
-        </p:txBody>
-      </p:sp>
-      <p:sp>
-        <p:nvSpPr>
-          <p:cNvPr id="11" name="TextBox 10"/>
+              <a:t>Right now there is no way to tell them apart.</a:t>
+            </a:r>
+          </a:p>
+        </p:txBody>
+      </p:sp>
+      <p:sp>
+        <p:nvSpPr>
+          <p:cNvPr id="9" name="TextBox 8"/>
           <p:cNvSpPr txBox="1"/>
           <p:nvPr/>
         </p:nvSpPr>
         <p:spPr>
           <a:xfrm>
-            <a:off x="4343400" y="2514600"/>
-            <a:ext cx="3529584" cy="3200400"/>
+            <a:off x="566928" y="5715000"/>
+            <a:ext cx="11064240" cy="640080"/>
           </a:xfrm>
           <a:prstGeom prst="rect">
             <a:avLst/>
@@ -4506,112 +4642,72 @@
           <a:noFill/>
         </p:spPr>
         <p:txBody>
-          <a:bodyPr wrap="square" lIns="0" rIns="0" tIns="0" bIns="0">
+          <a:bodyPr wrap="square" lIns="0" tIns="0" rIns="0" bIns="0">
             <a:spAutoFit/>
           </a:bodyPr>
           <a:lstStyle/>
           <a:p>
-            <a:pPr>
-              <a:lnSpc>
-                <a:spcPct val="118000"/>
-              </a:lnSpc>
-              <a:spcAft>
-                <a:spcPts val="1100"/>
-              </a:spcAft>
-            </a:pPr>
-            <a:r>
-              <a:rPr sz="1400">
-                <a:solidFill>
-                  <a:srgbClr val="A83A1E"/>
-                </a:solidFill>
-                <a:latin typeface="Calibri"/>
-              </a:rPr>
-              <a:t>▪  </a:t>
-            </a:r>
-            <a:r>
-              <a:rPr sz="1400">
-                <a:solidFill>
-                  <a:srgbClr val="2B2B2B"/>
-                </a:solidFill>
-                <a:latin typeface="Calibri"/>
-              </a:rPr>
-              <a:t>Centralized protocols are not charged for their uplink. That is worth 9 to 10 points of the energy budget</a:t>
-            </a:r>
-          </a:p>
-          <a:p>
-            <a:pPr>
-              <a:lnSpc>
-                <a:spcPct val="118000"/>
-              </a:lnSpc>
-              <a:spcAft>
-                <a:spcPts val="1100"/>
-              </a:spcAft>
-            </a:pPr>
-            <a:r>
-              <a:rPr sz="1400">
-                <a:solidFill>
-                  <a:srgbClr val="A83A1E"/>
-                </a:solidFill>
-                <a:latin typeface="Calibri"/>
-              </a:rPr>
-              <a:t>▪  </a:t>
-            </a:r>
-            <a:r>
-              <a:rPr sz="1400">
-                <a:solidFill>
-                  <a:srgbClr val="2B2B2B"/>
-                </a:solidFill>
-                <a:latin typeface="Calibri"/>
-              </a:rPr>
-              <a:t>Transmit power is bracketed at two endpoints, not swept</a:t>
-            </a:r>
-          </a:p>
-          <a:p>
-            <a:pPr>
-              <a:lnSpc>
-                <a:spcPct val="118000"/>
-              </a:lnSpc>
-              <a:spcAft>
-                <a:spcPts val="1100"/>
-              </a:spcAft>
-            </a:pPr>
-            <a:r>
-              <a:rPr sz="1400">
-                <a:solidFill>
-                  <a:srgbClr val="A83A1E"/>
-                </a:solidFill>
-                <a:latin typeface="Calibri"/>
-              </a:rPr>
-              <a:t>▪  </a:t>
-            </a:r>
-            <a:r>
-              <a:rPr sz="1400">
-                <a:solidFill>
-                  <a:srgbClr val="2B2B2B"/>
-                </a:solidFill>
-                <a:latin typeface="Calibri"/>
-              </a:rPr>
-              <a:t>No MAC layer, no idle listening, no mobility, no hardware testbed</a:t>
-            </a:r>
-          </a:p>
-        </p:txBody>
-      </p:sp>
-      <p:sp>
-        <p:nvSpPr>
-          <p:cNvPr id="12" name="Rectangle 11"/>
+            <a:pPr algn="l">
+              <a:lnSpc>
+                <a:spcPct val="115000"/>
+              </a:lnSpc>
+              <a:spcAft>
+                <a:spcPts val="0"/>
+              </a:spcAft>
+            </a:pPr>
+            <a:r>
+              <a:rPr sz="1600" b="1" i="0">
+                <a:solidFill>
+                  <a:srgbClr val="1B335F"/>
+                </a:solidFill>
+                <a:latin typeface="Calibri"/>
+              </a:rPr>
+              <a:t>Aim:  build one benchmark in which all three generations run under provably identical physical conditions, with every modeling choice disclosed.</a:t>
+            </a:r>
+          </a:p>
+        </p:txBody>
+      </p:sp>
+    </p:spTree>
+  </p:cSld>
+  <p:clrMapOvr>
+    <a:masterClrMapping/>
+  </p:clrMapOvr>
+</p:sld>
+</file>
+
+<file path=ppt/slides/slide3.xml><?xml version="1.0" encoding="utf-8"?>
+<p:sld xmlns:a="http://schemas.openxmlformats.org/drawingml/2006/main" xmlns:r="http://schemas.openxmlformats.org/officeDocument/2006/relationships" xmlns:p="http://schemas.openxmlformats.org/presentationml/2006/main">
+  <p:cSld>
+    <p:spTree>
+      <p:nvGrpSpPr>
+        <p:cNvPr id="1" name=""/>
+        <p:cNvGrpSpPr/>
+        <p:nvPr/>
+      </p:nvGrpSpPr>
+      <p:grpSpPr>
+        <a:xfrm>
+          <a:off x="0" y="0"/>
+          <a:ext cx="0" cy="0"/>
+          <a:chOff x="0" y="0"/>
+          <a:chExt cx="0" cy="0"/>
+        </a:xfrm>
+      </p:grpSpPr>
+      <p:sp>
+        <p:nvSpPr>
+          <p:cNvPr id="2" name="Rectangle 1"/>
           <p:cNvSpPr/>
           <p:nvPr/>
         </p:nvSpPr>
         <p:spPr>
           <a:xfrm>
-            <a:off x="8119871" y="1783080"/>
-            <a:ext cx="3529584" cy="45720"/>
+            <a:off x="566928" y="475488"/>
+            <a:ext cx="1051560" cy="50292"/>
           </a:xfrm>
           <a:prstGeom prst="rect">
             <a:avLst/>
           </a:prstGeom>
           <a:solidFill>
-            <a:srgbClr val="1B335F"/>
+            <a:srgbClr val="0F7773"/>
           </a:solidFill>
           <a:ln>
             <a:noFill/>
@@ -4637,19 +4733,20 @@
           <a:lstStyle/>
           <a:p>
             <a:pPr algn="ctr"/>
-          </a:p>
-        </p:txBody>
-      </p:sp>
-      <p:sp>
-        <p:nvSpPr>
-          <p:cNvPr id="13" name="TextBox 12"/>
+            <a:endParaRPr/>
+          </a:p>
+        </p:txBody>
+      </p:sp>
+      <p:sp>
+        <p:nvSpPr>
+          <p:cNvPr id="3" name="TextBox 2"/>
           <p:cNvSpPr txBox="1"/>
           <p:nvPr/>
         </p:nvSpPr>
         <p:spPr>
           <a:xfrm>
-            <a:off x="8119871" y="2011680"/>
-            <a:ext cx="3529584" cy="320040"/>
+            <a:off x="566928" y="658368"/>
+            <a:ext cx="10058400" cy="274320"/>
           </a:xfrm>
           <a:prstGeom prst="rect">
             <a:avLst/>
@@ -4657,7 +4754,7 @@
           <a:noFill/>
         </p:spPr>
         <p:txBody>
-          <a:bodyPr wrap="square" lIns="0" rIns="0" tIns="0" bIns="0">
+          <a:bodyPr wrap="square" lIns="0" tIns="0" rIns="0" bIns="0">
             <a:spAutoFit/>
           </a:bodyPr>
           <a:lstStyle/>
@@ -4671,27 +4768,27 @@
               </a:spcAft>
             </a:pPr>
             <a:r>
-              <a:rPr sz="1300" b="1" i="0">
-                <a:solidFill>
-                  <a:srgbClr val="1B335F"/>
-                </a:solidFill>
-                <a:latin typeface="Calibri"/>
-              </a:rPr>
-              <a:t>WHAT REMAINS</a:t>
-            </a:r>
-          </a:p>
-        </p:txBody>
-      </p:sp>
-      <p:sp>
-        <p:nvSpPr>
-          <p:cNvPr id="14" name="TextBox 13"/>
+              <a:rPr sz="1200" b="1" i="0">
+                <a:solidFill>
+                  <a:srgbClr val="0F7773"/>
+                </a:solidFill>
+                <a:latin typeface="Calibri"/>
+              </a:rPr>
+              <a:t>ABSTRACT</a:t>
+            </a:r>
+          </a:p>
+        </p:txBody>
+      </p:sp>
+      <p:sp>
+        <p:nvSpPr>
+          <p:cNvPr id="4" name="TextBox 3"/>
           <p:cNvSpPr txBox="1"/>
           <p:nvPr/>
         </p:nvSpPr>
         <p:spPr>
           <a:xfrm>
-            <a:off x="8119871" y="2514600"/>
-            <a:ext cx="3529584" cy="3200400"/>
+            <a:off x="566928" y="987552"/>
+            <a:ext cx="11064240" cy="685800"/>
           </a:xfrm>
           <a:prstGeom prst="rect">
             <a:avLst/>
@@ -4699,36 +4796,166 @@
           <a:noFill/>
         </p:spPr>
         <p:txBody>
-          <a:bodyPr wrap="square" lIns="0" rIns="0" tIns="0" bIns="0">
+          <a:bodyPr wrap="square" lIns="0" tIns="0" rIns="0" bIns="0">
             <a:spAutoFit/>
           </a:bodyPr>
           <a:lstStyle/>
           <a:p>
+            <a:pPr algn="l">
+              <a:lnSpc>
+                <a:spcPct val="115000"/>
+              </a:lnSpc>
+              <a:spcAft>
+                <a:spcPts val="0"/>
+              </a:spcAft>
+            </a:pPr>
+            <a:r>
+              <a:rPr sz="3000" b="1" i="0">
+                <a:solidFill>
+                  <a:srgbClr val="1B335F"/>
+                </a:solidFill>
+                <a:latin typeface="Calibri"/>
+              </a:rPr>
+              <a:t>What we built and what it found</a:t>
+            </a:r>
+          </a:p>
+        </p:txBody>
+      </p:sp>
+      <p:sp>
+        <p:nvSpPr>
+          <p:cNvPr id="5" name="TextBox 4"/>
+          <p:cNvSpPr txBox="1"/>
+          <p:nvPr/>
+        </p:nvSpPr>
+        <p:spPr>
+          <a:xfrm>
+            <a:off x="11064240" y="6263640"/>
+            <a:ext cx="594360" cy="274320"/>
+          </a:xfrm>
+          <a:prstGeom prst="rect">
+            <a:avLst/>
+          </a:prstGeom>
+          <a:noFill/>
+        </p:spPr>
+        <p:txBody>
+          <a:bodyPr wrap="square" lIns="0" tIns="0" rIns="0" bIns="0">
+            <a:spAutoFit/>
+          </a:bodyPr>
+          <a:lstStyle/>
+          <a:p>
+            <a:pPr algn="r">
+              <a:lnSpc>
+                <a:spcPct val="115000"/>
+              </a:lnSpc>
+              <a:spcAft>
+                <a:spcPts val="0"/>
+              </a:spcAft>
+            </a:pPr>
+            <a:r>
+              <a:rPr sz="1100" b="0" i="0">
+                <a:solidFill>
+                  <a:srgbClr val="666B73"/>
+                </a:solidFill>
+                <a:latin typeface="Calibri"/>
+              </a:rPr>
+              <a:t>3</a:t>
+            </a:r>
+          </a:p>
+        </p:txBody>
+      </p:sp>
+      <p:sp>
+        <p:nvSpPr>
+          <p:cNvPr id="6" name="TextBox 5"/>
+          <p:cNvSpPr txBox="1"/>
+          <p:nvPr/>
+        </p:nvSpPr>
+        <p:spPr>
+          <a:xfrm>
+            <a:off x="566928" y="1783080"/>
+            <a:ext cx="11064240" cy="4206240"/>
+          </a:xfrm>
+          <a:prstGeom prst="rect">
+            <a:avLst/>
+          </a:prstGeom>
+          <a:noFill/>
+        </p:spPr>
+        <p:txBody>
+          <a:bodyPr wrap="square" lIns="0" tIns="0" rIns="0" bIns="0">
+            <a:spAutoFit/>
+          </a:bodyPr>
+          <a:lstStyle/>
+          <a:p>
             <a:pPr>
               <a:lnSpc>
                 <a:spcPct val="118000"/>
               </a:lnSpc>
               <a:spcAft>
-                <a:spcPts val="1100"/>
-              </a:spcAft>
-            </a:pPr>
-            <a:r>
-              <a:rPr sz="1400">
+                <a:spcPts val="1500"/>
+              </a:spcAft>
+            </a:pPr>
+            <a:r>
+              <a:rPr sz="1600">
+                <a:solidFill>
+                  <a:srgbClr val="0F7773"/>
+                </a:solidFill>
+                <a:latin typeface="Calibri"/>
+              </a:rPr>
+              <a:t>▪  </a:t>
+            </a:r>
+            <a:r>
+              <a:rPr sz="1600" b="1">
                 <a:solidFill>
                   <a:srgbClr val="1B335F"/>
                 </a:solidFill>
                 <a:latin typeface="Calibri"/>
               </a:rPr>
+              <a:t>Nine clustering protocols plus a no-clustering baseline </a:t>
+            </a:r>
+            <a:r>
+              <a:rPr sz="1600">
+                <a:solidFill>
+                  <a:srgbClr val="2B2B2B"/>
+                </a:solidFill>
+                <a:latin typeface="Calibri"/>
+              </a:rPr>
+              <a:t>run on a single engine that owns energy accounting, packet sizing, fusion, the channel and the counting of delivered readings. A protocol returns only a cluster structure.</a:t>
+            </a:r>
+          </a:p>
+          <a:p>
+            <a:pPr>
+              <a:lnSpc>
+                <a:spcPct val="118000"/>
+              </a:lnSpc>
+              <a:spcAft>
+                <a:spcPts val="1500"/>
+              </a:spcAft>
+            </a:pPr>
+            <a:r>
+              <a:rPr sz="1600">
+                <a:solidFill>
+                  <a:srgbClr val="0F7773"/>
+                </a:solidFill>
+                <a:latin typeface="Calibri"/>
+              </a:rPr>
               <a:t>▪  </a:t>
             </a:r>
             <a:r>
-              <a:rPr sz="1400">
+              <a:rPr sz="1600" b="1">
+                <a:solidFill>
+                  <a:srgbClr val="1B335F"/>
+                </a:solidFill>
+                <a:latin typeface="Calibri"/>
+              </a:rPr>
+              <a:t>Trials are paired. </a:t>
+            </a:r>
+            <a:r>
+              <a:rPr sz="1600">
                 <a:solidFill>
                   <a:srgbClr val="2B2B2B"/>
                 </a:solidFill>
                 <a:latin typeface="Calibri"/>
               </a:rPr>
-              <a:t>The control-traffic ablation, which converts our largest confound into a measurement</a:t>
+              <a:t>At a given run index every protocol sees the same topology, the same per-link shadowing and the same sensor readings, so differences are tested with sign-flip permutation, paired bootstrap intervals and Holm correction.</a:t>
             </a:r>
           </a:p>
           <a:p>
@@ -4737,26 +4964,72 @@
                 <a:spcPct val="118000"/>
               </a:lnSpc>
               <a:spcAft>
-                <a:spcPts val="1100"/>
-              </a:spcAft>
-            </a:pPr>
-            <a:r>
-              <a:rPr sz="1400">
+                <a:spcPts val="1500"/>
+              </a:spcAft>
+            </a:pPr>
+            <a:r>
+              <a:rPr sz="1600">
+                <a:solidFill>
+                  <a:srgbClr val="0F7773"/>
+                </a:solidFill>
+                <a:latin typeface="Calibri"/>
+              </a:rPr>
+              <a:t>▪  </a:t>
+            </a:r>
+            <a:r>
+              <a:rPr sz="1600" b="1">
                 <a:solidFill>
                   <a:srgbClr val="1B335F"/>
                 </a:solidFill>
                 <a:latin typeface="Calibri"/>
               </a:rPr>
+              <a:t>1,950 runs in total: </a:t>
+            </a:r>
+            <a:r>
+              <a:rPr sz="1600">
+                <a:solidFill>
+                  <a:srgbClr val="2B2B2B"/>
+                </a:solidFill>
+                <a:latin typeface="Calibri"/>
+              </a:rPr>
+              <a:t>600 across two channel configurations, and 1,350 across a grid of three node counts by three field areas.</a:t>
+            </a:r>
+          </a:p>
+          <a:p>
+            <a:pPr>
+              <a:lnSpc>
+                <a:spcPct val="118000"/>
+              </a:lnSpc>
+              <a:spcAft>
+                <a:spcPts val="1500"/>
+              </a:spcAft>
+            </a:pPr>
+            <a:r>
+              <a:rPr sz="1600">
+                <a:solidFill>
+                  <a:srgbClr val="0F7773"/>
+                </a:solidFill>
+                <a:latin typeface="Calibri"/>
+              </a:rPr>
               <a:t>▪  </a:t>
             </a:r>
             <a:r>
-              <a:rPr sz="1400">
+              <a:rPr sz="1600" b="1">
+                <a:solidFill>
+                  <a:srgbClr val="1B335F"/>
+                </a:solidFill>
+                <a:latin typeface="Calibri"/>
+              </a:rPr>
+              <a:t>Bracketing transmit power retracts one of our own comparisons. </a:t>
+            </a:r>
+            <a:r>
+              <a:rPr sz="1600">
                 <a:solidFill>
                   <a:srgbClr val="2B2B2B"/>
                 </a:solidFill>
                 <a:latin typeface="Calibri"/>
               </a:rPr>
-              <a:t>A three-point or four-point transmit-power sweep</a:t>
+              <a:t>The fuzzy and deep Q-network advantage over LEACH is +417 and +426 rounds with packet loss, and falls to +17 and +22 rounds, no longer significant, once loss is removed.</a:t>
             </a:r>
           </a:p>
           <a:p>
@@ -4765,51 +5038,83 @@
                 <a:spcPct val="118000"/>
               </a:lnSpc>
               <a:spcAft>
-                <a:spcPts val="1100"/>
-              </a:spcAft>
-            </a:pPr>
-            <a:r>
-              <a:rPr sz="1400">
+                <a:spcPts val="1500"/>
+              </a:spcAft>
+            </a:pPr>
+            <a:r>
+              <a:rPr sz="1600">
+                <a:solidFill>
+                  <a:srgbClr val="0F7773"/>
+                </a:solidFill>
+                <a:latin typeface="Calibri"/>
+              </a:rPr>
+              <a:t>▪  </a:t>
+            </a:r>
+            <a:r>
+              <a:rPr sz="1600" b="1">
                 <a:solidFill>
                   <a:srgbClr val="1B335F"/>
                 </a:solidFill>
                 <a:latin typeface="Calibri"/>
               </a:rPr>
-              <a:t>▪  </a:t>
-            </a:r>
-            <a:r>
-              <a:rPr sz="1400">
+              <a:t>The scale sweep finds the same boundary from the other side. </a:t>
+            </a:r>
+            <a:r>
+              <a:rPr sz="1600">
                 <a:solidFill>
                   <a:srgbClr val="2B2B2B"/>
                 </a:solidFill>
                 <a:latin typeface="Calibri"/>
               </a:rPr>
-              <a:t>Paper submission: draft complete at 13 pages, figures and tables generated from the data</a:t>
-            </a:r>
-          </a:p>
-        </p:txBody>
-      </p:sp>
-      <p:sp>
-        <p:nvSpPr>
-          <p:cNvPr id="15" name="Rectangle 14"/>
+              <a:t>Distance to the sink sets the regime, not node density, and in a 50 x 50 m field clustering is worse than no clustering at all.</a:t>
+            </a:r>
+          </a:p>
+        </p:txBody>
+      </p:sp>
+    </p:spTree>
+  </p:cSld>
+  <p:clrMapOvr>
+    <a:masterClrMapping/>
+  </p:clrMapOvr>
+</p:sld>
+</file>
+
+<file path=ppt/slides/slide4.xml><?xml version="1.0" encoding="utf-8"?>
+<p:sld xmlns:a="http://schemas.openxmlformats.org/drawingml/2006/main" xmlns:r="http://schemas.openxmlformats.org/officeDocument/2006/relationships" xmlns:p="http://schemas.openxmlformats.org/presentationml/2006/main">
+  <p:cSld>
+    <p:spTree>
+      <p:nvGrpSpPr>
+        <p:cNvPr id="1" name=""/>
+        <p:cNvGrpSpPr/>
+        <p:nvPr/>
+      </p:nvGrpSpPr>
+      <p:grpSpPr>
+        <a:xfrm>
+          <a:off x="0" y="0"/>
+          <a:ext cx="0" cy="0"/>
+          <a:chOff x="0" y="0"/>
+          <a:chExt cx="0" cy="0"/>
+        </a:xfrm>
+      </p:grpSpPr>
+      <p:sp>
+        <p:nvSpPr>
+          <p:cNvPr id="2" name="Rectangle 1"/>
           <p:cNvSpPr/>
           <p:nvPr/>
         </p:nvSpPr>
         <p:spPr>
           <a:xfrm>
-            <a:off x="566928" y="5577840"/>
-            <a:ext cx="11064240" cy="685800"/>
+            <a:off x="566928" y="475488"/>
+            <a:ext cx="1051560" cy="50292"/>
           </a:xfrm>
           <a:prstGeom prst="rect">
             <a:avLst/>
           </a:prstGeom>
           <a:solidFill>
-            <a:srgbClr val="F4F6F8"/>
+            <a:srgbClr val="0F7773"/>
           </a:solidFill>
-          <a:ln w="9525">
-            <a:solidFill>
-              <a:srgbClr val="D8DDE3"/>
-            </a:solidFill>
+          <a:ln>
+            <a:noFill/>
           </a:ln>
           <a:effectLst/>
         </p:spPr>
@@ -4832,19 +5137,20 @@
           <a:lstStyle/>
           <a:p>
             <a:pPr algn="ctr"/>
-          </a:p>
-        </p:txBody>
-      </p:sp>
-      <p:sp>
-        <p:nvSpPr>
-          <p:cNvPr id="16" name="TextBox 15"/>
+            <a:endParaRPr/>
+          </a:p>
+        </p:txBody>
+      </p:sp>
+      <p:sp>
+        <p:nvSpPr>
+          <p:cNvPr id="3" name="TextBox 2"/>
           <p:cNvSpPr txBox="1"/>
           <p:nvPr/>
         </p:nvSpPr>
         <p:spPr>
           <a:xfrm>
-            <a:off x="868680" y="5760720"/>
-            <a:ext cx="10515600" cy="457200"/>
+            <a:off x="566928" y="658368"/>
+            <a:ext cx="10058400" cy="274320"/>
           </a:xfrm>
           <a:prstGeom prst="rect">
             <a:avLst/>
@@ -4852,7 +5158,7 @@
           <a:noFill/>
         </p:spPr>
         <p:txBody>
-          <a:bodyPr wrap="square" lIns="0" rIns="0" tIns="0" bIns="0">
+          <a:bodyPr wrap="square" lIns="0" tIns="0" rIns="0" bIns="0">
             <a:spAutoFit/>
           </a:bodyPr>
           <a:lstStyle/>
@@ -4866,45 +5172,111 @@
               </a:spcAft>
             </a:pPr>
             <a:r>
-              <a:rPr sz="1400" b="1" i="0">
+              <a:rPr sz="1200" b="1" i="0">
+                <a:solidFill>
+                  <a:srgbClr val="0F7773"/>
+                </a:solidFill>
+                <a:latin typeface="Calibri"/>
+              </a:rPr>
+              <a:t>INTRODUCTION</a:t>
+            </a:r>
+          </a:p>
+        </p:txBody>
+      </p:sp>
+      <p:sp>
+        <p:nvSpPr>
+          <p:cNvPr id="4" name="TextBox 3"/>
+          <p:cNvSpPr txBox="1"/>
+          <p:nvPr/>
+        </p:nvSpPr>
+        <p:spPr>
+          <a:xfrm>
+            <a:off x="566928" y="987552"/>
+            <a:ext cx="11064240" cy="685800"/>
+          </a:xfrm>
+          <a:prstGeom prst="rect">
+            <a:avLst/>
+          </a:prstGeom>
+          <a:noFill/>
+        </p:spPr>
+        <p:txBody>
+          <a:bodyPr wrap="square" lIns="0" tIns="0" rIns="0" bIns="0">
+            <a:spAutoFit/>
+          </a:bodyPr>
+          <a:lstStyle/>
+          <a:p>
+            <a:pPr algn="l">
+              <a:lnSpc>
+                <a:spcPct val="115000"/>
+              </a:lnSpc>
+              <a:spcAft>
+                <a:spcPts val="0"/>
+              </a:spcAft>
+            </a:pPr>
+            <a:r>
+              <a:rPr sz="3000" b="1" i="0">
                 <a:solidFill>
                   <a:srgbClr val="1B335F"/>
                 </a:solidFill>
                 <a:latin typeface="Calibri"/>
               </a:rPr>
-              <a:t>The methodological point generalizes: running a study at both endpoints of an unspecified parameter, and committing in advance to report only what survives both, retracted a comparison that either endpoint alone would have supported.</a:t>
-            </a:r>
-          </a:p>
-        </p:txBody>
-      </p:sp>
-    </p:spTree>
-  </p:cSld>
-  <p:clrMapOvr>
-    <a:masterClrMapping/>
-  </p:clrMapOvr>
-</p:sld>
-</file>
-
-<file path=ppt/slides/slide12.xml><?xml version="1.0" encoding="utf-8"?>
-<p:sld xmlns:a="http://schemas.openxmlformats.org/drawingml/2006/main" xmlns:p="http://schemas.openxmlformats.org/presentationml/2006/main" xmlns:r="http://schemas.openxmlformats.org/officeDocument/2006/relationships">
-  <p:cSld>
-    <p:spTree>
-      <p:nvGrpSpPr>
-        <p:cNvPr id="1" name=""/>
-        <p:cNvGrpSpPr/>
-        <p:nvPr/>
-      </p:nvGrpSpPr>
-      <p:grpSpPr/>
-      <p:sp>
-        <p:nvSpPr>
-          <p:cNvPr id="2" name="Rectangle 1"/>
+              <a:t>Scope, motivation and the hard parts</a:t>
+            </a:r>
+          </a:p>
+        </p:txBody>
+      </p:sp>
+      <p:sp>
+        <p:nvSpPr>
+          <p:cNvPr id="5" name="TextBox 4"/>
+          <p:cNvSpPr txBox="1"/>
+          <p:nvPr/>
+        </p:nvSpPr>
+        <p:spPr>
+          <a:xfrm>
+            <a:off x="11064240" y="6263640"/>
+            <a:ext cx="594360" cy="274320"/>
+          </a:xfrm>
+          <a:prstGeom prst="rect">
+            <a:avLst/>
+          </a:prstGeom>
+          <a:noFill/>
+        </p:spPr>
+        <p:txBody>
+          <a:bodyPr wrap="square" lIns="0" tIns="0" rIns="0" bIns="0">
+            <a:spAutoFit/>
+          </a:bodyPr>
+          <a:lstStyle/>
+          <a:p>
+            <a:pPr algn="r">
+              <a:lnSpc>
+                <a:spcPct val="115000"/>
+              </a:lnSpc>
+              <a:spcAft>
+                <a:spcPts val="0"/>
+              </a:spcAft>
+            </a:pPr>
+            <a:r>
+              <a:rPr sz="1100" b="0" i="0">
+                <a:solidFill>
+                  <a:srgbClr val="666B73"/>
+                </a:solidFill>
+                <a:latin typeface="Calibri"/>
+              </a:rPr>
+              <a:t>4</a:t>
+            </a:r>
+          </a:p>
+        </p:txBody>
+      </p:sp>
+      <p:sp>
+        <p:nvSpPr>
+          <p:cNvPr id="6" name="Rectangle 5"/>
           <p:cNvSpPr/>
           <p:nvPr/>
         </p:nvSpPr>
         <p:spPr>
           <a:xfrm>
-            <a:off x="566928" y="475488"/>
-            <a:ext cx="1051560" cy="50292"/>
+            <a:off x="566928" y="1783080"/>
+            <a:ext cx="3529584" cy="45720"/>
           </a:xfrm>
           <a:prstGeom prst="rect">
             <a:avLst/>
@@ -4936,19 +5308,20 @@
           <a:lstStyle/>
           <a:p>
             <a:pPr algn="ctr"/>
-          </a:p>
-        </p:txBody>
-      </p:sp>
-      <p:sp>
-        <p:nvSpPr>
-          <p:cNvPr id="3" name="TextBox 2"/>
+            <a:endParaRPr/>
+          </a:p>
+        </p:txBody>
+      </p:sp>
+      <p:sp>
+        <p:nvSpPr>
+          <p:cNvPr id="7" name="TextBox 6"/>
           <p:cNvSpPr txBox="1"/>
           <p:nvPr/>
         </p:nvSpPr>
         <p:spPr>
           <a:xfrm>
-            <a:off x="566928" y="658368"/>
-            <a:ext cx="11064240" cy="685800"/>
+            <a:off x="566928" y="2011680"/>
+            <a:ext cx="3529584" cy="320040"/>
           </a:xfrm>
           <a:prstGeom prst="rect">
             <a:avLst/>
@@ -4956,7 +5329,7 @@
           <a:noFill/>
         </p:spPr>
         <p:txBody>
-          <a:bodyPr wrap="square" lIns="0" rIns="0" tIns="0" bIns="0">
+          <a:bodyPr wrap="square" lIns="0" tIns="0" rIns="0" bIns="0">
             <a:spAutoFit/>
           </a:bodyPr>
           <a:lstStyle/>
@@ -4970,27 +5343,27 @@
               </a:spcAft>
             </a:pPr>
             <a:r>
-              <a:rPr sz="3000" b="1" i="0">
-                <a:solidFill>
-                  <a:srgbClr val="1B335F"/>
-                </a:solidFill>
-                <a:latin typeface="Calibri"/>
-              </a:rPr>
-              <a:t>References</a:t>
-            </a:r>
-          </a:p>
-        </p:txBody>
-      </p:sp>
-      <p:sp>
-        <p:nvSpPr>
-          <p:cNvPr id="4" name="TextBox 3"/>
+              <a:rPr sz="1300" b="1" i="0">
+                <a:solidFill>
+                  <a:srgbClr val="0F7773"/>
+                </a:solidFill>
+                <a:latin typeface="Calibri"/>
+              </a:rPr>
+              <a:t>SCOPE</a:t>
+            </a:r>
+          </a:p>
+        </p:txBody>
+      </p:sp>
+      <p:sp>
+        <p:nvSpPr>
+          <p:cNvPr id="8" name="TextBox 7"/>
           <p:cNvSpPr txBox="1"/>
           <p:nvPr/>
         </p:nvSpPr>
         <p:spPr>
           <a:xfrm>
-            <a:off x="11064240" y="6263640"/>
-            <a:ext cx="594360" cy="274320"/>
+            <a:off x="566928" y="2514600"/>
+            <a:ext cx="3529584" cy="3291840"/>
           </a:xfrm>
           <a:prstGeom prst="rect">
             <a:avLst/>
@@ -4998,326 +5371,171 @@
           <a:noFill/>
         </p:spPr>
         <p:txBody>
-          <a:bodyPr wrap="square" lIns="0" rIns="0" tIns="0" bIns="0">
+          <a:bodyPr wrap="square" lIns="0" tIns="0" rIns="0" bIns="0">
             <a:spAutoFit/>
           </a:bodyPr>
           <a:lstStyle/>
           <a:p>
-            <a:pPr algn="r">
-              <a:lnSpc>
-                <a:spcPct val="115000"/>
-              </a:lnSpc>
-              <a:spcAft>
-                <a:spcPts val="0"/>
-              </a:spcAft>
-            </a:pPr>
-            <a:r>
-              <a:rPr sz="1100" b="0" i="0">
-                <a:solidFill>
-                  <a:srgbClr val="666B73"/>
-                </a:solidFill>
-                <a:latin typeface="Calibri"/>
-              </a:rPr>
-              <a:t>12</a:t>
-            </a:r>
-          </a:p>
-        </p:txBody>
-      </p:sp>
-      <p:sp>
-        <p:nvSpPr>
-          <p:cNvPr id="5" name="TextBox 4"/>
-          <p:cNvSpPr txBox="1"/>
-          <p:nvPr/>
-        </p:nvSpPr>
-        <p:spPr>
-          <a:xfrm>
-            <a:off x="566928" y="1691640"/>
-            <a:ext cx="5349240" cy="4114800"/>
-          </a:xfrm>
-          <a:prstGeom prst="rect">
-            <a:avLst/>
-          </a:prstGeom>
-          <a:noFill/>
-        </p:spPr>
-        <p:txBody>
-          <a:bodyPr wrap="square" lIns="0" rIns="0" tIns="0" bIns="0">
-            <a:spAutoFit/>
-          </a:bodyPr>
-          <a:lstStyle/>
-          <a:p>
-            <a:pPr algn="l">
-              <a:lnSpc>
-                <a:spcPct val="115000"/>
+            <a:pPr>
+              <a:lnSpc>
+                <a:spcPct val="118000"/>
               </a:lnSpc>
               <a:spcAft>
                 <a:spcPts val="1100"/>
               </a:spcAft>
             </a:pPr>
             <a:r>
-              <a:rPr sz="1200" b="0" i="0">
+              <a:rPr sz="1400">
+                <a:solidFill>
+                  <a:srgbClr val="0F7773"/>
+                </a:solidFill>
+                <a:latin typeface="Calibri"/>
+              </a:rPr>
+              <a:t>▪  </a:t>
+            </a:r>
+            <a:r>
+              <a:rPr sz="1400">
                 <a:solidFill>
                   <a:srgbClr val="2B2B2B"/>
                 </a:solidFill>
                 <a:latin typeface="Calibri"/>
               </a:rPr>
-              <a:t>[1] W. R. Heinzelman, A. Chandrakasan and H. Balakrishnan, “Energy-Efficient Communication Protocol for Wireless Microsensor Networks,” Proc. HICSS, 2000.</a:t>
-            </a:r>
-          </a:p>
-          <a:p>
-            <a:pPr algn="l">
-              <a:lnSpc>
-                <a:spcPct val="115000"/>
+              <a:t>10 configurations, 3 generations, 1 engine</a:t>
+            </a:r>
+          </a:p>
+          <a:p>
+            <a:pPr>
+              <a:lnSpc>
+                <a:spcPct val="118000"/>
               </a:lnSpc>
               <a:spcAft>
                 <a:spcPts val="1100"/>
               </a:spcAft>
             </a:pPr>
             <a:r>
-              <a:rPr sz="1200" b="0" i="0">
+              <a:rPr sz="1400">
+                <a:solidFill>
+                  <a:srgbClr val="0F7773"/>
+                </a:solidFill>
+                <a:latin typeface="Calibri"/>
+              </a:rPr>
+              <a:t>▪  </a:t>
+            </a:r>
+            <a:r>
+              <a:rPr sz="1400">
                 <a:solidFill>
                   <a:srgbClr val="2B2B2B"/>
                 </a:solidFill>
                 <a:latin typeface="Calibri"/>
               </a:rPr>
-              <a:t>[2] S. Lindsey and C. S. Raghavendra, “PEGASIS: Power-Efficient Gathering in Sensor Information Systems,” Proc. IEEE Aerospace Conf., 2002.</a:t>
-            </a:r>
-          </a:p>
-          <a:p>
-            <a:pPr algn="l">
-              <a:lnSpc>
-                <a:spcPct val="115000"/>
+              <a:t>100 nodes in 100 x 100 m, sink at (50, 150)</a:t>
+            </a:r>
+          </a:p>
+          <a:p>
+            <a:pPr>
+              <a:lnSpc>
+                <a:spcPct val="118000"/>
               </a:lnSpc>
               <a:spcAft>
                 <a:spcPts val="1100"/>
               </a:spcAft>
             </a:pPr>
             <a:r>
-              <a:rPr sz="1200" b="0" i="0">
+              <a:rPr sz="1400">
+                <a:solidFill>
+                  <a:srgbClr val="0F7773"/>
+                </a:solidFill>
+                <a:latin typeface="Calibri"/>
+              </a:rPr>
+              <a:t>▪  </a:t>
+            </a:r>
+            <a:r>
+              <a:rPr sz="1400">
                 <a:solidFill>
                   <a:srgbClr val="2B2B2B"/>
                 </a:solidFill>
                 <a:latin typeface="Calibri"/>
               </a:rPr>
-              <a:t>[3] A. Manjeshwar and D. P. Agrawal, “TEEN: A Routing Protocol for Enhanced Efficiency in Wireless Sensor Networks,” Proc. IPDPS Workshops, 2001.</a:t>
-            </a:r>
-          </a:p>
-          <a:p>
-            <a:pPr algn="l">
-              <a:lnSpc>
-                <a:spcPct val="115000"/>
+              <a:t>Two channels: with and without packet loss</a:t>
+            </a:r>
+          </a:p>
+          <a:p>
+            <a:pPr>
+              <a:lnSpc>
+                <a:spcPct val="118000"/>
               </a:lnSpc>
               <a:spcAft>
                 <a:spcPts val="1100"/>
               </a:spcAft>
             </a:pPr>
             <a:r>
-              <a:rPr sz="1200" b="0" i="0">
+              <a:rPr sz="1400">
+                <a:solidFill>
+                  <a:srgbClr val="0F7773"/>
+                </a:solidFill>
+                <a:latin typeface="Calibri"/>
+              </a:rPr>
+              <a:t>▪  </a:t>
+            </a:r>
+            <a:r>
+              <a:rPr sz="1400">
                 <a:solidFill>
                   <a:srgbClr val="2B2B2B"/>
                 </a:solidFill>
                 <a:latin typeface="Calibri"/>
               </a:rPr>
-              <a:t>[4] K. Deb, A. Pratap, S. Agarwal and T. Meyarivan, “A Fast and Elitist Multiobjective Genetic Algorithm: NSGA-II,” IEEE Trans. Evol. Comput., vol. 6, no. 2, 2002.</a:t>
-            </a:r>
-          </a:p>
-          <a:p>
-            <a:pPr algn="l">
-              <a:lnSpc>
-                <a:spcPct val="115000"/>
+              <a:t>Nine deployment scales, 50 to 150 m fields</a:t>
+            </a:r>
+          </a:p>
+          <a:p>
+            <a:pPr>
+              <a:lnSpc>
+                <a:spcPct val="118000"/>
               </a:lnSpc>
               <a:spcAft>
                 <a:spcPts val="1100"/>
               </a:spcAft>
             </a:pPr>
             <a:r>
-              <a:rPr sz="1200" b="0" i="0">
+              <a:rPr sz="1400">
+                <a:solidFill>
+                  <a:srgbClr val="0F7773"/>
+                </a:solidFill>
+                <a:latin typeface="Calibri"/>
+              </a:rPr>
+              <a:t>▪  </a:t>
+            </a:r>
+            <a:r>
+              <a:rPr sz="1400">
                 <a:solidFill>
                   <a:srgbClr val="2B2B2B"/>
                 </a:solidFill>
                 <a:latin typeface="Calibri"/>
               </a:rPr>
-              <a:t>[5] J. M. Mendel and R. I. B. John, “Type-2 Fuzzy Sets Made Simple,” IEEE Trans. Fuzzy Syst., vol. 10, no. 2, 2002.</a:t>
-            </a:r>
-          </a:p>
-          <a:p>
-            <a:pPr algn="l">
-              <a:lnSpc>
-                <a:spcPct val="115000"/>
-              </a:lnSpc>
-              <a:spcAft>
-                <a:spcPts val="1100"/>
-              </a:spcAft>
-            </a:pPr>
-            <a:r>
-              <a:rPr sz="1200" b="0" i="0">
-                <a:solidFill>
-                  <a:srgbClr val="2B2B2B"/>
-                </a:solidFill>
-                <a:latin typeface="Calibri"/>
-              </a:rPr>
-              <a:t>[6] T. Kohonen, “The Self-Organizing Map,” Proc. IEEE, vol. 78, no. 9, 1990.</a:t>
-            </a:r>
-          </a:p>
-        </p:txBody>
-      </p:sp>
-      <p:sp>
-        <p:nvSpPr>
-          <p:cNvPr id="6" name="TextBox 5"/>
-          <p:cNvSpPr txBox="1"/>
-          <p:nvPr/>
-        </p:nvSpPr>
-        <p:spPr>
-          <a:xfrm>
-            <a:off x="6281928" y="1691640"/>
-            <a:ext cx="5349240" cy="4114800"/>
-          </a:xfrm>
-          <a:prstGeom prst="rect">
-            <a:avLst/>
-          </a:prstGeom>
-          <a:noFill/>
-        </p:spPr>
-        <p:txBody>
-          <a:bodyPr wrap="square" lIns="0" rIns="0" tIns="0" bIns="0">
-            <a:spAutoFit/>
-          </a:bodyPr>
-          <a:lstStyle/>
-          <a:p>
-            <a:pPr algn="l">
-              <a:lnSpc>
-                <a:spcPct val="115000"/>
-              </a:lnSpc>
-              <a:spcAft>
-                <a:spcPts val="1100"/>
-              </a:spcAft>
-            </a:pPr>
-            <a:r>
-              <a:rPr sz="1200" b="0" i="0">
-                <a:solidFill>
-                  <a:srgbClr val="2B2B2B"/>
-                </a:solidFill>
-                <a:latin typeface="Calibri"/>
-              </a:rPr>
-              <a:t>[7] V. Mnih et al., “Human-Level Control Through Deep Reinforcement Learning,” Nature, vol. 518, 2015.</a:t>
-            </a:r>
-          </a:p>
-          <a:p>
-            <a:pPr algn="l">
-              <a:lnSpc>
-                <a:spcPct val="115000"/>
-              </a:lnSpc>
-              <a:spcAft>
-                <a:spcPts val="1100"/>
-              </a:spcAft>
-            </a:pPr>
-            <a:r>
-              <a:rPr sz="1200" b="0" i="0">
-                <a:solidFill>
-                  <a:srgbClr val="2B2B2B"/>
-                </a:solidFill>
-                <a:latin typeface="Calibri"/>
-              </a:rPr>
-              <a:t>[8] T. N. Kipf and M. Welling, “Semi-Supervised Classification with Graph Convolutional Networks,” Proc. ICLR, 2017.</a:t>
-            </a:r>
-          </a:p>
-          <a:p>
-            <a:pPr algn="l">
-              <a:lnSpc>
-                <a:spcPct val="115000"/>
-              </a:lnSpc>
-              <a:spcAft>
-                <a:spcPts val="1100"/>
-              </a:spcAft>
-            </a:pPr>
-            <a:r>
-              <a:rPr sz="1200" b="0" i="0">
-                <a:solidFill>
-                  <a:srgbClr val="2B2B2B"/>
-                </a:solidFill>
-                <a:latin typeface="Calibri"/>
-              </a:rPr>
-              <a:t>[9] S. Kurkowski, T. Camp and M. Colagrosso, “MANET Simulation Studies: The Incredibles,” ACM SIGMOBILE MC2R, vol. 9, no. 4, 2005.</a:t>
-            </a:r>
-          </a:p>
-          <a:p>
-            <a:pPr algn="l">
-              <a:lnSpc>
-                <a:spcPct val="115000"/>
-              </a:lnSpc>
-              <a:spcAft>
-                <a:spcPts val="1100"/>
-              </a:spcAft>
-            </a:pPr>
-            <a:r>
-              <a:rPr sz="1200" b="0" i="0">
-                <a:solidFill>
-                  <a:srgbClr val="2B2B2B"/>
-                </a:solidFill>
-                <a:latin typeface="Calibri"/>
-              </a:rPr>
-              <a:t>[10] K. Pawlikowski, H.-D. J. Jeong and J.-S. R. Lee, “On Credibility of Simulation Studies of Telecommunication Networks,” IEEE Commun. Mag., vol. 40, no. 1, 2002.</a:t>
-            </a:r>
-          </a:p>
-          <a:p>
-            <a:pPr algn="l">
-              <a:lnSpc>
-                <a:spcPct val="115000"/>
-              </a:lnSpc>
-              <a:spcAft>
-                <a:spcPts val="1100"/>
-              </a:spcAft>
-            </a:pPr>
-            <a:r>
-              <a:rPr sz="1200" b="0" i="0">
-                <a:solidFill>
-                  <a:srgbClr val="2B2B2B"/>
-                </a:solidFill>
-                <a:latin typeface="Calibri"/>
-              </a:rPr>
-              <a:t>[11] T. S. Rappaport, Wireless Communications: Principles and Practice, 2nd ed. Prentice Hall, 2002.</a:t>
-            </a:r>
-          </a:p>
-          <a:p>
-            <a:pPr algn="l">
-              <a:lnSpc>
-                <a:spcPct val="115000"/>
-              </a:lnSpc>
-              <a:spcAft>
-                <a:spcPts val="1100"/>
-              </a:spcAft>
-            </a:pPr>
-            <a:r>
-              <a:rPr sz="1200" b="0" i="0">
-                <a:solidFill>
-                  <a:srgbClr val="2B2B2B"/>
-                </a:solidFill>
-                <a:latin typeface="Calibri"/>
-              </a:rPr>
-              <a:t>[12] S. Holm, “A Simple Sequentially Rejective Multiple Test Procedure,” Scand. J. Statist., vol. 6, no. 2, 1979.</a:t>
-            </a:r>
-          </a:p>
-        </p:txBody>
-      </p:sp>
-      <p:sp>
-        <p:nvSpPr>
-          <p:cNvPr id="7" name="Rectangle 6"/>
+              <a:t>Homogeneous, static nodes; failure by energy only</a:t>
+            </a:r>
+          </a:p>
+        </p:txBody>
+      </p:sp>
+      <p:sp>
+        <p:nvSpPr>
+          <p:cNvPr id="9" name="Rectangle 8"/>
           <p:cNvSpPr/>
           <p:nvPr/>
         </p:nvSpPr>
         <p:spPr>
           <a:xfrm>
-            <a:off x="566928" y="5577840"/>
-            <a:ext cx="11064240" cy="548640"/>
+            <a:off x="4343400" y="1783080"/>
+            <a:ext cx="3529584" cy="45720"/>
           </a:xfrm>
           <a:prstGeom prst="rect">
             <a:avLst/>
           </a:prstGeom>
           <a:solidFill>
-            <a:srgbClr val="F4F6F8"/>
+            <a:srgbClr val="1B335F"/>
           </a:solidFill>
-          <a:ln w="9525">
-            <a:solidFill>
-              <a:srgbClr val="D8DDE3"/>
-            </a:solidFill>
+          <a:ln>
+            <a:noFill/>
           </a:ln>
           <a:effectLst/>
         </p:spPr>
@@ -5340,19 +5558,20 @@
           <a:lstStyle/>
           <a:p>
             <a:pPr algn="ctr"/>
-          </a:p>
-        </p:txBody>
-      </p:sp>
-      <p:sp>
-        <p:nvSpPr>
-          <p:cNvPr id="8" name="TextBox 7"/>
+            <a:endParaRPr/>
+          </a:p>
+        </p:txBody>
+      </p:sp>
+      <p:sp>
+        <p:nvSpPr>
+          <p:cNvPr id="10" name="TextBox 9"/>
           <p:cNvSpPr txBox="1"/>
           <p:nvPr/>
         </p:nvSpPr>
         <p:spPr>
           <a:xfrm>
-            <a:off x="868680" y="5724144"/>
-            <a:ext cx="10424160" cy="365760"/>
+            <a:off x="4343400" y="2011680"/>
+            <a:ext cx="3529584" cy="320040"/>
           </a:xfrm>
           <a:prstGeom prst="rect">
             <a:avLst/>
@@ -5360,7 +5579,7 @@
           <a:noFill/>
         </p:spPr>
         <p:txBody>
-          <a:bodyPr wrap="square" lIns="0" rIns="0" tIns="0" bIns="0">
+          <a:bodyPr wrap="square" lIns="0" tIns="0" rIns="0" bIns="0">
             <a:spAutoFit/>
           </a:bodyPr>
           <a:lstStyle/>
@@ -5374,51 +5593,140 @@
               </a:spcAft>
             </a:pPr>
             <a:r>
-              <a:rPr sz="1300" b="0" i="1">
-                <a:solidFill>
-                  <a:srgbClr val="666B73"/>
-                </a:solidFill>
-                <a:latin typeface="Calibri"/>
-              </a:rPr>
-              <a:t>The manuscript cites 47 references in full. Configuration constants, per-round outputs and verification artifacts are released with the code.</a:t>
-            </a:r>
-          </a:p>
-        </p:txBody>
-      </p:sp>
-    </p:spTree>
-  </p:cSld>
-  <p:clrMapOvr>
-    <a:masterClrMapping/>
-  </p:clrMapOvr>
-</p:sld>
-</file>
-
-<file path=ppt/slides/slide2.xml><?xml version="1.0" encoding="utf-8"?>
-<p:sld xmlns:a="http://schemas.openxmlformats.org/drawingml/2006/main" xmlns:p="http://schemas.openxmlformats.org/presentationml/2006/main" xmlns:r="http://schemas.openxmlformats.org/officeDocument/2006/relationships">
-  <p:cSld>
-    <p:spTree>
-      <p:nvGrpSpPr>
-        <p:cNvPr id="1" name=""/>
-        <p:cNvGrpSpPr/>
-        <p:nvPr/>
-      </p:nvGrpSpPr>
-      <p:grpSpPr/>
-      <p:sp>
-        <p:nvSpPr>
-          <p:cNvPr id="2" name="Rectangle 1"/>
+              <a:rPr sz="1300" b="1" i="0">
+                <a:solidFill>
+                  <a:srgbClr val="1B335F"/>
+                </a:solidFill>
+                <a:latin typeface="Calibri"/>
+              </a:rPr>
+              <a:t>MOTIVATION</a:t>
+            </a:r>
+          </a:p>
+        </p:txBody>
+      </p:sp>
+      <p:sp>
+        <p:nvSpPr>
+          <p:cNvPr id="11" name="TextBox 10"/>
+          <p:cNvSpPr txBox="1"/>
+          <p:nvPr/>
+        </p:nvSpPr>
+        <p:spPr>
+          <a:xfrm>
+            <a:off x="4343400" y="2514600"/>
+            <a:ext cx="3529584" cy="3291840"/>
+          </a:xfrm>
+          <a:prstGeom prst="rect">
+            <a:avLst/>
+          </a:prstGeom>
+          <a:noFill/>
+        </p:spPr>
+        <p:txBody>
+          <a:bodyPr wrap="square" lIns="0" tIns="0" rIns="0" bIns="0">
+            <a:spAutoFit/>
+          </a:bodyPr>
+          <a:lstStyle/>
+          <a:p>
+            <a:pPr>
+              <a:lnSpc>
+                <a:spcPct val="118000"/>
+              </a:lnSpc>
+              <a:spcAft>
+                <a:spcPts val="1100"/>
+              </a:spcAft>
+            </a:pPr>
+            <a:r>
+              <a:rPr sz="1400">
+                <a:solidFill>
+                  <a:srgbClr val="1B335F"/>
+                </a:solidFill>
+                <a:latin typeface="Calibri"/>
+              </a:rPr>
+              <a:t>▪  </a:t>
+            </a:r>
+            <a:r>
+              <a:rPr sz="1400">
+                <a:solidFill>
+                  <a:srgbClr val="2B2B2B"/>
+                </a:solidFill>
+                <a:latin typeface="Calibri"/>
+              </a:rPr>
+              <a:t>A designer choosing a protocol today cannot get a straight answer out of the literature</a:t>
+            </a:r>
+          </a:p>
+          <a:p>
+            <a:pPr>
+              <a:lnSpc>
+                <a:spcPct val="118000"/>
+              </a:lnSpc>
+              <a:spcAft>
+                <a:spcPts val="1100"/>
+              </a:spcAft>
+            </a:pPr>
+            <a:r>
+              <a:rPr sz="1400">
+                <a:solidFill>
+                  <a:srgbClr val="1B335F"/>
+                </a:solidFill>
+                <a:latin typeface="Calibri"/>
+              </a:rPr>
+              <a:t>▪  </a:t>
+            </a:r>
+            <a:r>
+              <a:rPr sz="1400">
+                <a:solidFill>
+                  <a:srgbClr val="2B2B2B"/>
+                </a:solidFill>
+                <a:latin typeface="Calibri"/>
+              </a:rPr>
+              <a:t>Reported gains are entangled with the harness that produced them</a:t>
+            </a:r>
+          </a:p>
+          <a:p>
+            <a:pPr>
+              <a:lnSpc>
+                <a:spcPct val="118000"/>
+              </a:lnSpc>
+              <a:spcAft>
+                <a:spcPts val="1100"/>
+              </a:spcAft>
+            </a:pPr>
+            <a:r>
+              <a:rPr sz="1400">
+                <a:solidFill>
+                  <a:srgbClr val="1B335F"/>
+                </a:solidFill>
+                <a:latin typeface="Calibri"/>
+              </a:rPr>
+              <a:t>▪  </a:t>
+            </a:r>
+            <a:r>
+              <a:rPr sz="1400">
+                <a:solidFill>
+                  <a:srgbClr val="2B2B2B"/>
+                </a:solidFill>
+                <a:latin typeface="Calibri"/>
+              </a:rPr>
+              <a:t>Learned protocols are arriving fast, with no common yardstick against the heuristics they claim to beat</a:t>
+            </a:r>
+          </a:p>
+        </p:txBody>
+      </p:sp>
+      <p:sp>
+        <p:nvSpPr>
+          <p:cNvPr id="12" name="Rectangle 11"/>
           <p:cNvSpPr/>
           <p:nvPr/>
         </p:nvSpPr>
         <p:spPr>
           <a:xfrm>
-            <a:off x="566928" y="475488"/>
-            <a:ext cx="1051560" cy="50292"/>
+            <a:off x="8119871" y="1783080"/>
+            <a:ext cx="3529584" cy="45720"/>
           </a:xfrm>
           <a:prstGeom prst="rect">
             <a:avLst/>
           </a:prstGeom>
           <a:solidFill>
-            <a:srgbClr val="0F7773"/>
+            <a:srgbClr val="A83A1E"/>
           </a:solidFill>
           <a:ln>
             <a:noFill/>
@@ -5444,19 +5752,20 @@
           <a:lstStyle/>
           <a:p>
             <a:pPr algn="ctr"/>
-          </a:p>
-        </p:txBody>
-      </p:sp>
-      <p:sp>
-        <p:nvSpPr>
-          <p:cNvPr id="3" name="TextBox 2"/>
+            <a:endParaRPr/>
+          </a:p>
+        </p:txBody>
+      </p:sp>
+      <p:sp>
+        <p:nvSpPr>
+          <p:cNvPr id="13" name="TextBox 12"/>
           <p:cNvSpPr txBox="1"/>
           <p:nvPr/>
         </p:nvSpPr>
         <p:spPr>
           <a:xfrm>
-            <a:off x="566928" y="658368"/>
-            <a:ext cx="10058400" cy="274320"/>
+            <a:off x="8119871" y="2011680"/>
+            <a:ext cx="3529584" cy="320040"/>
           </a:xfrm>
           <a:prstGeom prst="rect">
             <a:avLst/>
@@ -5464,7 +5773,7 @@
           <a:noFill/>
         </p:spPr>
         <p:txBody>
-          <a:bodyPr wrap="square" lIns="0" rIns="0" tIns="0" bIns="0">
+          <a:bodyPr wrap="square" lIns="0" tIns="0" rIns="0" bIns="0">
             <a:spAutoFit/>
           </a:bodyPr>
           <a:lstStyle/>
@@ -5478,27 +5787,27 @@
               </a:spcAft>
             </a:pPr>
             <a:r>
-              <a:rPr sz="1200" b="1" i="0">
-                <a:solidFill>
-                  <a:srgbClr val="0F7773"/>
-                </a:solidFill>
-                <a:latin typeface="Calibri"/>
-              </a:rPr>
-              <a:t>PROBLEM STATEMENT</a:t>
-            </a:r>
-          </a:p>
-        </p:txBody>
-      </p:sp>
-      <p:sp>
-        <p:nvSpPr>
-          <p:cNvPr id="4" name="TextBox 3"/>
+              <a:rPr sz="1300" b="1" i="0">
+                <a:solidFill>
+                  <a:srgbClr val="A83A1E"/>
+                </a:solidFill>
+                <a:latin typeface="Calibri"/>
+              </a:rPr>
+              <a:t>CHALLENGES</a:t>
+            </a:r>
+          </a:p>
+        </p:txBody>
+      </p:sp>
+      <p:sp>
+        <p:nvSpPr>
+          <p:cNvPr id="14" name="TextBox 13"/>
           <p:cNvSpPr txBox="1"/>
           <p:nvPr/>
         </p:nvSpPr>
         <p:spPr>
           <a:xfrm>
-            <a:off x="566928" y="987552"/>
-            <a:ext cx="11064240" cy="685800"/>
+            <a:off x="8119871" y="2514600"/>
+            <a:ext cx="3529584" cy="3291840"/>
           </a:xfrm>
           <a:prstGeom prst="rect">
             <a:avLst/>
@@ -5506,41 +5815,134 @@
           <a:noFill/>
         </p:spPr>
         <p:txBody>
-          <a:bodyPr wrap="square" lIns="0" rIns="0" tIns="0" bIns="0">
+          <a:bodyPr wrap="square" lIns="0" tIns="0" rIns="0" bIns="0">
             <a:spAutoFit/>
           </a:bodyPr>
           <a:lstStyle/>
           <a:p>
-            <a:pPr algn="l">
-              <a:lnSpc>
-                <a:spcPct val="115000"/>
-              </a:lnSpc>
-              <a:spcAft>
-                <a:spcPts val="0"/>
-              </a:spcAft>
-            </a:pPr>
-            <a:r>
-              <a:rPr sz="3000" b="1" i="0">
-                <a:solidFill>
-                  <a:srgbClr val="1B335F"/>
-                </a:solidFill>
-                <a:latin typeface="Calibri"/>
-              </a:rPr>
-              <a:t>The comparison everyone makes does not actually hold</a:t>
-            </a:r>
-          </a:p>
-        </p:txBody>
-      </p:sp>
-      <p:sp>
-        <p:nvSpPr>
-          <p:cNvPr id="5" name="TextBox 4"/>
+            <a:pPr>
+              <a:lnSpc>
+                <a:spcPct val="118000"/>
+              </a:lnSpc>
+              <a:spcAft>
+                <a:spcPts val="1100"/>
+              </a:spcAft>
+            </a:pPr>
+            <a:r>
+              <a:rPr sz="1400">
+                <a:solidFill>
+                  <a:srgbClr val="A83A1E"/>
+                </a:solidFill>
+                <a:latin typeface="Calibri"/>
+              </a:rPr>
+              <a:t>▪  </a:t>
+            </a:r>
+            <a:r>
+              <a:rPr sz="1400">
+                <a:solidFill>
+                  <a:srgbClr val="2B2B2B"/>
+                </a:solidFill>
+                <a:latin typeface="Calibri"/>
+              </a:rPr>
+              <a:t>Fairness has to be structural, not promised in prose</a:t>
+            </a:r>
+          </a:p>
+          <a:p>
+            <a:pPr>
+              <a:lnSpc>
+                <a:spcPct val="118000"/>
+              </a:lnSpc>
+              <a:spcAft>
+                <a:spcPts val="1100"/>
+              </a:spcAft>
+            </a:pPr>
+            <a:r>
+              <a:rPr sz="1400">
+                <a:solidFill>
+                  <a:srgbClr val="A83A1E"/>
+                </a:solidFill>
+                <a:latin typeface="Calibri"/>
+              </a:rPr>
+              <a:t>▪  </a:t>
+            </a:r>
+            <a:r>
+              <a:rPr sz="1400">
+                <a:solidFill>
+                  <a:srgbClr val="2B2B2B"/>
+                </a:solidFill>
+                <a:latin typeface="Calibri"/>
+              </a:rPr>
+              <a:t>Topology variance is larger than the differences between protocols, so unpaired tests waste their power</a:t>
+            </a:r>
+          </a:p>
+          <a:p>
+            <a:pPr>
+              <a:lnSpc>
+                <a:spcPct val="118000"/>
+              </a:lnSpc>
+              <a:spcAft>
+                <a:spcPts val="1100"/>
+              </a:spcAft>
+            </a:pPr>
+            <a:r>
+              <a:rPr sz="1400">
+                <a:solidFill>
+                  <a:srgbClr val="A83A1E"/>
+                </a:solidFill>
+                <a:latin typeface="Calibri"/>
+              </a:rPr>
+              <a:t>▪  </a:t>
+            </a:r>
+            <a:r>
+              <a:rPr sz="1400">
+                <a:solidFill>
+                  <a:srgbClr val="2B2B2B"/>
+                </a:solidFill>
+                <a:latin typeface="Calibri"/>
+              </a:rPr>
+              <a:t>Unspecified parameters, transmit power above all, can decide the ranking outright</a:t>
+            </a:r>
+          </a:p>
+          <a:p>
+            <a:pPr>
+              <a:lnSpc>
+                <a:spcPct val="118000"/>
+              </a:lnSpc>
+              <a:spcAft>
+                <a:spcPts val="1100"/>
+              </a:spcAft>
+            </a:pPr>
+            <a:r>
+              <a:rPr sz="1400">
+                <a:solidFill>
+                  <a:srgbClr val="A83A1E"/>
+                </a:solidFill>
+                <a:latin typeface="Calibri"/>
+              </a:rPr>
+              <a:t>▪  </a:t>
+            </a:r>
+            <a:r>
+              <a:rPr sz="1400">
+                <a:solidFill>
+                  <a:srgbClr val="2B2B2B"/>
+                </a:solidFill>
+                <a:latin typeface="Calibri"/>
+              </a:rPr>
+              <a:t>Accounting choices are worth more than the algorithms</a:t>
+            </a:r>
+          </a:p>
+        </p:txBody>
+      </p:sp>
+      <p:sp>
+        <p:nvSpPr>
+          <p:cNvPr id="15" name="TextBox 14"/>
           <p:cNvSpPr txBox="1"/>
           <p:nvPr/>
         </p:nvSpPr>
         <p:spPr>
           <a:xfrm>
-            <a:off x="11064240" y="6263640"/>
-            <a:ext cx="594360" cy="274320"/>
+            <a:off x="566928" y="5989320"/>
+            <a:ext cx="11064240" cy="457200"/>
           </a:xfrm>
           <a:prstGeom prst="rect">
             <a:avLst/>
@@ -5548,12 +5950,12 @@
           <a:noFill/>
         </p:spPr>
         <p:txBody>
-          <a:bodyPr wrap="square" lIns="0" rIns="0" tIns="0" bIns="0">
+          <a:bodyPr wrap="square" lIns="0" tIns="0" rIns="0" bIns="0">
             <a:spAutoFit/>
           </a:bodyPr>
           <a:lstStyle/>
           <a:p>
-            <a:pPr algn="r">
+            <a:pPr algn="l">
               <a:lnSpc>
                 <a:spcPct val="115000"/>
               </a:lnSpc>
@@ -5562,246 +5964,61 @@
               </a:spcAft>
             </a:pPr>
             <a:r>
-              <a:rPr sz="1100" b="0" i="0">
+              <a:rPr sz="1400" b="0" i="1">
                 <a:solidFill>
                   <a:srgbClr val="666B73"/>
                 </a:solidFill>
                 <a:latin typeface="Calibri"/>
               </a:rPr>
-              <a:t>2</a:t>
-            </a:r>
-          </a:p>
-        </p:txBody>
-      </p:sp>
-      <p:sp>
-        <p:nvSpPr>
-          <p:cNvPr id="6" name="TextBox 5"/>
-          <p:cNvSpPr txBox="1"/>
-          <p:nvPr/>
-        </p:nvSpPr>
-        <p:spPr>
-          <a:xfrm>
-            <a:off x="566928" y="1828800"/>
-            <a:ext cx="6583680" cy="3840480"/>
-          </a:xfrm>
-          <a:prstGeom prst="rect">
-            <a:avLst/>
-          </a:prstGeom>
-          <a:noFill/>
-        </p:spPr>
-        <p:txBody>
-          <a:bodyPr wrap="square" lIns="0" rIns="0" tIns="0" bIns="0">
-            <a:spAutoFit/>
-          </a:bodyPr>
-          <a:lstStyle/>
-          <a:p>
-            <a:pPr>
-              <a:lnSpc>
-                <a:spcPct val="118000"/>
-              </a:lnSpc>
-              <a:spcAft>
-                <a:spcPts val="1300"/>
-              </a:spcAft>
-            </a:pPr>
-            <a:r>
-              <a:rPr sz="1600">
-                <a:solidFill>
-                  <a:srgbClr val="0F7773"/>
-                </a:solidFill>
-                <a:latin typeface="Calibri"/>
-              </a:rPr>
-              <a:t>▪  </a:t>
-            </a:r>
-            <a:r>
-              <a:rPr sz="1600" b="1">
-                <a:solidFill>
-                  <a:srgbClr val="1B335F"/>
-                </a:solidFill>
-                <a:latin typeface="Calibri"/>
-              </a:rPr>
-              <a:t>Twenty-five years of protocols, three generations. </a:t>
-            </a:r>
-            <a:r>
-              <a:rPr sz="1600">
-                <a:solidFill>
-                  <a:srgbClr val="2B2B2B"/>
-                </a:solidFill>
-                <a:latin typeface="Calibri"/>
-              </a:rPr>
-              <a:t>Heuristics, then explicit optimization, then learned selection.</a:t>
-            </a:r>
-          </a:p>
-          <a:p>
-            <a:pPr>
-              <a:lnSpc>
-                <a:spcPct val="118000"/>
-              </a:lnSpc>
-              <a:spcAft>
-                <a:spcPts val="1300"/>
-              </a:spcAft>
-            </a:pPr>
-            <a:r>
-              <a:rPr sz="1600">
-                <a:solidFill>
-                  <a:srgbClr val="0F7773"/>
-                </a:solidFill>
-                <a:latin typeface="Calibri"/>
-              </a:rPr>
-              <a:t>▪  </a:t>
-            </a:r>
-            <a:r>
-              <a:rPr sz="1600" b="1">
-                <a:solidFill>
-                  <a:srgbClr val="1B335F"/>
-                </a:solidFill>
-                <a:latin typeface="Calibri"/>
-              </a:rPr>
-              <a:t>Each was measured on its own simulator. </a:t>
-            </a:r>
-            <a:r>
-              <a:rPr sz="1600">
-                <a:solidFill>
-                  <a:srgbClr val="2B2B2B"/>
-                </a:solidFill>
-                <a:latin typeface="Calibri"/>
-              </a:rPr>
-              <a:t>Field size, node count, packet length, energy budget and channel all differ between papers.</a:t>
-            </a:r>
-          </a:p>
-          <a:p>
-            <a:pPr>
-              <a:lnSpc>
-                <a:spcPct val="118000"/>
-              </a:lnSpc>
-              <a:spcAft>
-                <a:spcPts val="1300"/>
-              </a:spcAft>
-            </a:pPr>
-            <a:r>
-              <a:rPr sz="1600">
-                <a:solidFill>
-                  <a:srgbClr val="0F7773"/>
-                </a:solidFill>
-                <a:latin typeface="Calibri"/>
-              </a:rPr>
-              <a:t>▪  </a:t>
-            </a:r>
-            <a:r>
-              <a:rPr sz="1600" b="1">
-                <a:solidFill>
-                  <a:srgbClr val="1B335F"/>
-                </a:solidFill>
-                <a:latin typeface="Calibri"/>
-              </a:rPr>
-              <a:t>Almost always against LEACH alone, </a:t>
-            </a:r>
-            <a:r>
-              <a:rPr sz="1600">
-                <a:solidFill>
-                  <a:srgbClr val="2B2B2B"/>
-                </a:solidFill>
-                <a:latin typeface="Calibri"/>
-              </a:rPr>
-              <a:t>and almost always on a channel with no packet loss.</a:t>
-            </a:r>
-          </a:p>
-          <a:p>
-            <a:pPr>
-              <a:lnSpc>
-                <a:spcPct val="118000"/>
-              </a:lnSpc>
-              <a:spcAft>
-                <a:spcPts val="1300"/>
-              </a:spcAft>
-            </a:pPr>
-            <a:r>
-              <a:rPr sz="1600">
-                <a:solidFill>
-                  <a:srgbClr val="0F7773"/>
-                </a:solidFill>
-                <a:latin typeface="Calibri"/>
-              </a:rPr>
-              <a:t>▪  </a:t>
-            </a:r>
-            <a:r>
-              <a:rPr sz="1600" b="1">
-                <a:solidFill>
-                  <a:srgbClr val="1B335F"/>
-                </a:solidFill>
-                <a:latin typeface="Calibri"/>
-              </a:rPr>
-              <a:t>The assumptions that decide the winner go unstated. </a:t>
-            </a:r>
-            <a:r>
-              <a:rPr sz="1600">
-                <a:solidFill>
-                  <a:srgbClr val="2B2B2B"/>
-                </a:solidFill>
-                <a:latin typeface="Calibri"/>
-              </a:rPr>
-              <a:t>Whether a centralized protocol pays for its uplink is worth a quarter of the entire energy budget.</a:t>
-            </a:r>
-          </a:p>
-          <a:p>
-            <a:pPr>
-              <a:lnSpc>
-                <a:spcPct val="118000"/>
-              </a:lnSpc>
-              <a:spcAft>
-                <a:spcPts val="1300"/>
-              </a:spcAft>
-            </a:pPr>
-            <a:r>
-              <a:rPr sz="1600">
-                <a:solidFill>
-                  <a:srgbClr val="0F7773"/>
-                </a:solidFill>
-                <a:latin typeface="Calibri"/>
-              </a:rPr>
-              <a:t>▪  </a:t>
-            </a:r>
-            <a:r>
-              <a:rPr sz="1600" b="1">
-                <a:solidFill>
-                  <a:srgbClr val="1B335F"/>
-                </a:solidFill>
-                <a:latin typeface="Calibri"/>
-              </a:rPr>
-              <a:t>Which death point you report can reverse a ranking, </a:t>
-            </a:r>
-            <a:r>
-              <a:rPr sz="1600">
-                <a:solidFill>
-                  <a:srgbClr val="2B2B2B"/>
-                </a:solidFill>
-                <a:latin typeface="Calibri"/>
-              </a:rPr>
-              <a:t>and the author picks which one to publish.</a:t>
-            </a:r>
-          </a:p>
-        </p:txBody>
-      </p:sp>
-      <p:sp>
-        <p:nvSpPr>
-          <p:cNvPr id="7" name="Rectangle 6"/>
+              <a:t>Standing rule: no protocol is tuned to reproduce a published number. Disagreement with the source tables is expected, not an error.</a:t>
+            </a:r>
+          </a:p>
+        </p:txBody>
+      </p:sp>
+    </p:spTree>
+  </p:cSld>
+  <p:clrMapOvr>
+    <a:masterClrMapping/>
+  </p:clrMapOvr>
+</p:sld>
+</file>
+
+<file path=ppt/slides/slide5.xml><?xml version="1.0" encoding="utf-8"?>
+<p:sld xmlns:a="http://schemas.openxmlformats.org/drawingml/2006/main" xmlns:r="http://schemas.openxmlformats.org/officeDocument/2006/relationships" xmlns:p="http://schemas.openxmlformats.org/presentationml/2006/main">
+  <p:cSld>
+    <p:spTree>
+      <p:nvGrpSpPr>
+        <p:cNvPr id="1" name=""/>
+        <p:cNvGrpSpPr/>
+        <p:nvPr/>
+      </p:nvGrpSpPr>
+      <p:grpSpPr>
+        <a:xfrm>
+          <a:off x="0" y="0"/>
+          <a:ext cx="0" cy="0"/>
+          <a:chOff x="0" y="0"/>
+          <a:chExt cx="0" cy="0"/>
+        </a:xfrm>
+      </p:grpSpPr>
+      <p:sp>
+        <p:nvSpPr>
+          <p:cNvPr id="2" name="Rectangle 1"/>
           <p:cNvSpPr/>
           <p:nvPr/>
         </p:nvSpPr>
         <p:spPr>
           <a:xfrm>
-            <a:off x="7452360" y="1828800"/>
-            <a:ext cx="4160520" cy="2880360"/>
+            <a:off x="566928" y="475488"/>
+            <a:ext cx="1051560" cy="50292"/>
           </a:xfrm>
           <a:prstGeom prst="rect">
             <a:avLst/>
           </a:prstGeom>
           <a:solidFill>
-            <a:srgbClr val="F4F6F8"/>
+            <a:srgbClr val="0F7773"/>
           </a:solidFill>
-          <a:ln w="9525">
-            <a:solidFill>
-              <a:srgbClr val="D8DDE3"/>
-            </a:solidFill>
+          <a:ln>
+            <a:noFill/>
           </a:ln>
           <a:effectLst/>
         </p:spPr>
@@ -5824,19 +6041,20 @@
           <a:lstStyle/>
           <a:p>
             <a:pPr algn="ctr"/>
-          </a:p>
-        </p:txBody>
-      </p:sp>
-      <p:sp>
-        <p:nvSpPr>
-          <p:cNvPr id="8" name="TextBox 7"/>
+            <a:endParaRPr/>
+          </a:p>
+        </p:txBody>
+      </p:sp>
+      <p:sp>
+        <p:nvSpPr>
+          <p:cNvPr id="3" name="TextBox 2"/>
           <p:cNvSpPr txBox="1"/>
           <p:nvPr/>
         </p:nvSpPr>
         <p:spPr>
           <a:xfrm>
-            <a:off x="7726679" y="2103120"/>
-            <a:ext cx="3611880" cy="2377440"/>
+            <a:off x="566928" y="658368"/>
+            <a:ext cx="10058400" cy="274320"/>
           </a:xfrm>
           <a:prstGeom prst="rect">
             <a:avLst/>
@@ -5844,7 +6062,7 @@
           <a:noFill/>
         </p:spPr>
         <p:txBody>
-          <a:bodyPr wrap="square" lIns="0" rIns="0" tIns="0" bIns="0">
+          <a:bodyPr wrap="square" lIns="0" tIns="0" rIns="0" bIns="0">
             <a:spAutoFit/>
           </a:bodyPr>
           <a:lstStyle/>
@@ -5854,69 +6072,31 @@
                 <a:spcPct val="115000"/>
               </a:lnSpc>
               <a:spcAft>
-                <a:spcPts val="1000"/>
-              </a:spcAft>
-            </a:pPr>
-            <a:r>
-              <a:rPr sz="1300" b="1" i="0">
+                <a:spcPts val="0"/>
+              </a:spcAft>
+            </a:pPr>
+            <a:r>
+              <a:rPr sz="1200" b="1" i="0">
                 <a:solidFill>
                   <a:srgbClr val="0F7773"/>
                 </a:solidFill>
                 <a:latin typeface="Calibri"/>
               </a:rPr>
-              <a:t>So the question we ask</a:t>
-            </a:r>
-          </a:p>
-          <a:p>
-            <a:pPr algn="l">
-              <a:lnSpc>
-                <a:spcPct val="120000"/>
-              </a:lnSpc>
-              <a:spcAft>
-                <a:spcPts val="1000"/>
-              </a:spcAft>
-            </a:pPr>
-            <a:r>
-              <a:rPr sz="1600" b="0" i="0">
-                <a:solidFill>
-                  <a:srgbClr val="2B2B2B"/>
-                </a:solidFill>
-                <a:latin typeface="Calibri"/>
-              </a:rPr>
-              <a:t>When a paper reports a margin over LEACH, is that evidence about the algorithm, or evidence about the harness it was measured in?</a:t>
-            </a:r>
-          </a:p>
-          <a:p>
-            <a:pPr algn="l">
-              <a:lnSpc>
-                <a:spcPct val="120000"/>
-              </a:lnSpc>
-              <a:spcAft>
-                <a:spcPts val="0"/>
-              </a:spcAft>
-            </a:pPr>
-            <a:r>
-              <a:rPr sz="1600" b="1" i="0">
-                <a:solidFill>
-                  <a:srgbClr val="A83A1E"/>
-                </a:solidFill>
-                <a:latin typeface="Calibri"/>
-              </a:rPr>
-              <a:t>Right now there is no way to tell them apart.</a:t>
-            </a:r>
-          </a:p>
-        </p:txBody>
-      </p:sp>
-      <p:sp>
-        <p:nvSpPr>
-          <p:cNvPr id="9" name="TextBox 8"/>
+              <a:t>LITERATURE SURVEY</a:t>
+            </a:r>
+          </a:p>
+        </p:txBody>
+      </p:sp>
+      <p:sp>
+        <p:nvSpPr>
+          <p:cNvPr id="4" name="TextBox 3"/>
           <p:cNvSpPr txBox="1"/>
           <p:nvPr/>
         </p:nvSpPr>
         <p:spPr>
           <a:xfrm>
-            <a:off x="566928" y="5715000"/>
-            <a:ext cx="11064240" cy="640080"/>
+            <a:off x="566928" y="987552"/>
+            <a:ext cx="11064240" cy="685800"/>
           </a:xfrm>
           <a:prstGeom prst="rect">
             <a:avLst/>
@@ -5924,7 +6104,7 @@
           <a:noFill/>
         </p:spPr>
         <p:txBody>
-          <a:bodyPr wrap="square" lIns="0" rIns="0" tIns="0" bIns="0">
+          <a:bodyPr wrap="square" lIns="0" tIns="0" rIns="0" bIns="0">
             <a:spAutoFit/>
           </a:bodyPr>
           <a:lstStyle/>
@@ -5938,89 +6118,27 @@
               </a:spcAft>
             </a:pPr>
             <a:r>
-              <a:rPr sz="1600" b="1" i="0">
+              <a:rPr sz="3000" b="1" i="0">
                 <a:solidFill>
                   <a:srgbClr val="1B335F"/>
                 </a:solidFill>
                 <a:latin typeface="Calibri"/>
               </a:rPr>
-              <a:t>Aim:  build one benchmark in which all three generations run under provably identical physical conditions, with every modeling choice disclosed.</a:t>
-            </a:r>
-          </a:p>
-        </p:txBody>
-      </p:sp>
-    </p:spTree>
-  </p:cSld>
-  <p:clrMapOvr>
-    <a:masterClrMapping/>
-  </p:clrMapOvr>
-</p:sld>
-</file>
-
-<file path=ppt/slides/slide3.xml><?xml version="1.0" encoding="utf-8"?>
-<p:sld xmlns:a="http://schemas.openxmlformats.org/drawingml/2006/main" xmlns:p="http://schemas.openxmlformats.org/presentationml/2006/main" xmlns:r="http://schemas.openxmlformats.org/officeDocument/2006/relationships">
-  <p:cSld>
-    <p:spTree>
-      <p:nvGrpSpPr>
-        <p:cNvPr id="1" name=""/>
-        <p:cNvGrpSpPr/>
-        <p:nvPr/>
-      </p:nvGrpSpPr>
-      <p:grpSpPr/>
-      <p:sp>
-        <p:nvSpPr>
-          <p:cNvPr id="2" name="Rectangle 1"/>
-          <p:cNvSpPr/>
-          <p:nvPr/>
-        </p:nvSpPr>
-        <p:spPr>
-          <a:xfrm>
-            <a:off x="566928" y="475488"/>
-            <a:ext cx="1051560" cy="50292"/>
-          </a:xfrm>
-          <a:prstGeom prst="rect">
-            <a:avLst/>
-          </a:prstGeom>
-          <a:solidFill>
-            <a:srgbClr val="0F7773"/>
-          </a:solidFill>
-          <a:ln>
-            <a:noFill/>
-          </a:ln>
-          <a:effectLst/>
-        </p:spPr>
-        <p:style>
-          <a:lnRef idx="1">
-            <a:schemeClr val="accent1"/>
-          </a:lnRef>
-          <a:fillRef idx="3">
-            <a:schemeClr val="accent1"/>
-          </a:fillRef>
-          <a:effectRef idx="2">
-            <a:schemeClr val="accent1"/>
-          </a:effectRef>
-          <a:fontRef idx="minor">
-            <a:schemeClr val="lt1"/>
-          </a:fontRef>
-        </p:style>
-        <p:txBody>
-          <a:bodyPr rtlCol="0" anchor="ctr"/>
-          <a:lstStyle/>
-          <a:p>
-            <a:pPr algn="ctr"/>
-          </a:p>
-        </p:txBody>
-      </p:sp>
-      <p:sp>
-        <p:nvSpPr>
-          <p:cNvPr id="3" name="TextBox 2"/>
+              <a:t>Three generations of answers to one question</a:t>
+            </a:r>
+          </a:p>
+        </p:txBody>
+      </p:sp>
+      <p:sp>
+        <p:nvSpPr>
+          <p:cNvPr id="5" name="TextBox 4"/>
           <p:cNvSpPr txBox="1"/>
           <p:nvPr/>
         </p:nvSpPr>
         <p:spPr>
           <a:xfrm>
-            <a:off x="566928" y="658368"/>
-            <a:ext cx="10058400" cy="274320"/>
+            <a:off x="11064240" y="6263640"/>
+            <a:ext cx="594360" cy="274320"/>
           </a:xfrm>
           <a:prstGeom prst="rect">
             <a:avLst/>
@@ -6028,1380 +6146,7 @@
           <a:noFill/>
         </p:spPr>
         <p:txBody>
-          <a:bodyPr wrap="square" lIns="0" rIns="0" tIns="0" bIns="0">
-            <a:spAutoFit/>
-          </a:bodyPr>
-          <a:lstStyle/>
-          <a:p>
-            <a:pPr algn="l">
-              <a:lnSpc>
-                <a:spcPct val="115000"/>
-              </a:lnSpc>
-              <a:spcAft>
-                <a:spcPts val="0"/>
-              </a:spcAft>
-            </a:pPr>
-            <a:r>
-              <a:rPr sz="1200" b="1" i="0">
-                <a:solidFill>
-                  <a:srgbClr val="0F7773"/>
-                </a:solidFill>
-                <a:latin typeface="Calibri"/>
-              </a:rPr>
-              <a:t>ABSTRACT</a:t>
-            </a:r>
-          </a:p>
-        </p:txBody>
-      </p:sp>
-      <p:sp>
-        <p:nvSpPr>
-          <p:cNvPr id="4" name="TextBox 3"/>
-          <p:cNvSpPr txBox="1"/>
-          <p:nvPr/>
-        </p:nvSpPr>
-        <p:spPr>
-          <a:xfrm>
-            <a:off x="566928" y="987552"/>
-            <a:ext cx="11064240" cy="685800"/>
-          </a:xfrm>
-          <a:prstGeom prst="rect">
-            <a:avLst/>
-          </a:prstGeom>
-          <a:noFill/>
-        </p:spPr>
-        <p:txBody>
-          <a:bodyPr wrap="square" lIns="0" rIns="0" tIns="0" bIns="0">
-            <a:spAutoFit/>
-          </a:bodyPr>
-          <a:lstStyle/>
-          <a:p>
-            <a:pPr algn="l">
-              <a:lnSpc>
-                <a:spcPct val="115000"/>
-              </a:lnSpc>
-              <a:spcAft>
-                <a:spcPts val="0"/>
-              </a:spcAft>
-            </a:pPr>
-            <a:r>
-              <a:rPr sz="3000" b="1" i="0">
-                <a:solidFill>
-                  <a:srgbClr val="1B335F"/>
-                </a:solidFill>
-                <a:latin typeface="Calibri"/>
-              </a:rPr>
-              <a:t>What we built and what it found</a:t>
-            </a:r>
-          </a:p>
-        </p:txBody>
-      </p:sp>
-      <p:sp>
-        <p:nvSpPr>
-          <p:cNvPr id="5" name="TextBox 4"/>
-          <p:cNvSpPr txBox="1"/>
-          <p:nvPr/>
-        </p:nvSpPr>
-        <p:spPr>
-          <a:xfrm>
-            <a:off x="11064240" y="6263640"/>
-            <a:ext cx="594360" cy="274320"/>
-          </a:xfrm>
-          <a:prstGeom prst="rect">
-            <a:avLst/>
-          </a:prstGeom>
-          <a:noFill/>
-        </p:spPr>
-        <p:txBody>
-          <a:bodyPr wrap="square" lIns="0" rIns="0" tIns="0" bIns="0">
-            <a:spAutoFit/>
-          </a:bodyPr>
-          <a:lstStyle/>
-          <a:p>
-            <a:pPr algn="r">
-              <a:lnSpc>
-                <a:spcPct val="115000"/>
-              </a:lnSpc>
-              <a:spcAft>
-                <a:spcPts val="0"/>
-              </a:spcAft>
-            </a:pPr>
-            <a:r>
-              <a:rPr sz="1100" b="0" i="0">
-                <a:solidFill>
-                  <a:srgbClr val="666B73"/>
-                </a:solidFill>
-                <a:latin typeface="Calibri"/>
-              </a:rPr>
-              <a:t>3</a:t>
-            </a:r>
-          </a:p>
-        </p:txBody>
-      </p:sp>
-      <p:sp>
-        <p:nvSpPr>
-          <p:cNvPr id="6" name="TextBox 5"/>
-          <p:cNvSpPr txBox="1"/>
-          <p:nvPr/>
-        </p:nvSpPr>
-        <p:spPr>
-          <a:xfrm>
-            <a:off x="566928" y="1783080"/>
-            <a:ext cx="11064240" cy="4206240"/>
-          </a:xfrm>
-          <a:prstGeom prst="rect">
-            <a:avLst/>
-          </a:prstGeom>
-          <a:noFill/>
-        </p:spPr>
-        <p:txBody>
-          <a:bodyPr wrap="square" lIns="0" rIns="0" tIns="0" bIns="0">
-            <a:spAutoFit/>
-          </a:bodyPr>
-          <a:lstStyle/>
-          <a:p>
-            <a:pPr>
-              <a:lnSpc>
-                <a:spcPct val="118000"/>
-              </a:lnSpc>
-              <a:spcAft>
-                <a:spcPts val="1500"/>
-              </a:spcAft>
-            </a:pPr>
-            <a:r>
-              <a:rPr sz="1600">
-                <a:solidFill>
-                  <a:srgbClr val="0F7773"/>
-                </a:solidFill>
-                <a:latin typeface="Calibri"/>
-              </a:rPr>
-              <a:t>▪  </a:t>
-            </a:r>
-            <a:r>
-              <a:rPr sz="1600" b="1">
-                <a:solidFill>
-                  <a:srgbClr val="1B335F"/>
-                </a:solidFill>
-                <a:latin typeface="Calibri"/>
-              </a:rPr>
-              <a:t>Nine clustering protocols plus a no-clustering baseline </a:t>
-            </a:r>
-            <a:r>
-              <a:rPr sz="1600">
-                <a:solidFill>
-                  <a:srgbClr val="2B2B2B"/>
-                </a:solidFill>
-                <a:latin typeface="Calibri"/>
-              </a:rPr>
-              <a:t>run on a single engine that owns energy accounting, packet sizing, fusion, the channel and the counting of delivered readings. A protocol returns only a cluster structure.</a:t>
-            </a:r>
-          </a:p>
-          <a:p>
-            <a:pPr>
-              <a:lnSpc>
-                <a:spcPct val="118000"/>
-              </a:lnSpc>
-              <a:spcAft>
-                <a:spcPts val="1500"/>
-              </a:spcAft>
-            </a:pPr>
-            <a:r>
-              <a:rPr sz="1600">
-                <a:solidFill>
-                  <a:srgbClr val="0F7773"/>
-                </a:solidFill>
-                <a:latin typeface="Calibri"/>
-              </a:rPr>
-              <a:t>▪  </a:t>
-            </a:r>
-            <a:r>
-              <a:rPr sz="1600" b="1">
-                <a:solidFill>
-                  <a:srgbClr val="1B335F"/>
-                </a:solidFill>
-                <a:latin typeface="Calibri"/>
-              </a:rPr>
-              <a:t>Trials are paired. </a:t>
-            </a:r>
-            <a:r>
-              <a:rPr sz="1600">
-                <a:solidFill>
-                  <a:srgbClr val="2B2B2B"/>
-                </a:solidFill>
-                <a:latin typeface="Calibri"/>
-              </a:rPr>
-              <a:t>At a given run index every protocol sees the same topology, the same per-link shadowing and the same sensor readings, so differences are tested with sign-flip permutation, paired bootstrap intervals and Holm correction.</a:t>
-            </a:r>
-          </a:p>
-          <a:p>
-            <a:pPr>
-              <a:lnSpc>
-                <a:spcPct val="118000"/>
-              </a:lnSpc>
-              <a:spcAft>
-                <a:spcPts val="1500"/>
-              </a:spcAft>
-            </a:pPr>
-            <a:r>
-              <a:rPr sz="1600">
-                <a:solidFill>
-                  <a:srgbClr val="0F7773"/>
-                </a:solidFill>
-                <a:latin typeface="Calibri"/>
-              </a:rPr>
-              <a:t>▪  </a:t>
-            </a:r>
-            <a:r>
-              <a:rPr sz="1600" b="1">
-                <a:solidFill>
-                  <a:srgbClr val="1B335F"/>
-                </a:solidFill>
-                <a:latin typeface="Calibri"/>
-              </a:rPr>
-              <a:t>1,950 runs in total: </a:t>
-            </a:r>
-            <a:r>
-              <a:rPr sz="1600">
-                <a:solidFill>
-                  <a:srgbClr val="2B2B2B"/>
-                </a:solidFill>
-                <a:latin typeface="Calibri"/>
-              </a:rPr>
-              <a:t>600 across two channel configurations, and 1,350 across a grid of three node counts by three field areas.</a:t>
-            </a:r>
-          </a:p>
-          <a:p>
-            <a:pPr>
-              <a:lnSpc>
-                <a:spcPct val="118000"/>
-              </a:lnSpc>
-              <a:spcAft>
-                <a:spcPts val="1500"/>
-              </a:spcAft>
-            </a:pPr>
-            <a:r>
-              <a:rPr sz="1600">
-                <a:solidFill>
-                  <a:srgbClr val="0F7773"/>
-                </a:solidFill>
-                <a:latin typeface="Calibri"/>
-              </a:rPr>
-              <a:t>▪  </a:t>
-            </a:r>
-            <a:r>
-              <a:rPr sz="1600" b="1">
-                <a:solidFill>
-                  <a:srgbClr val="1B335F"/>
-                </a:solidFill>
-                <a:latin typeface="Calibri"/>
-              </a:rPr>
-              <a:t>Bracketing transmit power retracts one of our own comparisons. </a:t>
-            </a:r>
-            <a:r>
-              <a:rPr sz="1600">
-                <a:solidFill>
-                  <a:srgbClr val="2B2B2B"/>
-                </a:solidFill>
-                <a:latin typeface="Calibri"/>
-              </a:rPr>
-              <a:t>The fuzzy and deep Q-network advantage over LEACH is +417 and +426 rounds with packet loss, and falls to +17 and +22 rounds, no longer significant, once loss is removed.</a:t>
-            </a:r>
-          </a:p>
-          <a:p>
-            <a:pPr>
-              <a:lnSpc>
-                <a:spcPct val="118000"/>
-              </a:lnSpc>
-              <a:spcAft>
-                <a:spcPts val="1500"/>
-              </a:spcAft>
-            </a:pPr>
-            <a:r>
-              <a:rPr sz="1600">
-                <a:solidFill>
-                  <a:srgbClr val="0F7773"/>
-                </a:solidFill>
-                <a:latin typeface="Calibri"/>
-              </a:rPr>
-              <a:t>▪  </a:t>
-            </a:r>
-            <a:r>
-              <a:rPr sz="1600" b="1">
-                <a:solidFill>
-                  <a:srgbClr val="1B335F"/>
-                </a:solidFill>
-                <a:latin typeface="Calibri"/>
-              </a:rPr>
-              <a:t>The scale sweep finds the same boundary from the other side. </a:t>
-            </a:r>
-            <a:r>
-              <a:rPr sz="1600">
-                <a:solidFill>
-                  <a:srgbClr val="2B2B2B"/>
-                </a:solidFill>
-                <a:latin typeface="Calibri"/>
-              </a:rPr>
-              <a:t>Distance to the sink sets the regime, not node density, and in a 50 x 50 m field clustering is worse than no clustering at all.</a:t>
-            </a:r>
-          </a:p>
-        </p:txBody>
-      </p:sp>
-    </p:spTree>
-  </p:cSld>
-  <p:clrMapOvr>
-    <a:masterClrMapping/>
-  </p:clrMapOvr>
-</p:sld>
-</file>
-
-<file path=ppt/slides/slide4.xml><?xml version="1.0" encoding="utf-8"?>
-<p:sld xmlns:a="http://schemas.openxmlformats.org/drawingml/2006/main" xmlns:p="http://schemas.openxmlformats.org/presentationml/2006/main" xmlns:r="http://schemas.openxmlformats.org/officeDocument/2006/relationships">
-  <p:cSld>
-    <p:spTree>
-      <p:nvGrpSpPr>
-        <p:cNvPr id="1" name=""/>
-        <p:cNvGrpSpPr/>
-        <p:nvPr/>
-      </p:nvGrpSpPr>
-      <p:grpSpPr/>
-      <p:sp>
-        <p:nvSpPr>
-          <p:cNvPr id="2" name="Rectangle 1"/>
-          <p:cNvSpPr/>
-          <p:nvPr/>
-        </p:nvSpPr>
-        <p:spPr>
-          <a:xfrm>
-            <a:off x="566928" y="475488"/>
-            <a:ext cx="1051560" cy="50292"/>
-          </a:xfrm>
-          <a:prstGeom prst="rect">
-            <a:avLst/>
-          </a:prstGeom>
-          <a:solidFill>
-            <a:srgbClr val="0F7773"/>
-          </a:solidFill>
-          <a:ln>
-            <a:noFill/>
-          </a:ln>
-          <a:effectLst/>
-        </p:spPr>
-        <p:style>
-          <a:lnRef idx="1">
-            <a:schemeClr val="accent1"/>
-          </a:lnRef>
-          <a:fillRef idx="3">
-            <a:schemeClr val="accent1"/>
-          </a:fillRef>
-          <a:effectRef idx="2">
-            <a:schemeClr val="accent1"/>
-          </a:effectRef>
-          <a:fontRef idx="minor">
-            <a:schemeClr val="lt1"/>
-          </a:fontRef>
-        </p:style>
-        <p:txBody>
-          <a:bodyPr rtlCol="0" anchor="ctr"/>
-          <a:lstStyle/>
-          <a:p>
-            <a:pPr algn="ctr"/>
-          </a:p>
-        </p:txBody>
-      </p:sp>
-      <p:sp>
-        <p:nvSpPr>
-          <p:cNvPr id="3" name="TextBox 2"/>
-          <p:cNvSpPr txBox="1"/>
-          <p:nvPr/>
-        </p:nvSpPr>
-        <p:spPr>
-          <a:xfrm>
-            <a:off x="566928" y="658368"/>
-            <a:ext cx="10058400" cy="274320"/>
-          </a:xfrm>
-          <a:prstGeom prst="rect">
-            <a:avLst/>
-          </a:prstGeom>
-          <a:noFill/>
-        </p:spPr>
-        <p:txBody>
-          <a:bodyPr wrap="square" lIns="0" rIns="0" tIns="0" bIns="0">
-            <a:spAutoFit/>
-          </a:bodyPr>
-          <a:lstStyle/>
-          <a:p>
-            <a:pPr algn="l">
-              <a:lnSpc>
-                <a:spcPct val="115000"/>
-              </a:lnSpc>
-              <a:spcAft>
-                <a:spcPts val="0"/>
-              </a:spcAft>
-            </a:pPr>
-            <a:r>
-              <a:rPr sz="1200" b="1" i="0">
-                <a:solidFill>
-                  <a:srgbClr val="0F7773"/>
-                </a:solidFill>
-                <a:latin typeface="Calibri"/>
-              </a:rPr>
-              <a:t>INTRODUCTION</a:t>
-            </a:r>
-          </a:p>
-        </p:txBody>
-      </p:sp>
-      <p:sp>
-        <p:nvSpPr>
-          <p:cNvPr id="4" name="TextBox 3"/>
-          <p:cNvSpPr txBox="1"/>
-          <p:nvPr/>
-        </p:nvSpPr>
-        <p:spPr>
-          <a:xfrm>
-            <a:off x="566928" y="987552"/>
-            <a:ext cx="11064240" cy="685800"/>
-          </a:xfrm>
-          <a:prstGeom prst="rect">
-            <a:avLst/>
-          </a:prstGeom>
-          <a:noFill/>
-        </p:spPr>
-        <p:txBody>
-          <a:bodyPr wrap="square" lIns="0" rIns="0" tIns="0" bIns="0">
-            <a:spAutoFit/>
-          </a:bodyPr>
-          <a:lstStyle/>
-          <a:p>
-            <a:pPr algn="l">
-              <a:lnSpc>
-                <a:spcPct val="115000"/>
-              </a:lnSpc>
-              <a:spcAft>
-                <a:spcPts val="0"/>
-              </a:spcAft>
-            </a:pPr>
-            <a:r>
-              <a:rPr sz="3000" b="1" i="0">
-                <a:solidFill>
-                  <a:srgbClr val="1B335F"/>
-                </a:solidFill>
-                <a:latin typeface="Calibri"/>
-              </a:rPr>
-              <a:t>Scope, motivation and the hard parts</a:t>
-            </a:r>
-          </a:p>
-        </p:txBody>
-      </p:sp>
-      <p:sp>
-        <p:nvSpPr>
-          <p:cNvPr id="5" name="TextBox 4"/>
-          <p:cNvSpPr txBox="1"/>
-          <p:nvPr/>
-        </p:nvSpPr>
-        <p:spPr>
-          <a:xfrm>
-            <a:off x="11064240" y="6263640"/>
-            <a:ext cx="594360" cy="274320"/>
-          </a:xfrm>
-          <a:prstGeom prst="rect">
-            <a:avLst/>
-          </a:prstGeom>
-          <a:noFill/>
-        </p:spPr>
-        <p:txBody>
-          <a:bodyPr wrap="square" lIns="0" rIns="0" tIns="0" bIns="0">
-            <a:spAutoFit/>
-          </a:bodyPr>
-          <a:lstStyle/>
-          <a:p>
-            <a:pPr algn="r">
-              <a:lnSpc>
-                <a:spcPct val="115000"/>
-              </a:lnSpc>
-              <a:spcAft>
-                <a:spcPts val="0"/>
-              </a:spcAft>
-            </a:pPr>
-            <a:r>
-              <a:rPr sz="1100" b="0" i="0">
-                <a:solidFill>
-                  <a:srgbClr val="666B73"/>
-                </a:solidFill>
-                <a:latin typeface="Calibri"/>
-              </a:rPr>
-              <a:t>4</a:t>
-            </a:r>
-          </a:p>
-        </p:txBody>
-      </p:sp>
-      <p:sp>
-        <p:nvSpPr>
-          <p:cNvPr id="6" name="Rectangle 5"/>
-          <p:cNvSpPr/>
-          <p:nvPr/>
-        </p:nvSpPr>
-        <p:spPr>
-          <a:xfrm>
-            <a:off x="566928" y="1783080"/>
-            <a:ext cx="3529584" cy="45720"/>
-          </a:xfrm>
-          <a:prstGeom prst="rect">
-            <a:avLst/>
-          </a:prstGeom>
-          <a:solidFill>
-            <a:srgbClr val="0F7773"/>
-          </a:solidFill>
-          <a:ln>
-            <a:noFill/>
-          </a:ln>
-          <a:effectLst/>
-        </p:spPr>
-        <p:style>
-          <a:lnRef idx="1">
-            <a:schemeClr val="accent1"/>
-          </a:lnRef>
-          <a:fillRef idx="3">
-            <a:schemeClr val="accent1"/>
-          </a:fillRef>
-          <a:effectRef idx="2">
-            <a:schemeClr val="accent1"/>
-          </a:effectRef>
-          <a:fontRef idx="minor">
-            <a:schemeClr val="lt1"/>
-          </a:fontRef>
-        </p:style>
-        <p:txBody>
-          <a:bodyPr rtlCol="0" anchor="ctr"/>
-          <a:lstStyle/>
-          <a:p>
-            <a:pPr algn="ctr"/>
-          </a:p>
-        </p:txBody>
-      </p:sp>
-      <p:sp>
-        <p:nvSpPr>
-          <p:cNvPr id="7" name="TextBox 6"/>
-          <p:cNvSpPr txBox="1"/>
-          <p:nvPr/>
-        </p:nvSpPr>
-        <p:spPr>
-          <a:xfrm>
-            <a:off x="566928" y="2011680"/>
-            <a:ext cx="3529584" cy="320040"/>
-          </a:xfrm>
-          <a:prstGeom prst="rect">
-            <a:avLst/>
-          </a:prstGeom>
-          <a:noFill/>
-        </p:spPr>
-        <p:txBody>
-          <a:bodyPr wrap="square" lIns="0" rIns="0" tIns="0" bIns="0">
-            <a:spAutoFit/>
-          </a:bodyPr>
-          <a:lstStyle/>
-          <a:p>
-            <a:pPr algn="l">
-              <a:lnSpc>
-                <a:spcPct val="115000"/>
-              </a:lnSpc>
-              <a:spcAft>
-                <a:spcPts val="0"/>
-              </a:spcAft>
-            </a:pPr>
-            <a:r>
-              <a:rPr sz="1300" b="1" i="0">
-                <a:solidFill>
-                  <a:srgbClr val="0F7773"/>
-                </a:solidFill>
-                <a:latin typeface="Calibri"/>
-              </a:rPr>
-              <a:t>SCOPE</a:t>
-            </a:r>
-          </a:p>
-        </p:txBody>
-      </p:sp>
-      <p:sp>
-        <p:nvSpPr>
-          <p:cNvPr id="8" name="TextBox 7"/>
-          <p:cNvSpPr txBox="1"/>
-          <p:nvPr/>
-        </p:nvSpPr>
-        <p:spPr>
-          <a:xfrm>
-            <a:off x="566928" y="2514600"/>
-            <a:ext cx="3529584" cy="3291840"/>
-          </a:xfrm>
-          <a:prstGeom prst="rect">
-            <a:avLst/>
-          </a:prstGeom>
-          <a:noFill/>
-        </p:spPr>
-        <p:txBody>
-          <a:bodyPr wrap="square" lIns="0" rIns="0" tIns="0" bIns="0">
-            <a:spAutoFit/>
-          </a:bodyPr>
-          <a:lstStyle/>
-          <a:p>
-            <a:pPr>
-              <a:lnSpc>
-                <a:spcPct val="118000"/>
-              </a:lnSpc>
-              <a:spcAft>
-                <a:spcPts val="1100"/>
-              </a:spcAft>
-            </a:pPr>
-            <a:r>
-              <a:rPr sz="1400">
-                <a:solidFill>
-                  <a:srgbClr val="0F7773"/>
-                </a:solidFill>
-                <a:latin typeface="Calibri"/>
-              </a:rPr>
-              <a:t>▪  </a:t>
-            </a:r>
-            <a:r>
-              <a:rPr sz="1400">
-                <a:solidFill>
-                  <a:srgbClr val="2B2B2B"/>
-                </a:solidFill>
-                <a:latin typeface="Calibri"/>
-              </a:rPr>
-              <a:t>10 configurations, 3 generations, 1 engine</a:t>
-            </a:r>
-          </a:p>
-          <a:p>
-            <a:pPr>
-              <a:lnSpc>
-                <a:spcPct val="118000"/>
-              </a:lnSpc>
-              <a:spcAft>
-                <a:spcPts val="1100"/>
-              </a:spcAft>
-            </a:pPr>
-            <a:r>
-              <a:rPr sz="1400">
-                <a:solidFill>
-                  <a:srgbClr val="0F7773"/>
-                </a:solidFill>
-                <a:latin typeface="Calibri"/>
-              </a:rPr>
-              <a:t>▪  </a:t>
-            </a:r>
-            <a:r>
-              <a:rPr sz="1400">
-                <a:solidFill>
-                  <a:srgbClr val="2B2B2B"/>
-                </a:solidFill>
-                <a:latin typeface="Calibri"/>
-              </a:rPr>
-              <a:t>100 nodes in 100 x 100 m, sink at (50, 150)</a:t>
-            </a:r>
-          </a:p>
-          <a:p>
-            <a:pPr>
-              <a:lnSpc>
-                <a:spcPct val="118000"/>
-              </a:lnSpc>
-              <a:spcAft>
-                <a:spcPts val="1100"/>
-              </a:spcAft>
-            </a:pPr>
-            <a:r>
-              <a:rPr sz="1400">
-                <a:solidFill>
-                  <a:srgbClr val="0F7773"/>
-                </a:solidFill>
-                <a:latin typeface="Calibri"/>
-              </a:rPr>
-              <a:t>▪  </a:t>
-            </a:r>
-            <a:r>
-              <a:rPr sz="1400">
-                <a:solidFill>
-                  <a:srgbClr val="2B2B2B"/>
-                </a:solidFill>
-                <a:latin typeface="Calibri"/>
-              </a:rPr>
-              <a:t>Two channels: with and without packet loss</a:t>
-            </a:r>
-          </a:p>
-          <a:p>
-            <a:pPr>
-              <a:lnSpc>
-                <a:spcPct val="118000"/>
-              </a:lnSpc>
-              <a:spcAft>
-                <a:spcPts val="1100"/>
-              </a:spcAft>
-            </a:pPr>
-            <a:r>
-              <a:rPr sz="1400">
-                <a:solidFill>
-                  <a:srgbClr val="0F7773"/>
-                </a:solidFill>
-                <a:latin typeface="Calibri"/>
-              </a:rPr>
-              <a:t>▪  </a:t>
-            </a:r>
-            <a:r>
-              <a:rPr sz="1400">
-                <a:solidFill>
-                  <a:srgbClr val="2B2B2B"/>
-                </a:solidFill>
-                <a:latin typeface="Calibri"/>
-              </a:rPr>
-              <a:t>Nine deployment scales, 50 to 150 m fields</a:t>
-            </a:r>
-          </a:p>
-          <a:p>
-            <a:pPr>
-              <a:lnSpc>
-                <a:spcPct val="118000"/>
-              </a:lnSpc>
-              <a:spcAft>
-                <a:spcPts val="1100"/>
-              </a:spcAft>
-            </a:pPr>
-            <a:r>
-              <a:rPr sz="1400">
-                <a:solidFill>
-                  <a:srgbClr val="0F7773"/>
-                </a:solidFill>
-                <a:latin typeface="Calibri"/>
-              </a:rPr>
-              <a:t>▪  </a:t>
-            </a:r>
-            <a:r>
-              <a:rPr sz="1400">
-                <a:solidFill>
-                  <a:srgbClr val="2B2B2B"/>
-                </a:solidFill>
-                <a:latin typeface="Calibri"/>
-              </a:rPr>
-              <a:t>Homogeneous, static nodes; failure by energy only</a:t>
-            </a:r>
-          </a:p>
-        </p:txBody>
-      </p:sp>
-      <p:sp>
-        <p:nvSpPr>
-          <p:cNvPr id="9" name="Rectangle 8"/>
-          <p:cNvSpPr/>
-          <p:nvPr/>
-        </p:nvSpPr>
-        <p:spPr>
-          <a:xfrm>
-            <a:off x="4343400" y="1783080"/>
-            <a:ext cx="3529584" cy="45720"/>
-          </a:xfrm>
-          <a:prstGeom prst="rect">
-            <a:avLst/>
-          </a:prstGeom>
-          <a:solidFill>
-            <a:srgbClr val="1B335F"/>
-          </a:solidFill>
-          <a:ln>
-            <a:noFill/>
-          </a:ln>
-          <a:effectLst/>
-        </p:spPr>
-        <p:style>
-          <a:lnRef idx="1">
-            <a:schemeClr val="accent1"/>
-          </a:lnRef>
-          <a:fillRef idx="3">
-            <a:schemeClr val="accent1"/>
-          </a:fillRef>
-          <a:effectRef idx="2">
-            <a:schemeClr val="accent1"/>
-          </a:effectRef>
-          <a:fontRef idx="minor">
-            <a:schemeClr val="lt1"/>
-          </a:fontRef>
-        </p:style>
-        <p:txBody>
-          <a:bodyPr rtlCol="0" anchor="ctr"/>
-          <a:lstStyle/>
-          <a:p>
-            <a:pPr algn="ctr"/>
-          </a:p>
-        </p:txBody>
-      </p:sp>
-      <p:sp>
-        <p:nvSpPr>
-          <p:cNvPr id="10" name="TextBox 9"/>
-          <p:cNvSpPr txBox="1"/>
-          <p:nvPr/>
-        </p:nvSpPr>
-        <p:spPr>
-          <a:xfrm>
-            <a:off x="4343400" y="2011680"/>
-            <a:ext cx="3529584" cy="320040"/>
-          </a:xfrm>
-          <a:prstGeom prst="rect">
-            <a:avLst/>
-          </a:prstGeom>
-          <a:noFill/>
-        </p:spPr>
-        <p:txBody>
-          <a:bodyPr wrap="square" lIns="0" rIns="0" tIns="0" bIns="0">
-            <a:spAutoFit/>
-          </a:bodyPr>
-          <a:lstStyle/>
-          <a:p>
-            <a:pPr algn="l">
-              <a:lnSpc>
-                <a:spcPct val="115000"/>
-              </a:lnSpc>
-              <a:spcAft>
-                <a:spcPts val="0"/>
-              </a:spcAft>
-            </a:pPr>
-            <a:r>
-              <a:rPr sz="1300" b="1" i="0">
-                <a:solidFill>
-                  <a:srgbClr val="1B335F"/>
-                </a:solidFill>
-                <a:latin typeface="Calibri"/>
-              </a:rPr>
-              <a:t>MOTIVATION</a:t>
-            </a:r>
-          </a:p>
-        </p:txBody>
-      </p:sp>
-      <p:sp>
-        <p:nvSpPr>
-          <p:cNvPr id="11" name="TextBox 10"/>
-          <p:cNvSpPr txBox="1"/>
-          <p:nvPr/>
-        </p:nvSpPr>
-        <p:spPr>
-          <a:xfrm>
-            <a:off x="4343400" y="2514600"/>
-            <a:ext cx="3529584" cy="3291840"/>
-          </a:xfrm>
-          <a:prstGeom prst="rect">
-            <a:avLst/>
-          </a:prstGeom>
-          <a:noFill/>
-        </p:spPr>
-        <p:txBody>
-          <a:bodyPr wrap="square" lIns="0" rIns="0" tIns="0" bIns="0">
-            <a:spAutoFit/>
-          </a:bodyPr>
-          <a:lstStyle/>
-          <a:p>
-            <a:pPr>
-              <a:lnSpc>
-                <a:spcPct val="118000"/>
-              </a:lnSpc>
-              <a:spcAft>
-                <a:spcPts val="1100"/>
-              </a:spcAft>
-            </a:pPr>
-            <a:r>
-              <a:rPr sz="1400">
-                <a:solidFill>
-                  <a:srgbClr val="1B335F"/>
-                </a:solidFill>
-                <a:latin typeface="Calibri"/>
-              </a:rPr>
-              <a:t>▪  </a:t>
-            </a:r>
-            <a:r>
-              <a:rPr sz="1400">
-                <a:solidFill>
-                  <a:srgbClr val="2B2B2B"/>
-                </a:solidFill>
-                <a:latin typeface="Calibri"/>
-              </a:rPr>
-              <a:t>A designer choosing a protocol today cannot get a straight answer out of the literature</a:t>
-            </a:r>
-          </a:p>
-          <a:p>
-            <a:pPr>
-              <a:lnSpc>
-                <a:spcPct val="118000"/>
-              </a:lnSpc>
-              <a:spcAft>
-                <a:spcPts val="1100"/>
-              </a:spcAft>
-            </a:pPr>
-            <a:r>
-              <a:rPr sz="1400">
-                <a:solidFill>
-                  <a:srgbClr val="1B335F"/>
-                </a:solidFill>
-                <a:latin typeface="Calibri"/>
-              </a:rPr>
-              <a:t>▪  </a:t>
-            </a:r>
-            <a:r>
-              <a:rPr sz="1400">
-                <a:solidFill>
-                  <a:srgbClr val="2B2B2B"/>
-                </a:solidFill>
-                <a:latin typeface="Calibri"/>
-              </a:rPr>
-              <a:t>Reported gains are entangled with the harness that produced them</a:t>
-            </a:r>
-          </a:p>
-          <a:p>
-            <a:pPr>
-              <a:lnSpc>
-                <a:spcPct val="118000"/>
-              </a:lnSpc>
-              <a:spcAft>
-                <a:spcPts val="1100"/>
-              </a:spcAft>
-            </a:pPr>
-            <a:r>
-              <a:rPr sz="1400">
-                <a:solidFill>
-                  <a:srgbClr val="1B335F"/>
-                </a:solidFill>
-                <a:latin typeface="Calibri"/>
-              </a:rPr>
-              <a:t>▪  </a:t>
-            </a:r>
-            <a:r>
-              <a:rPr sz="1400">
-                <a:solidFill>
-                  <a:srgbClr val="2B2B2B"/>
-                </a:solidFill>
-                <a:latin typeface="Calibri"/>
-              </a:rPr>
-              <a:t>Learned protocols are arriving fast, with no common yardstick against the heuristics they claim to beat</a:t>
-            </a:r>
-          </a:p>
-        </p:txBody>
-      </p:sp>
-      <p:sp>
-        <p:nvSpPr>
-          <p:cNvPr id="12" name="Rectangle 11"/>
-          <p:cNvSpPr/>
-          <p:nvPr/>
-        </p:nvSpPr>
-        <p:spPr>
-          <a:xfrm>
-            <a:off x="8119871" y="1783080"/>
-            <a:ext cx="3529584" cy="45720"/>
-          </a:xfrm>
-          <a:prstGeom prst="rect">
-            <a:avLst/>
-          </a:prstGeom>
-          <a:solidFill>
-            <a:srgbClr val="A83A1E"/>
-          </a:solidFill>
-          <a:ln>
-            <a:noFill/>
-          </a:ln>
-          <a:effectLst/>
-        </p:spPr>
-        <p:style>
-          <a:lnRef idx="1">
-            <a:schemeClr val="accent1"/>
-          </a:lnRef>
-          <a:fillRef idx="3">
-            <a:schemeClr val="accent1"/>
-          </a:fillRef>
-          <a:effectRef idx="2">
-            <a:schemeClr val="accent1"/>
-          </a:effectRef>
-          <a:fontRef idx="minor">
-            <a:schemeClr val="lt1"/>
-          </a:fontRef>
-        </p:style>
-        <p:txBody>
-          <a:bodyPr rtlCol="0" anchor="ctr"/>
-          <a:lstStyle/>
-          <a:p>
-            <a:pPr algn="ctr"/>
-          </a:p>
-        </p:txBody>
-      </p:sp>
-      <p:sp>
-        <p:nvSpPr>
-          <p:cNvPr id="13" name="TextBox 12"/>
-          <p:cNvSpPr txBox="1"/>
-          <p:nvPr/>
-        </p:nvSpPr>
-        <p:spPr>
-          <a:xfrm>
-            <a:off x="8119871" y="2011680"/>
-            <a:ext cx="3529584" cy="320040"/>
-          </a:xfrm>
-          <a:prstGeom prst="rect">
-            <a:avLst/>
-          </a:prstGeom>
-          <a:noFill/>
-        </p:spPr>
-        <p:txBody>
-          <a:bodyPr wrap="square" lIns="0" rIns="0" tIns="0" bIns="0">
-            <a:spAutoFit/>
-          </a:bodyPr>
-          <a:lstStyle/>
-          <a:p>
-            <a:pPr algn="l">
-              <a:lnSpc>
-                <a:spcPct val="115000"/>
-              </a:lnSpc>
-              <a:spcAft>
-                <a:spcPts val="0"/>
-              </a:spcAft>
-            </a:pPr>
-            <a:r>
-              <a:rPr sz="1300" b="1" i="0">
-                <a:solidFill>
-                  <a:srgbClr val="A83A1E"/>
-                </a:solidFill>
-                <a:latin typeface="Calibri"/>
-              </a:rPr>
-              <a:t>CHALLENGES</a:t>
-            </a:r>
-          </a:p>
-        </p:txBody>
-      </p:sp>
-      <p:sp>
-        <p:nvSpPr>
-          <p:cNvPr id="14" name="TextBox 13"/>
-          <p:cNvSpPr txBox="1"/>
-          <p:nvPr/>
-        </p:nvSpPr>
-        <p:spPr>
-          <a:xfrm>
-            <a:off x="8119871" y="2514600"/>
-            <a:ext cx="3529584" cy="3291840"/>
-          </a:xfrm>
-          <a:prstGeom prst="rect">
-            <a:avLst/>
-          </a:prstGeom>
-          <a:noFill/>
-        </p:spPr>
-        <p:txBody>
-          <a:bodyPr wrap="square" lIns="0" rIns="0" tIns="0" bIns="0">
-            <a:spAutoFit/>
-          </a:bodyPr>
-          <a:lstStyle/>
-          <a:p>
-            <a:pPr>
-              <a:lnSpc>
-                <a:spcPct val="118000"/>
-              </a:lnSpc>
-              <a:spcAft>
-                <a:spcPts val="1100"/>
-              </a:spcAft>
-            </a:pPr>
-            <a:r>
-              <a:rPr sz="1400">
-                <a:solidFill>
-                  <a:srgbClr val="A83A1E"/>
-                </a:solidFill>
-                <a:latin typeface="Calibri"/>
-              </a:rPr>
-              <a:t>▪  </a:t>
-            </a:r>
-            <a:r>
-              <a:rPr sz="1400">
-                <a:solidFill>
-                  <a:srgbClr val="2B2B2B"/>
-                </a:solidFill>
-                <a:latin typeface="Calibri"/>
-              </a:rPr>
-              <a:t>Fairness has to be structural, not promised in prose</a:t>
-            </a:r>
-          </a:p>
-          <a:p>
-            <a:pPr>
-              <a:lnSpc>
-                <a:spcPct val="118000"/>
-              </a:lnSpc>
-              <a:spcAft>
-                <a:spcPts val="1100"/>
-              </a:spcAft>
-            </a:pPr>
-            <a:r>
-              <a:rPr sz="1400">
-                <a:solidFill>
-                  <a:srgbClr val="A83A1E"/>
-                </a:solidFill>
-                <a:latin typeface="Calibri"/>
-              </a:rPr>
-              <a:t>▪  </a:t>
-            </a:r>
-            <a:r>
-              <a:rPr sz="1400">
-                <a:solidFill>
-                  <a:srgbClr val="2B2B2B"/>
-                </a:solidFill>
-                <a:latin typeface="Calibri"/>
-              </a:rPr>
-              <a:t>Topology variance is larger than the differences between protocols, so unpaired tests waste their power</a:t>
-            </a:r>
-          </a:p>
-          <a:p>
-            <a:pPr>
-              <a:lnSpc>
-                <a:spcPct val="118000"/>
-              </a:lnSpc>
-              <a:spcAft>
-                <a:spcPts val="1100"/>
-              </a:spcAft>
-            </a:pPr>
-            <a:r>
-              <a:rPr sz="1400">
-                <a:solidFill>
-                  <a:srgbClr val="A83A1E"/>
-                </a:solidFill>
-                <a:latin typeface="Calibri"/>
-              </a:rPr>
-              <a:t>▪  </a:t>
-            </a:r>
-            <a:r>
-              <a:rPr sz="1400">
-                <a:solidFill>
-                  <a:srgbClr val="2B2B2B"/>
-                </a:solidFill>
-                <a:latin typeface="Calibri"/>
-              </a:rPr>
-              <a:t>Unspecified parameters, transmit power above all, can decide the ranking outright</a:t>
-            </a:r>
-          </a:p>
-          <a:p>
-            <a:pPr>
-              <a:lnSpc>
-                <a:spcPct val="118000"/>
-              </a:lnSpc>
-              <a:spcAft>
-                <a:spcPts val="1100"/>
-              </a:spcAft>
-            </a:pPr>
-            <a:r>
-              <a:rPr sz="1400">
-                <a:solidFill>
-                  <a:srgbClr val="A83A1E"/>
-                </a:solidFill>
-                <a:latin typeface="Calibri"/>
-              </a:rPr>
-              <a:t>▪  </a:t>
-            </a:r>
-            <a:r>
-              <a:rPr sz="1400">
-                <a:solidFill>
-                  <a:srgbClr val="2B2B2B"/>
-                </a:solidFill>
-                <a:latin typeface="Calibri"/>
-              </a:rPr>
-              <a:t>Accounting choices are worth more than the algorithms</a:t>
-            </a:r>
-          </a:p>
-        </p:txBody>
-      </p:sp>
-      <p:sp>
-        <p:nvSpPr>
-          <p:cNvPr id="15" name="TextBox 14"/>
-          <p:cNvSpPr txBox="1"/>
-          <p:nvPr/>
-        </p:nvSpPr>
-        <p:spPr>
-          <a:xfrm>
-            <a:off x="566928" y="5989320"/>
-            <a:ext cx="11064240" cy="457200"/>
-          </a:xfrm>
-          <a:prstGeom prst="rect">
-            <a:avLst/>
-          </a:prstGeom>
-          <a:noFill/>
-        </p:spPr>
-        <p:txBody>
-          <a:bodyPr wrap="square" lIns="0" rIns="0" tIns="0" bIns="0">
-            <a:spAutoFit/>
-          </a:bodyPr>
-          <a:lstStyle/>
-          <a:p>
-            <a:pPr algn="l">
-              <a:lnSpc>
-                <a:spcPct val="115000"/>
-              </a:lnSpc>
-              <a:spcAft>
-                <a:spcPts val="0"/>
-              </a:spcAft>
-            </a:pPr>
-            <a:r>
-              <a:rPr sz="1400" b="0" i="1">
-                <a:solidFill>
-                  <a:srgbClr val="666B73"/>
-                </a:solidFill>
-                <a:latin typeface="Calibri"/>
-              </a:rPr>
-              <a:t>Standing rule: no protocol is tuned to reproduce a published number. Disagreement with the source tables is expected, not an error.</a:t>
-            </a:r>
-          </a:p>
-        </p:txBody>
-      </p:sp>
-    </p:spTree>
-  </p:cSld>
-  <p:clrMapOvr>
-    <a:masterClrMapping/>
-  </p:clrMapOvr>
-</p:sld>
-</file>
-
-<file path=ppt/slides/slide5.xml><?xml version="1.0" encoding="utf-8"?>
-<p:sld xmlns:a="http://schemas.openxmlformats.org/drawingml/2006/main" xmlns:p="http://schemas.openxmlformats.org/presentationml/2006/main" xmlns:r="http://schemas.openxmlformats.org/officeDocument/2006/relationships">
-  <p:cSld>
-    <p:spTree>
-      <p:nvGrpSpPr>
-        <p:cNvPr id="1" name=""/>
-        <p:cNvGrpSpPr/>
-        <p:nvPr/>
-      </p:nvGrpSpPr>
-      <p:grpSpPr/>
-      <p:sp>
-        <p:nvSpPr>
-          <p:cNvPr id="2" name="Rectangle 1"/>
-          <p:cNvSpPr/>
-          <p:nvPr/>
-        </p:nvSpPr>
-        <p:spPr>
-          <a:xfrm>
-            <a:off x="566928" y="475488"/>
-            <a:ext cx="1051560" cy="50292"/>
-          </a:xfrm>
-          <a:prstGeom prst="rect">
-            <a:avLst/>
-          </a:prstGeom>
-          <a:solidFill>
-            <a:srgbClr val="0F7773"/>
-          </a:solidFill>
-          <a:ln>
-            <a:noFill/>
-          </a:ln>
-          <a:effectLst/>
-        </p:spPr>
-        <p:style>
-          <a:lnRef idx="1">
-            <a:schemeClr val="accent1"/>
-          </a:lnRef>
-          <a:fillRef idx="3">
-            <a:schemeClr val="accent1"/>
-          </a:fillRef>
-          <a:effectRef idx="2">
-            <a:schemeClr val="accent1"/>
-          </a:effectRef>
-          <a:fontRef idx="minor">
-            <a:schemeClr val="lt1"/>
-          </a:fontRef>
-        </p:style>
-        <p:txBody>
-          <a:bodyPr rtlCol="0" anchor="ctr"/>
-          <a:lstStyle/>
-          <a:p>
-            <a:pPr algn="ctr"/>
-          </a:p>
-        </p:txBody>
-      </p:sp>
-      <p:sp>
-        <p:nvSpPr>
-          <p:cNvPr id="3" name="TextBox 2"/>
-          <p:cNvSpPr txBox="1"/>
-          <p:nvPr/>
-        </p:nvSpPr>
-        <p:spPr>
-          <a:xfrm>
-            <a:off x="566928" y="658368"/>
-            <a:ext cx="10058400" cy="274320"/>
-          </a:xfrm>
-          <a:prstGeom prst="rect">
-            <a:avLst/>
-          </a:prstGeom>
-          <a:noFill/>
-        </p:spPr>
-        <p:txBody>
-          <a:bodyPr wrap="square" lIns="0" rIns="0" tIns="0" bIns="0">
-            <a:spAutoFit/>
-          </a:bodyPr>
-          <a:lstStyle/>
-          <a:p>
-            <a:pPr algn="l">
-              <a:lnSpc>
-                <a:spcPct val="115000"/>
-              </a:lnSpc>
-              <a:spcAft>
-                <a:spcPts val="0"/>
-              </a:spcAft>
-            </a:pPr>
-            <a:r>
-              <a:rPr sz="1200" b="1" i="0">
-                <a:solidFill>
-                  <a:srgbClr val="0F7773"/>
-                </a:solidFill>
-                <a:latin typeface="Calibri"/>
-              </a:rPr>
-              <a:t>LITERATURE SURVEY</a:t>
-            </a:r>
-          </a:p>
-        </p:txBody>
-      </p:sp>
-      <p:sp>
-        <p:nvSpPr>
-          <p:cNvPr id="4" name="TextBox 3"/>
-          <p:cNvSpPr txBox="1"/>
-          <p:nvPr/>
-        </p:nvSpPr>
-        <p:spPr>
-          <a:xfrm>
-            <a:off x="566928" y="987552"/>
-            <a:ext cx="11064240" cy="685800"/>
-          </a:xfrm>
-          <a:prstGeom prst="rect">
-            <a:avLst/>
-          </a:prstGeom>
-          <a:noFill/>
-        </p:spPr>
-        <p:txBody>
-          <a:bodyPr wrap="square" lIns="0" rIns="0" tIns="0" bIns="0">
-            <a:spAutoFit/>
-          </a:bodyPr>
-          <a:lstStyle/>
-          <a:p>
-            <a:pPr algn="l">
-              <a:lnSpc>
-                <a:spcPct val="115000"/>
-              </a:lnSpc>
-              <a:spcAft>
-                <a:spcPts val="0"/>
-              </a:spcAft>
-            </a:pPr>
-            <a:r>
-              <a:rPr sz="3000" b="1" i="0">
-                <a:solidFill>
-                  <a:srgbClr val="1B335F"/>
-                </a:solidFill>
-                <a:latin typeface="Calibri"/>
-              </a:rPr>
-              <a:t>Three generations of answers to one question</a:t>
-            </a:r>
-          </a:p>
-        </p:txBody>
-      </p:sp>
-      <p:sp>
-        <p:nvSpPr>
-          <p:cNvPr id="5" name="TextBox 4"/>
-          <p:cNvSpPr txBox="1"/>
-          <p:nvPr/>
-        </p:nvSpPr>
-        <p:spPr>
-          <a:xfrm>
-            <a:off x="11064240" y="6263640"/>
-            <a:ext cx="594360" cy="274320"/>
-          </a:xfrm>
-          <a:prstGeom prst="rect">
-            <a:avLst/>
-          </a:prstGeom>
-          <a:noFill/>
-        </p:spPr>
-        <p:txBody>
-          <a:bodyPr wrap="square" lIns="0" rIns="0" tIns="0" bIns="0">
+          <a:bodyPr wrap="square" lIns="0" tIns="0" rIns="0" bIns="0">
             <a:spAutoFit/>
           </a:bodyPr>
           <a:lstStyle/>
@@ -7436,7 +6181,7 @@
         </p:nvGraphicFramePr>
         <p:xfrm>
           <a:off x="566928" y="1783080"/>
-          <a:ext cx="7406640" cy="2798064"/>
+          <a:ext cx="7406640" cy="2889504"/>
         </p:xfrm>
         <a:graphic>
           <a:graphicData uri="http://schemas.openxmlformats.org/drawingml/2006/table">
@@ -7445,10 +6190,34 @@
                 <a:tableStyleId>{5C22544A-7EE6-4342-B048-85BDC9FD1C3A}</a:tableStyleId>
               </a:tblPr>
               <a:tblGrid>
-                <a:gridCol w="548640"/>
-                <a:gridCol w="1600200"/>
-                <a:gridCol w="3703320"/>
-                <a:gridCol w="1554480"/>
+                <a:gridCol w="548640">
+                  <a:extLst>
+                    <a:ext uri="{9D8B030D-6E8A-4147-A177-3AD203B41FA5}">
+                      <a16:colId xmlns:a16="http://schemas.microsoft.com/office/drawing/2014/main" val="20000"/>
+                    </a:ext>
+                  </a:extLst>
+                </a:gridCol>
+                <a:gridCol w="1600200">
+                  <a:extLst>
+                    <a:ext uri="{9D8B030D-6E8A-4147-A177-3AD203B41FA5}">
+                      <a16:colId xmlns:a16="http://schemas.microsoft.com/office/drawing/2014/main" val="20001"/>
+                    </a:ext>
+                  </a:extLst>
+                </a:gridCol>
+                <a:gridCol w="3703320">
+                  <a:extLst>
+                    <a:ext uri="{9D8B030D-6E8A-4147-A177-3AD203B41FA5}">
+                      <a16:colId xmlns:a16="http://schemas.microsoft.com/office/drawing/2014/main" val="20002"/>
+                    </a:ext>
+                  </a:extLst>
+                </a:gridCol>
+                <a:gridCol w="1554480">
+                  <a:extLst>
+                    <a:ext uri="{9D8B030D-6E8A-4147-A177-3AD203B41FA5}">
+                      <a16:colId xmlns:a16="http://schemas.microsoft.com/office/drawing/2014/main" val="20003"/>
+                    </a:ext>
+                  </a:extLst>
+                </a:gridCol>
               </a:tblGrid>
               <a:tr h="310896">
                 <a:tc>
@@ -7559,6 +6328,11 @@
                     </a:solidFill>
                   </a:tcPr>
                 </a:tc>
+                <a:extLst>
+                  <a:ext uri="{0D108BD9-81ED-4DB2-BD59-A6C34878D82A}">
+                    <a16:rowId xmlns:a16="http://schemas.microsoft.com/office/drawing/2014/main" val="10000"/>
+                  </a:ext>
+                </a:extLst>
               </a:tr>
               <a:tr h="310896">
                 <a:tc>
@@ -7669,6 +6443,11 @@
                     </a:solidFill>
                   </a:tcPr>
                 </a:tc>
+                <a:extLst>
+                  <a:ext uri="{0D108BD9-81ED-4DB2-BD59-A6C34878D82A}">
+                    <a16:rowId xmlns:a16="http://schemas.microsoft.com/office/drawing/2014/main" val="10001"/>
+                  </a:ext>
+                </a:extLst>
               </a:tr>
               <a:tr h="310896">
                 <a:tc>
@@ -7779,6 +6558,11 @@
                     </a:solidFill>
                   </a:tcPr>
                 </a:tc>
+                <a:extLst>
+                  <a:ext uri="{0D108BD9-81ED-4DB2-BD59-A6C34878D82A}">
+                    <a16:rowId xmlns:a16="http://schemas.microsoft.com/office/drawing/2014/main" val="10002"/>
+                  </a:ext>
+                </a:extLst>
               </a:tr>
               <a:tr h="310896">
                 <a:tc>
@@ -7889,6 +6673,11 @@
                     </a:solidFill>
                   </a:tcPr>
                 </a:tc>
+                <a:extLst>
+                  <a:ext uri="{0D108BD9-81ED-4DB2-BD59-A6C34878D82A}">
+                    <a16:rowId xmlns:a16="http://schemas.microsoft.com/office/drawing/2014/main" val="10003"/>
+                  </a:ext>
+                </a:extLst>
               </a:tr>
               <a:tr h="310896">
                 <a:tc>
@@ -7999,6 +6788,11 @@
                     </a:solidFill>
                   </a:tcPr>
                 </a:tc>
+                <a:extLst>
+                  <a:ext uri="{0D108BD9-81ED-4DB2-BD59-A6C34878D82A}">
+                    <a16:rowId xmlns:a16="http://schemas.microsoft.com/office/drawing/2014/main" val="10004"/>
+                  </a:ext>
+                </a:extLst>
               </a:tr>
               <a:tr h="310896">
                 <a:tc>
@@ -8109,6 +6903,11 @@
                     </a:solidFill>
                   </a:tcPr>
                 </a:tc>
+                <a:extLst>
+                  <a:ext uri="{0D108BD9-81ED-4DB2-BD59-A6C34878D82A}">
+                    <a16:rowId xmlns:a16="http://schemas.microsoft.com/office/drawing/2014/main" val="10005"/>
+                  </a:ext>
+                </a:extLst>
               </a:tr>
               <a:tr h="310896">
                 <a:tc>
@@ -8219,6 +7018,11 @@
                     </a:solidFill>
                   </a:tcPr>
                 </a:tc>
+                <a:extLst>
+                  <a:ext uri="{0D108BD9-81ED-4DB2-BD59-A6C34878D82A}">
+                    <a16:rowId xmlns:a16="http://schemas.microsoft.com/office/drawing/2014/main" val="10006"/>
+                  </a:ext>
+                </a:extLst>
               </a:tr>
               <a:tr h="310896">
                 <a:tc>
@@ -8329,6 +7133,11 @@
                     </a:solidFill>
                   </a:tcPr>
                 </a:tc>
+                <a:extLst>
+                  <a:ext uri="{0D108BD9-81ED-4DB2-BD59-A6C34878D82A}">
+                    <a16:rowId xmlns:a16="http://schemas.microsoft.com/office/drawing/2014/main" val="10007"/>
+                  </a:ext>
+                </a:extLst>
               </a:tr>
               <a:tr h="310896">
                 <a:tc>
@@ -8439,6 +7248,11 @@
                     </a:solidFill>
                   </a:tcPr>
                 </a:tc>
+                <a:extLst>
+                  <a:ext uri="{0D108BD9-81ED-4DB2-BD59-A6C34878D82A}">
+                    <a16:rowId xmlns:a16="http://schemas.microsoft.com/office/drawing/2014/main" val="10008"/>
+                  </a:ext>
+                </a:extLst>
               </a:tr>
             </a:tbl>
           </a:graphicData>
@@ -8452,8 +7266,8 @@
         </p:nvSpPr>
         <p:spPr>
           <a:xfrm>
-            <a:off x="8275320" y="1783080"/>
-            <a:ext cx="3355848" cy="3108960"/>
+            <a:off x="8174736" y="1783080"/>
+            <a:ext cx="3456432" cy="3026664"/>
           </a:xfrm>
           <a:prstGeom prst="rect">
             <a:avLst/>
@@ -8487,6 +7301,7 @@
           <a:lstStyle/>
           <a:p>
             <a:pPr algn="ctr"/>
+            <a:endParaRPr/>
           </a:p>
         </p:txBody>
       </p:sp>
@@ -8498,8 +7313,8 @@
         </p:nvSpPr>
         <p:spPr>
           <a:xfrm>
-            <a:off x="8522208" y="2011680"/>
-            <a:ext cx="2880360" cy="2697480"/>
+            <a:off x="8348472" y="1975104"/>
+            <a:ext cx="3182112" cy="2697480"/>
           </a:xfrm>
           <a:prstGeom prst="rect">
             <a:avLst/>
@@ -8507,7 +7322,7 @@
           <a:noFill/>
         </p:spPr>
         <p:txBody>
-          <a:bodyPr wrap="square" lIns="0" rIns="0" tIns="0" bIns="0">
+          <a:bodyPr wrap="square" lIns="0" tIns="0" rIns="0" bIns="0">
             <a:spAutoFit/>
           </a:bodyPr>
           <a:lstStyle/>
@@ -8521,7 +7336,7 @@
               </a:spcAft>
             </a:pPr>
             <a:r>
-              <a:rPr sz="1200" b="1" i="0">
+              <a:rPr sz="1200" b="1" i="0" dirty="0">
                 <a:solidFill>
                   <a:srgbClr val="A83A1E"/>
                 </a:solidFill>
@@ -8540,7 +7355,7 @@
               </a:spcAft>
             </a:pPr>
             <a:r>
-              <a:rPr sz="1400" b="0" i="0">
+              <a:rPr sz="1400" b="0" i="0" dirty="0">
                 <a:solidFill>
                   <a:srgbClr val="2B2B2B"/>
                 </a:solidFill>
@@ -8559,7 +7374,7 @@
               </a:spcAft>
             </a:pPr>
             <a:r>
-              <a:rPr sz="1400" b="0" i="0">
+              <a:rPr sz="1400" b="0" i="0" dirty="0">
                 <a:solidFill>
                   <a:srgbClr val="2B2B2B"/>
                 </a:solidFill>
@@ -8578,7 +7393,7 @@
               </a:spcAft>
             </a:pPr>
             <a:r>
-              <a:rPr sz="1400" b="1" i="0">
+              <a:rPr sz="1400" b="1" i="0" dirty="0">
                 <a:solidFill>
                   <a:srgbClr val="A83A1E"/>
                 </a:solidFill>
@@ -8606,7 +7421,7 @@
           <a:noFill/>
         </p:spPr>
         <p:txBody>
-          <a:bodyPr wrap="square" lIns="0" rIns="0" tIns="0" bIns="0">
+          <a:bodyPr wrap="square" lIns="0" tIns="0" rIns="0" bIns="0">
             <a:spAutoFit/>
           </a:bodyPr>
           <a:lstStyle/>
@@ -8640,7 +7455,7 @@
 </file>
 
 <file path=ppt/slides/slide6.xml><?xml version="1.0" encoding="utf-8"?>
-<p:sld xmlns:a="http://schemas.openxmlformats.org/drawingml/2006/main" xmlns:p="http://schemas.openxmlformats.org/presentationml/2006/main" xmlns:r="http://schemas.openxmlformats.org/officeDocument/2006/relationships">
+<p:sld xmlns:a="http://schemas.openxmlformats.org/drawingml/2006/main" xmlns:r="http://schemas.openxmlformats.org/officeDocument/2006/relationships" xmlns:p="http://schemas.openxmlformats.org/presentationml/2006/main">
   <p:cSld>
     <p:spTree>
       <p:nvGrpSpPr>
@@ -8648,7 +7463,14 @@
         <p:cNvGrpSpPr/>
         <p:nvPr/>
       </p:nvGrpSpPr>
-      <p:grpSpPr/>
+      <p:grpSpPr>
+        <a:xfrm>
+          <a:off x="0" y="0"/>
+          <a:ext cx="0" cy="0"/>
+          <a:chOff x="0" y="0"/>
+          <a:chExt cx="0" cy="0"/>
+        </a:xfrm>
+      </p:grpSpPr>
       <p:sp>
         <p:nvSpPr>
           <p:cNvPr id="2" name="Rectangle 1"/>
@@ -8690,6 +7512,7 @@
           <a:lstStyle/>
           <a:p>
             <a:pPr algn="ctr"/>
+            <a:endParaRPr/>
           </a:p>
         </p:txBody>
       </p:sp>
@@ -8710,7 +7533,7 @@
           <a:noFill/>
         </p:spPr>
         <p:txBody>
-          <a:bodyPr wrap="square" lIns="0" rIns="0" tIns="0" bIns="0">
+          <a:bodyPr wrap="square" lIns="0" tIns="0" rIns="0" bIns="0">
             <a:spAutoFit/>
           </a:bodyPr>
           <a:lstStyle/>
@@ -8752,7 +7575,7 @@
           <a:noFill/>
         </p:spPr>
         <p:txBody>
-          <a:bodyPr wrap="square" lIns="0" rIns="0" tIns="0" bIns="0">
+          <a:bodyPr wrap="square" lIns="0" tIns="0" rIns="0" bIns="0">
             <a:spAutoFit/>
           </a:bodyPr>
           <a:lstStyle/>
@@ -8794,7 +7617,7 @@
           <a:noFill/>
         </p:spPr>
         <p:txBody>
-          <a:bodyPr wrap="square" lIns="0" rIns="0" tIns="0" bIns="0">
+          <a:bodyPr wrap="square" lIns="0" tIns="0" rIns="0" bIns="0">
             <a:spAutoFit/>
           </a:bodyPr>
           <a:lstStyle/>
@@ -8862,6 +7685,7 @@
           <a:lstStyle/>
           <a:p>
             <a:pPr algn="ctr"/>
+            <a:endParaRPr/>
           </a:p>
         </p:txBody>
       </p:sp>
@@ -8906,6 +7730,7 @@
           <a:lstStyle/>
           <a:p>
             <a:pPr algn="ctr"/>
+            <a:endParaRPr/>
           </a:p>
         </p:txBody>
       </p:sp>
@@ -8926,7 +7751,7 @@
           <a:noFill/>
         </p:spPr>
         <p:txBody>
-          <a:bodyPr wrap="square" lIns="0" rIns="0" tIns="0" bIns="0">
+          <a:bodyPr wrap="square" lIns="0" tIns="0" rIns="0" bIns="0">
             <a:spAutoFit/>
           </a:bodyPr>
           <a:lstStyle/>
@@ -8968,7 +7793,7 @@
           <a:noFill/>
         </p:spPr>
         <p:txBody>
-          <a:bodyPr wrap="square" lIns="0" rIns="0" tIns="0" bIns="0">
+          <a:bodyPr wrap="square" lIns="0" tIns="0" rIns="0" bIns="0">
             <a:spAutoFit/>
           </a:bodyPr>
           <a:lstStyle/>
@@ -9129,6 +7954,7 @@
           <a:lstStyle/>
           <a:p>
             <a:pPr algn="ctr"/>
+            <a:endParaRPr/>
           </a:p>
         </p:txBody>
       </p:sp>
@@ -9173,6 +7999,7 @@
           <a:lstStyle/>
           <a:p>
             <a:pPr algn="ctr"/>
+            <a:endParaRPr/>
           </a:p>
         </p:txBody>
       </p:sp>
@@ -9193,7 +8020,7 @@
           <a:noFill/>
         </p:spPr>
         <p:txBody>
-          <a:bodyPr wrap="square" lIns="0" rIns="0" tIns="0" bIns="0">
+          <a:bodyPr wrap="square" lIns="0" tIns="0" rIns="0" bIns="0">
             <a:spAutoFit/>
           </a:bodyPr>
           <a:lstStyle/>
@@ -9235,7 +8062,7 @@
           <a:noFill/>
         </p:spPr>
         <p:txBody>
-          <a:bodyPr wrap="square" lIns="0" rIns="0" tIns="0" bIns="0">
+          <a:bodyPr wrap="square" lIns="0" tIns="0" rIns="0" bIns="0">
             <a:spAutoFit/>
           </a:bodyPr>
           <a:lstStyle/>
@@ -9368,6 +8195,7 @@
           <a:lstStyle/>
           <a:p>
             <a:pPr algn="ctr"/>
+            <a:endParaRPr/>
           </a:p>
         </p:txBody>
       </p:sp>
@@ -9412,6 +8240,7 @@
           <a:lstStyle/>
           <a:p>
             <a:pPr algn="ctr"/>
+            <a:endParaRPr/>
           </a:p>
         </p:txBody>
       </p:sp>
@@ -9432,7 +8261,7 @@
           <a:noFill/>
         </p:spPr>
         <p:txBody>
-          <a:bodyPr wrap="square" lIns="0" rIns="0" tIns="0" bIns="0">
+          <a:bodyPr wrap="square" lIns="0" tIns="0" rIns="0" bIns="0">
             <a:spAutoFit/>
           </a:bodyPr>
           <a:lstStyle/>
@@ -9474,7 +8303,7 @@
           <a:noFill/>
         </p:spPr>
         <p:txBody>
-          <a:bodyPr wrap="square" lIns="0" rIns="0" tIns="0" bIns="0">
+          <a:bodyPr wrap="square" lIns="0" tIns="0" rIns="0" bIns="0">
             <a:spAutoFit/>
           </a:bodyPr>
           <a:lstStyle/>
@@ -9607,6 +8436,7 @@
           <a:lstStyle/>
           <a:p>
             <a:pPr algn="ctr"/>
+            <a:endParaRPr/>
           </a:p>
         </p:txBody>
       </p:sp>
@@ -9627,7 +8457,7 @@
           <a:noFill/>
         </p:spPr>
         <p:txBody>
-          <a:bodyPr wrap="square" lIns="0" rIns="0" tIns="0" bIns="0">
+          <a:bodyPr wrap="square" lIns="0" tIns="0" rIns="0" bIns="0">
             <a:spAutoFit/>
           </a:bodyPr>
           <a:lstStyle/>
@@ -9699,7 +8529,7 @@
 </file>
 
 <file path=ppt/slides/slide7.xml><?xml version="1.0" encoding="utf-8"?>
-<p:sld xmlns:a="http://schemas.openxmlformats.org/drawingml/2006/main" xmlns:p="http://schemas.openxmlformats.org/presentationml/2006/main" xmlns:r="http://schemas.openxmlformats.org/officeDocument/2006/relationships">
+<p:sld xmlns:a="http://schemas.openxmlformats.org/drawingml/2006/main" xmlns:r="http://schemas.openxmlformats.org/officeDocument/2006/relationships" xmlns:p="http://schemas.openxmlformats.org/presentationml/2006/main">
   <p:cSld>
     <p:spTree>
       <p:nvGrpSpPr>
@@ -9707,7 +8537,14 @@
         <p:cNvGrpSpPr/>
         <p:nvPr/>
       </p:nvGrpSpPr>
-      <p:grpSpPr/>
+      <p:grpSpPr>
+        <a:xfrm>
+          <a:off x="0" y="0"/>
+          <a:ext cx="0" cy="0"/>
+          <a:chOff x="0" y="0"/>
+          <a:chExt cx="0" cy="0"/>
+        </a:xfrm>
+      </p:grpSpPr>
       <p:sp>
         <p:nvSpPr>
           <p:cNvPr id="2" name="Rectangle 1"/>
@@ -9749,6 +8586,7 @@
           <a:lstStyle/>
           <a:p>
             <a:pPr algn="ctr"/>
+            <a:endParaRPr/>
           </a:p>
         </p:txBody>
       </p:sp>
@@ -9769,7 +8607,7 @@
           <a:noFill/>
         </p:spPr>
         <p:txBody>
-          <a:bodyPr wrap="square" lIns="0" rIns="0" tIns="0" bIns="0">
+          <a:bodyPr wrap="square" lIns="0" tIns="0" rIns="0" bIns="0">
             <a:spAutoFit/>
           </a:bodyPr>
           <a:lstStyle/>
@@ -9811,7 +8649,7 @@
           <a:noFill/>
         </p:spPr>
         <p:txBody>
-          <a:bodyPr wrap="square" lIns="0" rIns="0" tIns="0" bIns="0">
+          <a:bodyPr wrap="square" lIns="0" tIns="0" rIns="0" bIns="0">
             <a:spAutoFit/>
           </a:bodyPr>
           <a:lstStyle/>
@@ -9853,7 +8691,7 @@
           <a:noFill/>
         </p:spPr>
         <p:txBody>
-          <a:bodyPr wrap="square" lIns="0" rIns="0" tIns="0" bIns="0">
+          <a:bodyPr wrap="square" lIns="0" tIns="0" rIns="0" bIns="0">
             <a:spAutoFit/>
           </a:bodyPr>
           <a:lstStyle/>
@@ -9921,6 +8759,7 @@
           <a:lstStyle/>
           <a:p>
             <a:pPr algn="ctr"/>
+            <a:endParaRPr/>
           </a:p>
         </p:txBody>
       </p:sp>
@@ -9941,7 +8780,7 @@
           <a:noFill/>
         </p:spPr>
         <p:txBody>
-          <a:bodyPr wrap="square" lIns="0" rIns="0" tIns="0" bIns="0">
+          <a:bodyPr wrap="square" lIns="0" tIns="0" rIns="0" bIns="0">
             <a:spAutoFit/>
           </a:bodyPr>
           <a:lstStyle/>
@@ -10028,6 +8867,7 @@
           <a:lstStyle/>
           <a:p>
             <a:pPr algn="ctr"/>
+            <a:endParaRPr/>
           </a:p>
         </p:txBody>
       </p:sp>
@@ -10048,7 +8888,7 @@
           <a:noFill/>
         </p:spPr>
         <p:txBody>
-          <a:bodyPr wrap="square" lIns="0" rIns="0" tIns="0" bIns="0">
+          <a:bodyPr wrap="square" lIns="0" tIns="0" rIns="0" bIns="0">
             <a:spAutoFit/>
           </a:bodyPr>
           <a:lstStyle/>
@@ -10128,7 +8968,7 @@
           <a:noFill/>
         </p:spPr>
         <p:txBody>
-          <a:bodyPr wrap="square" lIns="0" rIns="0" tIns="0" bIns="0">
+          <a:bodyPr wrap="square" lIns="0" tIns="0" rIns="0" bIns="0">
             <a:spAutoFit/>
           </a:bodyPr>
           <a:lstStyle/>
@@ -10291,7 +9131,7 @@
 </file>
 
 <file path=ppt/slides/slide8.xml><?xml version="1.0" encoding="utf-8"?>
-<p:sld xmlns:a="http://schemas.openxmlformats.org/drawingml/2006/main" xmlns:p="http://schemas.openxmlformats.org/presentationml/2006/main" xmlns:r="http://schemas.openxmlformats.org/officeDocument/2006/relationships">
+<p:sld xmlns:a="http://schemas.openxmlformats.org/drawingml/2006/main" xmlns:r="http://schemas.openxmlformats.org/officeDocument/2006/relationships" xmlns:p="http://schemas.openxmlformats.org/presentationml/2006/main">
   <p:cSld>
     <p:spTree>
       <p:nvGrpSpPr>
@@ -10299,7 +9139,14 @@
         <p:cNvGrpSpPr/>
         <p:nvPr/>
       </p:nvGrpSpPr>
-      <p:grpSpPr/>
+      <p:grpSpPr>
+        <a:xfrm>
+          <a:off x="0" y="0"/>
+          <a:ext cx="0" cy="0"/>
+          <a:chOff x="0" y="0"/>
+          <a:chExt cx="0" cy="0"/>
+        </a:xfrm>
+      </p:grpSpPr>
       <p:sp>
         <p:nvSpPr>
           <p:cNvPr id="2" name="Rectangle 1"/>
@@ -10341,6 +9188,7 @@
           <a:lstStyle/>
           <a:p>
             <a:pPr algn="ctr"/>
+            <a:endParaRPr/>
           </a:p>
         </p:txBody>
       </p:sp>
@@ -10361,7 +9209,7 @@
           <a:noFill/>
         </p:spPr>
         <p:txBody>
-          <a:bodyPr wrap="square" lIns="0" rIns="0" tIns="0" bIns="0">
+          <a:bodyPr wrap="square" lIns="0" tIns="0" rIns="0" bIns="0">
             <a:spAutoFit/>
           </a:bodyPr>
           <a:lstStyle/>
@@ -10403,7 +9251,7 @@
           <a:noFill/>
         </p:spPr>
         <p:txBody>
-          <a:bodyPr wrap="square" lIns="0" rIns="0" tIns="0" bIns="0">
+          <a:bodyPr wrap="square" lIns="0" tIns="0" rIns="0" bIns="0">
             <a:spAutoFit/>
           </a:bodyPr>
           <a:lstStyle/>
@@ -10445,7 +9293,7 @@
           <a:noFill/>
         </p:spPr>
         <p:txBody>
-          <a:bodyPr wrap="square" lIns="0" rIns="0" tIns="0" bIns="0">
+          <a:bodyPr wrap="square" lIns="0" tIns="0" rIns="0" bIns="0">
             <a:spAutoFit/>
           </a:bodyPr>
           <a:lstStyle/>
@@ -10487,7 +9335,7 @@
           <a:noFill/>
         </p:spPr>
         <p:txBody>
-          <a:bodyPr wrap="square" lIns="0" rIns="0" tIns="0" bIns="0">
+          <a:bodyPr wrap="square" lIns="0" tIns="0" rIns="0" bIns="0">
             <a:spAutoFit/>
           </a:bodyPr>
           <a:lstStyle/>
@@ -10719,7 +9567,7 @@
           <a:noFill/>
         </p:spPr>
         <p:txBody>
-          <a:bodyPr wrap="square" lIns="0" rIns="0" tIns="0" bIns="0">
+          <a:bodyPr wrap="square" lIns="0" tIns="0" rIns="0" bIns="0">
             <a:spAutoFit/>
           </a:bodyPr>
           <a:lstStyle/>
@@ -10753,7 +9601,7 @@
 </file>
 
 <file path=ppt/slides/slide9.xml><?xml version="1.0" encoding="utf-8"?>
-<p:sld xmlns:a="http://schemas.openxmlformats.org/drawingml/2006/main" xmlns:p="http://schemas.openxmlformats.org/presentationml/2006/main" xmlns:r="http://schemas.openxmlformats.org/officeDocument/2006/relationships">
+<p:sld xmlns:a="http://schemas.openxmlformats.org/drawingml/2006/main" xmlns:r="http://schemas.openxmlformats.org/officeDocument/2006/relationships" xmlns:p="http://schemas.openxmlformats.org/presentationml/2006/main">
   <p:cSld>
     <p:spTree>
       <p:nvGrpSpPr>
@@ -10761,7 +9609,14 @@
         <p:cNvGrpSpPr/>
         <p:nvPr/>
       </p:nvGrpSpPr>
-      <p:grpSpPr/>
+      <p:grpSpPr>
+        <a:xfrm>
+          <a:off x="0" y="0"/>
+          <a:ext cx="0" cy="0"/>
+          <a:chOff x="0" y="0"/>
+          <a:chExt cx="0" cy="0"/>
+        </a:xfrm>
+      </p:grpSpPr>
       <p:sp>
         <p:nvSpPr>
           <p:cNvPr id="2" name="Rectangle 1"/>
@@ -10803,6 +9658,7 @@
           <a:lstStyle/>
           <a:p>
             <a:pPr algn="ctr"/>
+            <a:endParaRPr/>
           </a:p>
         </p:txBody>
       </p:sp>
@@ -10823,7 +9679,7 @@
           <a:noFill/>
         </p:spPr>
         <p:txBody>
-          <a:bodyPr wrap="square" lIns="0" rIns="0" tIns="0" bIns="0">
+          <a:bodyPr wrap="square" lIns="0" tIns="0" rIns="0" bIns="0">
             <a:spAutoFit/>
           </a:bodyPr>
           <a:lstStyle/>
@@ -10843,7 +9699,7 @@
                 </a:solidFill>
                 <a:latin typeface="Calibri"/>
               </a:rPr>
-              <a:t>RESULTS I: LIFETIME AND THE CHANNEL</a:t>
+              <a:t>RESULTS SO FAR</a:t>
             </a:r>
           </a:p>
         </p:txBody>
@@ -10865,7 +9721,7 @@
           <a:noFill/>
         </p:spPr>
         <p:txBody>
-          <a:bodyPr wrap="square" lIns="0" rIns="0" tIns="0" bIns="0">
+          <a:bodyPr wrap="square" lIns="0" tIns="0" rIns="0" bIns="0">
             <a:spAutoFit/>
           </a:bodyPr>
           <a:lstStyle/>
@@ -10885,7 +9741,7 @@
                 </a:solidFill>
                 <a:latin typeface="Calibri"/>
               </a:rPr>
-              <a:t>What we found, and the one thing we take back</a:t>
+              <a:t>Four findings, and one of them retracts our own claim</a:t>
             </a:r>
           </a:p>
         </p:txBody>
@@ -10907,7 +9763,7 @@
           <a:noFill/>
         </p:spPr>
         <p:txBody>
-          <a:bodyPr wrap="square" lIns="0" rIns="0" tIns="0" bIns="0">
+          <a:bodyPr wrap="square" lIns="0" tIns="0" rIns="0" bIns="0">
             <a:spAutoFit/>
           </a:bodyPr>
           <a:lstStyle/>
@@ -10949,7 +9805,7 @@
           <a:noFill/>
         </p:spPr>
         <p:txBody>
-          <a:bodyPr wrap="square" lIns="0" rIns="0" tIns="0" bIns="0">
+          <a:bodyPr wrap="square" lIns="0" tIns="0" rIns="0" bIns="0">
             <a:spAutoFit/>
           </a:bodyPr>
           <a:lstStyle/>
@@ -10987,7 +9843,7 @@
                 </a:solidFill>
                 <a:latin typeface="Calibri"/>
               </a:rPr>
-              <a:t>LEACH reaches first node death at 1,046 rounds against the baseline's 114, a factor of 9.2. But its last node dies at 2,191 against the baseline's 3,202, so the baseline outlasts it by 46%.</a:t>
+              <a:t>LEACH reaches first node death at 1,046 rounds against the baseline's 114, a factor of 9.2. But its last node dies at 2,191 against the baseline's 3,202.</a:t>
             </a:r>
           </a:p>
           <a:p>
@@ -11024,7 +9880,7 @@
                 </a:solidFill>
                 <a:latin typeface="Calibri"/>
               </a:rPr>
-              <a:t>The fuzzy system and the deep Q-network beat LEACH by 417 and 426 rounds under packet loss, at the corrected floor. Remove the loss and the same comparisons give 17 and 22 rounds, no longer significant.</a:t>
+              <a:t>The fuzzy system and the deep Q-network beat LEACH by 417 and 426 rounds under packet loss. Remove the loss and the same comparisons give 17 and 22 rounds, no longer significant.</a:t>
             </a:r>
           </a:p>
           <a:p>
@@ -11061,7 +9917,7 @@
                 </a:solidFill>
                 <a:latin typeface="Calibri"/>
               </a:rPr>
-              <a:t>Packet error is near zero below 120 m and every protocol's mean head distance sits below that, so the mean cannot be it. LEACH puts 29.9% of its head-rounds beyond 120 m and spends 6.39% of its budget retransmitting; the Q-network puts 5.1% out there and spends 2.31%.</a:t>
+              <a:t>Packet error is near zero below 120 m and every protocol's mean head distance sits below that. LEACH puts 29.9% of its head-rounds beyond 120 m and spends 6.39% of its budget retransmitting; the Q-network puts 5.1% out there and spends 2.31%.</a:t>
             </a:r>
           </a:p>
           <a:p>
@@ -11089,7 +9945,7 @@
                 </a:solidFill>
                 <a:latin typeface="Calibri"/>
               </a:rPr>
-              <a:t>What survives both channels. </a:t>
+              <a:t>It is a regime, not a rule. </a:t>
             </a:r>
             <a:r>
               <a:rPr sz="1500">
@@ -11098,7 +9954,7 @@
                 </a:solidFill>
                 <a:latin typeface="Calibri"/>
               </a:rPr>
-              <a:t>Area under the alive-node curve and readings delivered: all 18 comparisons hold at the corrected floor either way.</a:t>
+              <a:t>In a 50 x 50 m field, where no link reaches the error waterfall, the no-clustering baseline outlives LEACH.</a:t>
             </a:r>
           </a:p>
         </p:txBody>
@@ -11144,7 +10000,7 @@
           <a:noFill/>
         </p:spPr>
         <p:txBody>
-          <a:bodyPr wrap="square" lIns="0" rIns="0" tIns="0" bIns="0">
+          <a:bodyPr wrap="square" lIns="0" tIns="0" rIns="0" bIns="0">
             <a:spAutoFit/>
           </a:bodyPr>
           <a:lstStyle/>
@@ -11212,6 +10068,7 @@
           <a:lstStyle/>
           <a:p>
             <a:pPr algn="ctr"/>
+            <a:endParaRPr/>
           </a:p>
         </p:txBody>
       </p:sp>
@@ -11232,7 +10089,7 @@
           <a:noFill/>
         </p:spPr>
         <p:txBody>
-          <a:bodyPr wrap="square" lIns="0" rIns="0" tIns="0" bIns="0">
+          <a:bodyPr wrap="square" lIns="0" tIns="0" rIns="0" bIns="0">
             <a:spAutoFit/>
           </a:bodyPr>
           <a:lstStyle/>
